--- a/chapter15/ASE_15_Stabalization_Release.pptx
+++ b/chapter15/ASE_15_Stabalization_Release.pptx
@@ -1,31 +1,31 @@
 
 <file path=ppt/presentation.xml><?xml version="1.0" encoding="utf-8"?>
-<p:presentation xmlns:a="http://schemas.openxmlformats.org/drawingml/2006/main" xmlns:r="http://schemas.openxmlformats.org/officeDocument/2006/relationships" xmlns:p="http://schemas.openxmlformats.org/presentationml/2006/main" saveSubsetFonts="1">
+<p:presentation xmlns:a="http://schemas.openxmlformats.org/drawingml/2006/main" xmlns:r="http://schemas.openxmlformats.org/officeDocument/2006/relationships" xmlns:p="http://schemas.openxmlformats.org/presentationml/2006/main">
   <p:sldMasterIdLst>
-    <p:sldMasterId id="2147483792" r:id="rId4"/>
+    <p:sldMasterId id="2147483648" r:id="rId1"/>
   </p:sldMasterIdLst>
   <p:notesMasterIdLst>
-    <p:notesMasterId r:id="rId23"/>
+    <p:notesMasterId r:id="rId4"/>
   </p:notesMasterIdLst>
   <p:sldIdLst>
-    <p:sldId id="256" r:id="rId5"/>
-    <p:sldId id="257" r:id="rId6"/>
-    <p:sldId id="258" r:id="rId7"/>
-    <p:sldId id="259" r:id="rId8"/>
-    <p:sldId id="260" r:id="rId9"/>
-    <p:sldId id="261" r:id="rId10"/>
-    <p:sldId id="267" r:id="rId11"/>
-    <p:sldId id="268" r:id="rId12"/>
-    <p:sldId id="269" r:id="rId13"/>
-    <p:sldId id="270" r:id="rId14"/>
-    <p:sldId id="265" r:id="rId15"/>
-    <p:sldId id="271" r:id="rId16"/>
-    <p:sldId id="272" r:id="rId17"/>
-    <p:sldId id="262" r:id="rId18"/>
-    <p:sldId id="263" r:id="rId19"/>
-    <p:sldId id="266" r:id="rId20"/>
-    <p:sldId id="264" r:id="rId21"/>
-    <p:sldId id="273" r:id="rId22"/>
+    <p:sldId id="256" r:id="rId3"/>
+    <p:sldId id="257" r:id="rId5"/>
+    <p:sldId id="258" r:id="rId6"/>
+    <p:sldId id="259" r:id="rId7"/>
+    <p:sldId id="260" r:id="rId8"/>
+    <p:sldId id="261" r:id="rId9"/>
+    <p:sldId id="267" r:id="rId10"/>
+    <p:sldId id="268" r:id="rId11"/>
+    <p:sldId id="269" r:id="rId12"/>
+    <p:sldId id="270" r:id="rId13"/>
+    <p:sldId id="265" r:id="rId14"/>
+    <p:sldId id="271" r:id="rId15"/>
+    <p:sldId id="272" r:id="rId16"/>
+    <p:sldId id="262" r:id="rId17"/>
+    <p:sldId id="263" r:id="rId18"/>
+    <p:sldId id="266" r:id="rId19"/>
+    <p:sldId id="264" r:id="rId20"/>
+    <p:sldId id="273" r:id="rId21"/>
   </p:sldIdLst>
   <p:sldSz cx="12192000" cy="6858000"/>
   <p:notesSz cx="6858000" cy="9144000"/>
@@ -143,890 +143,6 @@
 </p:presentation>
 </file>
 
-<file path=ppt/changesInfos/changesInfo1.xml><?xml version="1.0" encoding="utf-8"?>
-<pc:chgInfo xmlns:a="http://schemas.openxmlformats.org/drawingml/2006/main" xmlns:r="http://schemas.openxmlformats.org/officeDocument/2006/relationships" xmlns:ac="http://schemas.microsoft.com/office/drawing/2013/main/command" xmlns:pc="http://schemas.microsoft.com/office/powerpoint/2013/main/command">
-  <pc:docChgLst>
-    <pc:chgData name="Xin Zou" userId="260b9726081dae15" providerId="LiveId" clId="{5DEDE413-6DE6-4CB0-ACD2-A9E3F5BCC88D}"/>
-    <pc:docChg chg="modSld">
-      <pc:chgData name="Xin Zou" userId="260b9726081dae15" providerId="LiveId" clId="{5DEDE413-6DE6-4CB0-ACD2-A9E3F5BCC88D}" dt="2019-09-04T07:56:36.720" v="1" actId="20577"/>
-      <pc:docMkLst>
-        <pc:docMk/>
-      </pc:docMkLst>
-      <pc:sldChg chg="modSp">
-        <pc:chgData name="Xin Zou" userId="260b9726081dae15" providerId="LiveId" clId="{5DEDE413-6DE6-4CB0-ACD2-A9E3F5BCC88D}" dt="2019-09-04T07:56:36.720" v="1" actId="20577"/>
-        <pc:sldMkLst>
-          <pc:docMk/>
-          <pc:sldMk cId="0" sldId="256"/>
-        </pc:sldMkLst>
-        <pc:spChg chg="mod">
-          <ac:chgData name="Xin Zou" userId="260b9726081dae15" providerId="LiveId" clId="{5DEDE413-6DE6-4CB0-ACD2-A9E3F5BCC88D}" dt="2019-09-04T07:56:36.720" v="1" actId="20577"/>
-          <ac:spMkLst>
-            <pc:docMk/>
-            <pc:sldMk cId="0" sldId="256"/>
-            <ac:spMk id="3" creationId="{00000000-0000-0000-0000-000000000000}"/>
-          </ac:spMkLst>
-        </pc:spChg>
-      </pc:sldChg>
-    </pc:docChg>
-  </pc:docChgLst>
-  <pc:docChgLst>
-    <pc:chgData name="Xin Zou" userId="260b9726081dae15" providerId="LiveId" clId="{B55CB833-3568-49B5-9D65-A0FB87B7FBB5}"/>
-    <pc:docChg chg="custSel mod addSld delSld modSld sldOrd modMainMaster">
-      <pc:chgData name="Xin Zou" userId="260b9726081dae15" providerId="LiveId" clId="{B55CB833-3568-49B5-9D65-A0FB87B7FBB5}" dt="2018-10-08T03:19:30.701" v="532" actId="20577"/>
-      <pc:docMkLst>
-        <pc:docMk/>
-      </pc:docMkLst>
-      <pc:sldChg chg="modSp">
-        <pc:chgData name="Xin Zou" userId="260b9726081dae15" providerId="LiveId" clId="{B55CB833-3568-49B5-9D65-A0FB87B7FBB5}" dt="2018-10-08T00:53:51.566" v="9" actId="20577"/>
-        <pc:sldMkLst>
-          <pc:docMk/>
-          <pc:sldMk cId="0" sldId="256"/>
-        </pc:sldMkLst>
-        <pc:spChg chg="mod">
-          <ac:chgData name="Xin Zou" userId="260b9726081dae15" providerId="LiveId" clId="{B55CB833-3568-49B5-9D65-A0FB87B7FBB5}" dt="2018-10-08T00:53:51.566" v="9" actId="20577"/>
-          <ac:spMkLst>
-            <pc:docMk/>
-            <pc:sldMk cId="0" sldId="256"/>
-            <ac:spMk id="3" creationId="{00000000-0000-0000-0000-000000000000}"/>
-          </ac:spMkLst>
-        </pc:spChg>
-      </pc:sldChg>
-      <pc:sldChg chg="modSp">
-        <pc:chgData name="Xin Zou" userId="260b9726081dae15" providerId="LiveId" clId="{B55CB833-3568-49B5-9D65-A0FB87B7FBB5}" dt="2018-10-08T00:52:05.549" v="1" actId="27636"/>
-        <pc:sldMkLst>
-          <pc:docMk/>
-          <pc:sldMk cId="2017066462" sldId="258"/>
-        </pc:sldMkLst>
-        <pc:spChg chg="mod">
-          <ac:chgData name="Xin Zou" userId="260b9726081dae15" providerId="LiveId" clId="{B55CB833-3568-49B5-9D65-A0FB87B7FBB5}" dt="2018-10-08T00:52:05.549" v="1" actId="27636"/>
-          <ac:spMkLst>
-            <pc:docMk/>
-            <pc:sldMk cId="2017066462" sldId="258"/>
-            <ac:spMk id="3" creationId="{00000000-0000-0000-0000-000000000000}"/>
-          </ac:spMkLst>
-        </pc:spChg>
-      </pc:sldChg>
-      <pc:sldChg chg="modSp">
-        <pc:chgData name="Xin Zou" userId="260b9726081dae15" providerId="LiveId" clId="{B55CB833-3568-49B5-9D65-A0FB87B7FBB5}" dt="2018-10-08T00:52:04.753" v="0"/>
-        <pc:sldMkLst>
-          <pc:docMk/>
-          <pc:sldMk cId="4228803550" sldId="259"/>
-        </pc:sldMkLst>
-        <pc:picChg chg="mod">
-          <ac:chgData name="Xin Zou" userId="260b9726081dae15" providerId="LiveId" clId="{B55CB833-3568-49B5-9D65-A0FB87B7FBB5}" dt="2018-10-08T00:52:04.753" v="0"/>
-          <ac:picMkLst>
-            <pc:docMk/>
-            <pc:sldMk cId="4228803550" sldId="259"/>
-            <ac:picMk id="4" creationId="{00000000-0000-0000-0000-000000000000}"/>
-          </ac:picMkLst>
-        </pc:picChg>
-      </pc:sldChg>
-      <pc:sldChg chg="modSp">
-        <pc:chgData name="Xin Zou" userId="260b9726081dae15" providerId="LiveId" clId="{B55CB833-3568-49B5-9D65-A0FB87B7FBB5}" dt="2018-10-08T00:52:05.698" v="2" actId="27636"/>
-        <pc:sldMkLst>
-          <pc:docMk/>
-          <pc:sldMk cId="2508900359" sldId="260"/>
-        </pc:sldMkLst>
-        <pc:spChg chg="mod">
-          <ac:chgData name="Xin Zou" userId="260b9726081dae15" providerId="LiveId" clId="{B55CB833-3568-49B5-9D65-A0FB87B7FBB5}" dt="2018-10-08T00:52:05.698" v="2" actId="27636"/>
-          <ac:spMkLst>
-            <pc:docMk/>
-            <pc:sldMk cId="2508900359" sldId="260"/>
-            <ac:spMk id="3" creationId="{00000000-0000-0000-0000-000000000000}"/>
-          </ac:spMkLst>
-        </pc:spChg>
-      </pc:sldChg>
-      <pc:sldChg chg="delSp modSp">
-        <pc:chgData name="Xin Zou" userId="260b9726081dae15" providerId="LiveId" clId="{B55CB833-3568-49B5-9D65-A0FB87B7FBB5}" dt="2018-10-08T00:55:28.608" v="41"/>
-        <pc:sldMkLst>
-          <pc:docMk/>
-          <pc:sldMk cId="1116994476" sldId="261"/>
-        </pc:sldMkLst>
-        <pc:spChg chg="mod">
-          <ac:chgData name="Xin Zou" userId="260b9726081dae15" providerId="LiveId" clId="{B55CB833-3568-49B5-9D65-A0FB87B7FBB5}" dt="2018-10-08T00:52:04.753" v="0"/>
-          <ac:spMkLst>
-            <pc:docMk/>
-            <pc:sldMk cId="1116994476" sldId="261"/>
-            <ac:spMk id="3" creationId="{00000000-0000-0000-0000-000000000000}"/>
-          </ac:spMkLst>
-        </pc:spChg>
-        <pc:picChg chg="del mod">
-          <ac:chgData name="Xin Zou" userId="260b9726081dae15" providerId="LiveId" clId="{B55CB833-3568-49B5-9D65-A0FB87B7FBB5}" dt="2018-10-08T00:55:28.608" v="41"/>
-          <ac:picMkLst>
-            <pc:docMk/>
-            <pc:sldMk cId="1116994476" sldId="261"/>
-            <ac:picMk id="4" creationId="{00000000-0000-0000-0000-000000000000}"/>
-          </ac:picMkLst>
-        </pc:picChg>
-      </pc:sldChg>
-      <pc:sldChg chg="ord">
-        <pc:chgData name="Xin Zou" userId="260b9726081dae15" providerId="LiveId" clId="{B55CB833-3568-49B5-9D65-A0FB87B7FBB5}" dt="2018-10-08T00:59:20.023" v="285"/>
-        <pc:sldMkLst>
-          <pc:docMk/>
-          <pc:sldMk cId="3050146562" sldId="262"/>
-        </pc:sldMkLst>
-      </pc:sldChg>
-      <pc:sldChg chg="modSp ord">
-        <pc:chgData name="Xin Zou" userId="260b9726081dae15" providerId="LiveId" clId="{B55CB833-3568-49B5-9D65-A0FB87B7FBB5}" dt="2018-10-08T00:59:20.023" v="285"/>
-        <pc:sldMkLst>
-          <pc:docMk/>
-          <pc:sldMk cId="2475530123" sldId="263"/>
-        </pc:sldMkLst>
-        <pc:picChg chg="mod">
-          <ac:chgData name="Xin Zou" userId="260b9726081dae15" providerId="LiveId" clId="{B55CB833-3568-49B5-9D65-A0FB87B7FBB5}" dt="2018-10-08T00:52:04.753" v="0"/>
-          <ac:picMkLst>
-            <pc:docMk/>
-            <pc:sldMk cId="2475530123" sldId="263"/>
-            <ac:picMk id="4" creationId="{00000000-0000-0000-0000-000000000000}"/>
-          </ac:picMkLst>
-        </pc:picChg>
-      </pc:sldChg>
-      <pc:sldChg chg="addSp delSp modSp mod setBg">
-        <pc:chgData name="Xin Zou" userId="260b9726081dae15" providerId="LiveId" clId="{B55CB833-3568-49B5-9D65-A0FB87B7FBB5}" dt="2018-10-08T03:18:51.026" v="437" actId="20577"/>
-        <pc:sldMkLst>
-          <pc:docMk/>
-          <pc:sldMk cId="3042072489" sldId="264"/>
-        </pc:sldMkLst>
-        <pc:spChg chg="mod">
-          <ac:chgData name="Xin Zou" userId="260b9726081dae15" providerId="LiveId" clId="{B55CB833-3568-49B5-9D65-A0FB87B7FBB5}" dt="2018-10-08T03:18:39.388" v="435" actId="404"/>
-          <ac:spMkLst>
-            <pc:docMk/>
-            <pc:sldMk cId="3042072489" sldId="264"/>
-            <ac:spMk id="2" creationId="{00000000-0000-0000-0000-000000000000}"/>
-          </ac:spMkLst>
-        </pc:spChg>
-        <pc:spChg chg="del mod">
-          <ac:chgData name="Xin Zou" userId="260b9726081dae15" providerId="LiveId" clId="{B55CB833-3568-49B5-9D65-A0FB87B7FBB5}" dt="2018-10-08T03:18:09.878" v="426" actId="26606"/>
-          <ac:spMkLst>
-            <pc:docMk/>
-            <pc:sldMk cId="3042072489" sldId="264"/>
-            <ac:spMk id="3" creationId="{00000000-0000-0000-0000-000000000000}"/>
-          </ac:spMkLst>
-        </pc:spChg>
-        <pc:spChg chg="add del mod">
-          <ac:chgData name="Xin Zou" userId="260b9726081dae15" providerId="LiveId" clId="{B55CB833-3568-49B5-9D65-A0FB87B7FBB5}" dt="2018-10-08T03:18:27.337" v="429" actId="478"/>
-          <ac:spMkLst>
-            <pc:docMk/>
-            <pc:sldMk cId="3042072489" sldId="264"/>
-            <ac:spMk id="4" creationId="{467E15C0-99EF-4640-B38F-ED2739C3B85E}"/>
-          </ac:spMkLst>
-        </pc:spChg>
-        <pc:spChg chg="add">
-          <ac:chgData name="Xin Zou" userId="260b9726081dae15" providerId="LiveId" clId="{B55CB833-3568-49B5-9D65-A0FB87B7FBB5}" dt="2018-10-08T03:18:09.878" v="426" actId="26606"/>
-          <ac:spMkLst>
-            <pc:docMk/>
-            <pc:sldMk cId="3042072489" sldId="264"/>
-            <ac:spMk id="10" creationId="{619B3503-D505-49AA-97C1-B299D58DB436}"/>
-          </ac:spMkLst>
-        </pc:spChg>
-        <pc:spChg chg="add">
-          <ac:chgData name="Xin Zou" userId="260b9726081dae15" providerId="LiveId" clId="{B55CB833-3568-49B5-9D65-A0FB87B7FBB5}" dt="2018-10-08T03:18:09.878" v="426" actId="26606"/>
-          <ac:spMkLst>
-            <pc:docMk/>
-            <pc:sldMk cId="3042072489" sldId="264"/>
-            <ac:spMk id="12" creationId="{E39A2319-946A-4C65-9B7C-1F86E9B1B57C}"/>
-          </ac:spMkLst>
-        </pc:spChg>
-        <pc:graphicFrameChg chg="add del mod">
-          <ac:chgData name="Xin Zou" userId="260b9726081dae15" providerId="LiveId" clId="{B55CB833-3568-49B5-9D65-A0FB87B7FBB5}" dt="2018-10-08T03:18:51.026" v="437" actId="20577"/>
-          <ac:graphicFrameMkLst>
-            <pc:docMk/>
-            <pc:sldMk cId="3042072489" sldId="264"/>
-            <ac:graphicFrameMk id="5" creationId="{0ED1ADDF-3378-4F5B-BF85-423BF8454ECB}"/>
-          </ac:graphicFrameMkLst>
-        </pc:graphicFrameChg>
-      </pc:sldChg>
-      <pc:sldChg chg="ord">
-        <pc:chgData name="Xin Zou" userId="260b9726081dae15" providerId="LiveId" clId="{B55CB833-3568-49B5-9D65-A0FB87B7FBB5}" dt="2018-10-08T00:59:40.577" v="286"/>
-        <pc:sldMkLst>
-          <pc:docMk/>
-          <pc:sldMk cId="43872184" sldId="265"/>
-        </pc:sldMkLst>
-      </pc:sldChg>
-      <pc:sldChg chg="modSp">
-        <pc:chgData name="Xin Zou" userId="260b9726081dae15" providerId="LiveId" clId="{B55CB833-3568-49B5-9D65-A0FB87B7FBB5}" dt="2018-10-08T00:52:43.886" v="5" actId="27636"/>
-        <pc:sldMkLst>
-          <pc:docMk/>
-          <pc:sldMk cId="1387245916" sldId="266"/>
-        </pc:sldMkLst>
-        <pc:spChg chg="mod">
-          <ac:chgData name="Xin Zou" userId="260b9726081dae15" providerId="LiveId" clId="{B55CB833-3568-49B5-9D65-A0FB87B7FBB5}" dt="2018-10-08T00:52:43.886" v="5" actId="27636"/>
-          <ac:spMkLst>
-            <pc:docMk/>
-            <pc:sldMk cId="1387245916" sldId="266"/>
-            <ac:spMk id="3" creationId="{00000000-0000-0000-0000-000000000000}"/>
-          </ac:spMkLst>
-        </pc:spChg>
-      </pc:sldChg>
-      <pc:sldChg chg="addSp delSp modSp add">
-        <pc:chgData name="Xin Zou" userId="260b9726081dae15" providerId="LiveId" clId="{B55CB833-3568-49B5-9D65-A0FB87B7FBB5}" dt="2018-10-08T00:55:31.905" v="42"/>
-        <pc:sldMkLst>
-          <pc:docMk/>
-          <pc:sldMk cId="3782792723" sldId="267"/>
-        </pc:sldMkLst>
-        <pc:spChg chg="mod">
-          <ac:chgData name="Xin Zou" userId="260b9726081dae15" providerId="LiveId" clId="{B55CB833-3568-49B5-9D65-A0FB87B7FBB5}" dt="2018-10-08T00:55:21.156" v="40"/>
-          <ac:spMkLst>
-            <pc:docMk/>
-            <pc:sldMk cId="3782792723" sldId="267"/>
-            <ac:spMk id="2" creationId="{26A8403C-0012-4BF6-BFFD-FA4FA2733DE6}"/>
-          </ac:spMkLst>
-        </pc:spChg>
-        <pc:spChg chg="del">
-          <ac:chgData name="Xin Zou" userId="260b9726081dae15" providerId="LiveId" clId="{B55CB833-3568-49B5-9D65-A0FB87B7FBB5}" dt="2018-10-08T00:55:31.905" v="42"/>
-          <ac:spMkLst>
-            <pc:docMk/>
-            <pc:sldMk cId="3782792723" sldId="267"/>
-            <ac:spMk id="3" creationId="{D6D2C771-CC8E-4643-A4F5-BD85D4BAE165}"/>
-          </ac:spMkLst>
-        </pc:spChg>
-        <pc:picChg chg="add">
-          <ac:chgData name="Xin Zou" userId="260b9726081dae15" providerId="LiveId" clId="{B55CB833-3568-49B5-9D65-A0FB87B7FBB5}" dt="2018-10-08T00:55:31.905" v="42"/>
-          <ac:picMkLst>
-            <pc:docMk/>
-            <pc:sldMk cId="3782792723" sldId="267"/>
-            <ac:picMk id="4" creationId="{74464EA0-D445-47AF-A145-A327C85158CE}"/>
-          </ac:picMkLst>
-        </pc:picChg>
-      </pc:sldChg>
-      <pc:sldChg chg="modSp add">
-        <pc:chgData name="Xin Zou" userId="260b9726081dae15" providerId="LiveId" clId="{B55CB833-3568-49B5-9D65-A0FB87B7FBB5}" dt="2018-10-08T00:55:48.189" v="80"/>
-        <pc:sldMkLst>
-          <pc:docMk/>
-          <pc:sldMk cId="511780385" sldId="268"/>
-        </pc:sldMkLst>
-        <pc:spChg chg="mod">
-          <ac:chgData name="Xin Zou" userId="260b9726081dae15" providerId="LiveId" clId="{B55CB833-3568-49B5-9D65-A0FB87B7FBB5}" dt="2018-10-08T00:55:48.189" v="80"/>
-          <ac:spMkLst>
-            <pc:docMk/>
-            <pc:sldMk cId="511780385" sldId="268"/>
-            <ac:spMk id="2" creationId="{B8DDFB82-AD2B-4C72-81C5-40F8267CF3ED}"/>
-          </ac:spMkLst>
-        </pc:spChg>
-      </pc:sldChg>
-      <pc:sldChg chg="addSp delSp modSp add">
-        <pc:chgData name="Xin Zou" userId="260b9726081dae15" providerId="LiveId" clId="{B55CB833-3568-49B5-9D65-A0FB87B7FBB5}" dt="2018-10-08T00:58:26.812" v="284"/>
-        <pc:sldMkLst>
-          <pc:docMk/>
-          <pc:sldMk cId="3156515846" sldId="269"/>
-        </pc:sldMkLst>
-        <pc:spChg chg="mod">
-          <ac:chgData name="Xin Zou" userId="260b9726081dae15" providerId="LiveId" clId="{B55CB833-3568-49B5-9D65-A0FB87B7FBB5}" dt="2018-10-08T00:56:01.629" v="114"/>
-          <ac:spMkLst>
-            <pc:docMk/>
-            <pc:sldMk cId="3156515846" sldId="269"/>
-            <ac:spMk id="2" creationId="{C016E33A-9643-437A-917D-9AB724D91CC3}"/>
-          </ac:spMkLst>
-        </pc:spChg>
-        <pc:spChg chg="del">
-          <ac:chgData name="Xin Zou" userId="260b9726081dae15" providerId="LiveId" clId="{B55CB833-3568-49B5-9D65-A0FB87B7FBB5}" dt="2018-10-08T00:58:26.812" v="284"/>
-          <ac:spMkLst>
-            <pc:docMk/>
-            <pc:sldMk cId="3156515846" sldId="269"/>
-            <ac:spMk id="3" creationId="{140219BD-B510-4BAB-8C66-D7CB11CDE68E}"/>
-          </ac:spMkLst>
-        </pc:spChg>
-        <pc:picChg chg="add mod">
-          <ac:chgData name="Xin Zou" userId="260b9726081dae15" providerId="LiveId" clId="{B55CB833-3568-49B5-9D65-A0FB87B7FBB5}" dt="2018-10-08T00:58:26.812" v="284"/>
-          <ac:picMkLst>
-            <pc:docMk/>
-            <pc:sldMk cId="3156515846" sldId="269"/>
-            <ac:picMk id="4" creationId="{F9D376E7-E345-417D-AE49-E6303AD304C2}"/>
-          </ac:picMkLst>
-        </pc:picChg>
-      </pc:sldChg>
-      <pc:sldChg chg="modSp add">
-        <pc:chgData name="Xin Zou" userId="260b9726081dae15" providerId="LiveId" clId="{B55CB833-3568-49B5-9D65-A0FB87B7FBB5}" dt="2018-10-08T00:56:26.910" v="186"/>
-        <pc:sldMkLst>
-          <pc:docMk/>
-          <pc:sldMk cId="177881417" sldId="270"/>
-        </pc:sldMkLst>
-        <pc:spChg chg="mod">
-          <ac:chgData name="Xin Zou" userId="260b9726081dae15" providerId="LiveId" clId="{B55CB833-3568-49B5-9D65-A0FB87B7FBB5}" dt="2018-10-08T00:56:26.910" v="186"/>
-          <ac:spMkLst>
-            <pc:docMk/>
-            <pc:sldMk cId="177881417" sldId="270"/>
-            <ac:spMk id="2" creationId="{FA33D485-1249-4731-AA38-70E57DCE933C}"/>
-          </ac:spMkLst>
-        </pc:spChg>
-      </pc:sldChg>
-      <pc:sldChg chg="modSp add">
-        <pc:chgData name="Xin Zou" userId="260b9726081dae15" providerId="LiveId" clId="{B55CB833-3568-49B5-9D65-A0FB87B7FBB5}" dt="2018-10-08T00:56:44.962" v="250"/>
-        <pc:sldMkLst>
-          <pc:docMk/>
-          <pc:sldMk cId="3793490362" sldId="271"/>
-        </pc:sldMkLst>
-        <pc:spChg chg="mod">
-          <ac:chgData name="Xin Zou" userId="260b9726081dae15" providerId="LiveId" clId="{B55CB833-3568-49B5-9D65-A0FB87B7FBB5}" dt="2018-10-08T00:56:44.962" v="250"/>
-          <ac:spMkLst>
-            <pc:docMk/>
-            <pc:sldMk cId="3793490362" sldId="271"/>
-            <ac:spMk id="2" creationId="{7C92CC2A-3664-4866-A439-96676ADC080D}"/>
-          </ac:spMkLst>
-        </pc:spChg>
-      </pc:sldChg>
-      <pc:sldChg chg="addSp delSp modSp add mod setBg setClrOvrMap">
-        <pc:chgData name="Xin Zou" userId="260b9726081dae15" providerId="LiveId" clId="{B55CB833-3568-49B5-9D65-A0FB87B7FBB5}" dt="2018-10-08T01:04:23.955" v="303" actId="27636"/>
-        <pc:sldMkLst>
-          <pc:docMk/>
-          <pc:sldMk cId="863761402" sldId="272"/>
-        </pc:sldMkLst>
-        <pc:spChg chg="mod">
-          <ac:chgData name="Xin Zou" userId="260b9726081dae15" providerId="LiveId" clId="{B55CB833-3568-49B5-9D65-A0FB87B7FBB5}" dt="2018-10-08T01:02:39.078" v="288" actId="26606"/>
-          <ac:spMkLst>
-            <pc:docMk/>
-            <pc:sldMk cId="863761402" sldId="272"/>
-            <ac:spMk id="2" creationId="{50C7B3FD-18F4-4D71-8FBF-08686999CADD}"/>
-          </ac:spMkLst>
-        </pc:spChg>
-        <pc:spChg chg="del">
-          <ac:chgData name="Xin Zou" userId="260b9726081dae15" providerId="LiveId" clId="{B55CB833-3568-49B5-9D65-A0FB87B7FBB5}" dt="2018-10-08T01:02:34.470" v="287"/>
-          <ac:spMkLst>
-            <pc:docMk/>
-            <pc:sldMk cId="863761402" sldId="272"/>
-            <ac:spMk id="3" creationId="{94DF39DF-102C-4402-B362-3468332AEF35}"/>
-          </ac:spMkLst>
-        </pc:spChg>
-        <pc:spChg chg="add mod">
-          <ac:chgData name="Xin Zou" userId="260b9726081dae15" providerId="LiveId" clId="{B55CB833-3568-49B5-9D65-A0FB87B7FBB5}" dt="2018-10-08T01:04:23.955" v="303" actId="27636"/>
-          <ac:spMkLst>
-            <pc:docMk/>
-            <pc:sldMk cId="863761402" sldId="272"/>
-            <ac:spMk id="10" creationId="{CB583D3A-8EBC-4EC0-87B6-4878719707DD}"/>
-          </ac:spMkLst>
-        </pc:spChg>
-        <pc:spChg chg="add">
-          <ac:chgData name="Xin Zou" userId="260b9726081dae15" providerId="LiveId" clId="{B55CB833-3568-49B5-9D65-A0FB87B7FBB5}" dt="2018-10-08T01:02:39.078" v="288" actId="26606"/>
-          <ac:spMkLst>
-            <pc:docMk/>
-            <pc:sldMk cId="863761402" sldId="272"/>
-            <ac:spMk id="13" creationId="{05325879-C4B2-475E-B853-DC8F21A63351}"/>
-          </ac:spMkLst>
-        </pc:spChg>
-        <pc:spChg chg="add">
-          <ac:chgData name="Xin Zou" userId="260b9726081dae15" providerId="LiveId" clId="{B55CB833-3568-49B5-9D65-A0FB87B7FBB5}" dt="2018-10-08T01:02:39.078" v="288" actId="26606"/>
-          <ac:spMkLst>
-            <pc:docMk/>
-            <pc:sldMk cId="863761402" sldId="272"/>
-            <ac:spMk id="15" creationId="{012C085F-3B19-420D-902A-B55695F5036C}"/>
-          </ac:spMkLst>
-        </pc:spChg>
-        <pc:picChg chg="add del mod">
-          <ac:chgData name="Xin Zou" userId="260b9726081dae15" providerId="LiveId" clId="{B55CB833-3568-49B5-9D65-A0FB87B7FBB5}" dt="2018-10-08T01:02:39.078" v="288" actId="26606"/>
-          <ac:picMkLst>
-            <pc:docMk/>
-            <pc:sldMk cId="863761402" sldId="272"/>
-            <ac:picMk id="5" creationId="{3BDEC95C-CB3D-40F2-97A2-B1E3019BC38E}"/>
-          </ac:picMkLst>
-        </pc:picChg>
-        <pc:picChg chg="add">
-          <ac:chgData name="Xin Zou" userId="260b9726081dae15" providerId="LiveId" clId="{B55CB833-3568-49B5-9D65-A0FB87B7FBB5}" dt="2018-10-08T01:02:39.078" v="288" actId="26606"/>
-          <ac:picMkLst>
-            <pc:docMk/>
-            <pc:sldMk cId="863761402" sldId="272"/>
-            <ac:picMk id="8" creationId="{3BDEC95C-CB3D-40F2-97A2-B1E3019BC38E}"/>
-          </ac:picMkLst>
-        </pc:picChg>
-      </pc:sldChg>
-      <pc:sldChg chg="addSp delSp modSp add mod setBg setClrOvrMap">
-        <pc:chgData name="Xin Zou" userId="260b9726081dae15" providerId="LiveId" clId="{B55CB833-3568-49B5-9D65-A0FB87B7FBB5}" dt="2018-10-08T03:19:30.701" v="532" actId="20577"/>
-        <pc:sldMkLst>
-          <pc:docMk/>
-          <pc:sldMk cId="2860342258" sldId="273"/>
-        </pc:sldMkLst>
-        <pc:spChg chg="mod">
-          <ac:chgData name="Xin Zou" userId="260b9726081dae15" providerId="LiveId" clId="{B55CB833-3568-49B5-9D65-A0FB87B7FBB5}" dt="2018-10-08T01:06:04.266" v="383" actId="26606"/>
-          <ac:spMkLst>
-            <pc:docMk/>
-            <pc:sldMk cId="2860342258" sldId="273"/>
-            <ac:spMk id="2" creationId="{39197949-D1BF-4037-859E-2EACEEF6B34B}"/>
-          </ac:spMkLst>
-        </pc:spChg>
-        <pc:spChg chg="del">
-          <ac:chgData name="Xin Zou" userId="260b9726081dae15" providerId="LiveId" clId="{B55CB833-3568-49B5-9D65-A0FB87B7FBB5}" dt="2018-10-08T01:05:57.790" v="382"/>
-          <ac:spMkLst>
-            <pc:docMk/>
-            <pc:sldMk cId="2860342258" sldId="273"/>
-            <ac:spMk id="3" creationId="{DCC5827F-0270-4474-B06A-36C2E7C9F59C}"/>
-          </ac:spMkLst>
-        </pc:spChg>
-        <pc:spChg chg="add mod">
-          <ac:chgData name="Xin Zou" userId="260b9726081dae15" providerId="LiveId" clId="{B55CB833-3568-49B5-9D65-A0FB87B7FBB5}" dt="2018-10-08T03:19:30.701" v="532" actId="20577"/>
-          <ac:spMkLst>
-            <pc:docMk/>
-            <pc:sldMk cId="2860342258" sldId="273"/>
-            <ac:spMk id="9" creationId="{4C94D337-3D03-46C7-AB8E-4C2084C7AED7}"/>
-          </ac:spMkLst>
-        </pc:spChg>
-        <pc:spChg chg="add">
-          <ac:chgData name="Xin Zou" userId="260b9726081dae15" providerId="LiveId" clId="{B55CB833-3568-49B5-9D65-A0FB87B7FBB5}" dt="2018-10-08T01:06:04.266" v="383" actId="26606"/>
-          <ac:spMkLst>
-            <pc:docMk/>
-            <pc:sldMk cId="2860342258" sldId="273"/>
-            <ac:spMk id="12" creationId="{05325879-C4B2-475E-B853-DC8F21A63351}"/>
-          </ac:spMkLst>
-        </pc:spChg>
-        <pc:spChg chg="add">
-          <ac:chgData name="Xin Zou" userId="260b9726081dae15" providerId="LiveId" clId="{B55CB833-3568-49B5-9D65-A0FB87B7FBB5}" dt="2018-10-08T01:06:04.266" v="383" actId="26606"/>
-          <ac:spMkLst>
-            <pc:docMk/>
-            <pc:sldMk cId="2860342258" sldId="273"/>
-            <ac:spMk id="14" creationId="{012C085F-3B19-420D-902A-B55695F5036C}"/>
-          </ac:spMkLst>
-        </pc:spChg>
-        <pc:picChg chg="add del mod">
-          <ac:chgData name="Xin Zou" userId="260b9726081dae15" providerId="LiveId" clId="{B55CB833-3568-49B5-9D65-A0FB87B7FBB5}" dt="2018-10-08T01:06:04.266" v="383" actId="26606"/>
-          <ac:picMkLst>
-            <pc:docMk/>
-            <pc:sldMk cId="2860342258" sldId="273"/>
-            <ac:picMk id="4" creationId="{8BBB02D2-2448-42A3-BE4B-B02087411AC4}"/>
-          </ac:picMkLst>
-        </pc:picChg>
-        <pc:picChg chg="add">
-          <ac:chgData name="Xin Zou" userId="260b9726081dae15" providerId="LiveId" clId="{B55CB833-3568-49B5-9D65-A0FB87B7FBB5}" dt="2018-10-08T01:06:04.266" v="383" actId="26606"/>
-          <ac:picMkLst>
-            <pc:docMk/>
-            <pc:sldMk cId="2860342258" sldId="273"/>
-            <ac:picMk id="7" creationId="{8BBB02D2-2448-42A3-BE4B-B02087411AC4}"/>
-          </ac:picMkLst>
-        </pc:picChg>
-      </pc:sldChg>
-      <pc:sldChg chg="add del">
-        <pc:chgData name="Xin Zou" userId="260b9726081dae15" providerId="LiveId" clId="{B55CB833-3568-49B5-9D65-A0FB87B7FBB5}" dt="2018-10-08T00:52:48.304" v="6" actId="2696"/>
-        <pc:sldMkLst>
-          <pc:docMk/>
-          <pc:sldMk cId="2535163443" sldId="309"/>
-        </pc:sldMkLst>
-      </pc:sldChg>
-      <pc:sldMasterChg chg="modSp modSldLayout">
-        <pc:chgData name="Xin Zou" userId="260b9726081dae15" providerId="LiveId" clId="{B55CB833-3568-49B5-9D65-A0FB87B7FBB5}" dt="2018-10-08T00:52:04.753" v="0"/>
-        <pc:sldMasterMkLst>
-          <pc:docMk/>
-          <pc:sldMasterMk cId="846276100" sldId="2147483780"/>
-        </pc:sldMasterMkLst>
-        <pc:spChg chg="mod">
-          <ac:chgData name="Xin Zou" userId="260b9726081dae15" providerId="LiveId" clId="{B55CB833-3568-49B5-9D65-A0FB87B7FBB5}" dt="2018-10-08T00:52:04.753" v="0"/>
-          <ac:spMkLst>
-            <pc:docMk/>
-            <pc:sldMasterMk cId="846276100" sldId="2147483780"/>
-            <ac:spMk id="2" creationId="{00000000-0000-0000-0000-000000000000}"/>
-          </ac:spMkLst>
-        </pc:spChg>
-        <pc:spChg chg="mod">
-          <ac:chgData name="Xin Zou" userId="260b9726081dae15" providerId="LiveId" clId="{B55CB833-3568-49B5-9D65-A0FB87B7FBB5}" dt="2018-10-08T00:52:04.753" v="0"/>
-          <ac:spMkLst>
-            <pc:docMk/>
-            <pc:sldMasterMk cId="846276100" sldId="2147483780"/>
-            <ac:spMk id="3" creationId="{00000000-0000-0000-0000-000000000000}"/>
-          </ac:spMkLst>
-        </pc:spChg>
-        <pc:spChg chg="mod">
-          <ac:chgData name="Xin Zou" userId="260b9726081dae15" providerId="LiveId" clId="{B55CB833-3568-49B5-9D65-A0FB87B7FBB5}" dt="2018-10-08T00:52:04.753" v="0"/>
-          <ac:spMkLst>
-            <pc:docMk/>
-            <pc:sldMasterMk cId="846276100" sldId="2147483780"/>
-            <ac:spMk id="4" creationId="{00000000-0000-0000-0000-000000000000}"/>
-          </ac:spMkLst>
-        </pc:spChg>
-        <pc:spChg chg="mod">
-          <ac:chgData name="Xin Zou" userId="260b9726081dae15" providerId="LiveId" clId="{B55CB833-3568-49B5-9D65-A0FB87B7FBB5}" dt="2018-10-08T00:52:04.753" v="0"/>
-          <ac:spMkLst>
-            <pc:docMk/>
-            <pc:sldMasterMk cId="846276100" sldId="2147483780"/>
-            <ac:spMk id="5" creationId="{00000000-0000-0000-0000-000000000000}"/>
-          </ac:spMkLst>
-        </pc:spChg>
-        <pc:spChg chg="mod">
-          <ac:chgData name="Xin Zou" userId="260b9726081dae15" providerId="LiveId" clId="{B55CB833-3568-49B5-9D65-A0FB87B7FBB5}" dt="2018-10-08T00:52:04.753" v="0"/>
-          <ac:spMkLst>
-            <pc:docMk/>
-            <pc:sldMasterMk cId="846276100" sldId="2147483780"/>
-            <ac:spMk id="6" creationId="{00000000-0000-0000-0000-000000000000}"/>
-          </ac:spMkLst>
-        </pc:spChg>
-        <pc:spChg chg="mod">
-          <ac:chgData name="Xin Zou" userId="260b9726081dae15" providerId="LiveId" clId="{B55CB833-3568-49B5-9D65-A0FB87B7FBB5}" dt="2018-10-08T00:52:04.753" v="0"/>
-          <ac:spMkLst>
-            <pc:docMk/>
-            <pc:sldMasterMk cId="846276100" sldId="2147483780"/>
-            <ac:spMk id="7" creationId="{00000000-0000-0000-0000-000000000000}"/>
-          </ac:spMkLst>
-        </pc:spChg>
-        <pc:spChg chg="mod">
-          <ac:chgData name="Xin Zou" userId="260b9726081dae15" providerId="LiveId" clId="{B55CB833-3568-49B5-9D65-A0FB87B7FBB5}" dt="2018-10-08T00:52:04.753" v="0"/>
-          <ac:spMkLst>
-            <pc:docMk/>
-            <pc:sldMasterMk cId="846276100" sldId="2147483780"/>
-            <ac:spMk id="10" creationId="{00000000-0000-0000-0000-000000000000}"/>
-          </ac:spMkLst>
-        </pc:spChg>
-        <pc:sldLayoutChg chg="modSp">
-          <pc:chgData name="Xin Zou" userId="260b9726081dae15" providerId="LiveId" clId="{B55CB833-3568-49B5-9D65-A0FB87B7FBB5}" dt="2018-10-08T00:52:04.753" v="0"/>
-          <pc:sldLayoutMkLst>
-            <pc:docMk/>
-            <pc:sldMasterMk cId="846276100" sldId="2147483780"/>
-            <pc:sldLayoutMk cId="323638451" sldId="2147483781"/>
-          </pc:sldLayoutMkLst>
-          <pc:spChg chg="mod">
-            <ac:chgData name="Xin Zou" userId="260b9726081dae15" providerId="LiveId" clId="{B55CB833-3568-49B5-9D65-A0FB87B7FBB5}" dt="2018-10-08T00:52:04.753" v="0"/>
-            <ac:spMkLst>
-              <pc:docMk/>
-              <pc:sldMasterMk cId="846276100" sldId="2147483780"/>
-              <pc:sldLayoutMk cId="323638451" sldId="2147483781"/>
-              <ac:spMk id="2" creationId="{00000000-0000-0000-0000-000000000000}"/>
-            </ac:spMkLst>
-          </pc:spChg>
-          <pc:spChg chg="mod">
-            <ac:chgData name="Xin Zou" userId="260b9726081dae15" providerId="LiveId" clId="{B55CB833-3568-49B5-9D65-A0FB87B7FBB5}" dt="2018-10-08T00:52:04.753" v="0"/>
-            <ac:spMkLst>
-              <pc:docMk/>
-              <pc:sldMasterMk cId="846276100" sldId="2147483780"/>
-              <pc:sldLayoutMk cId="323638451" sldId="2147483781"/>
-              <ac:spMk id="3" creationId="{00000000-0000-0000-0000-000000000000}"/>
-            </ac:spMkLst>
-          </pc:spChg>
-          <pc:spChg chg="mod">
-            <ac:chgData name="Xin Zou" userId="260b9726081dae15" providerId="LiveId" clId="{B55CB833-3568-49B5-9D65-A0FB87B7FBB5}" dt="2018-10-08T00:52:04.753" v="0"/>
-            <ac:spMkLst>
-              <pc:docMk/>
-              <pc:sldMasterMk cId="846276100" sldId="2147483780"/>
-              <pc:sldLayoutMk cId="323638451" sldId="2147483781"/>
-              <ac:spMk id="9" creationId="{00000000-0000-0000-0000-000000000000}"/>
-            </ac:spMkLst>
-          </pc:spChg>
-          <pc:spChg chg="mod">
-            <ac:chgData name="Xin Zou" userId="260b9726081dae15" providerId="LiveId" clId="{B55CB833-3568-49B5-9D65-A0FB87B7FBB5}" dt="2018-10-08T00:52:04.753" v="0"/>
-            <ac:spMkLst>
-              <pc:docMk/>
-              <pc:sldMasterMk cId="846276100" sldId="2147483780"/>
-              <pc:sldLayoutMk cId="323638451" sldId="2147483781"/>
-              <ac:spMk id="10" creationId="{00000000-0000-0000-0000-000000000000}"/>
-            </ac:spMkLst>
-          </pc:spChg>
-        </pc:sldLayoutChg>
-        <pc:sldLayoutChg chg="modSp">
-          <pc:chgData name="Xin Zou" userId="260b9726081dae15" providerId="LiveId" clId="{B55CB833-3568-49B5-9D65-A0FB87B7FBB5}" dt="2018-10-08T00:52:04.753" v="0"/>
-          <pc:sldLayoutMkLst>
-            <pc:docMk/>
-            <pc:sldMasterMk cId="846276100" sldId="2147483780"/>
-            <pc:sldLayoutMk cId="171744047" sldId="2147483782"/>
-          </pc:sldLayoutMkLst>
-          <pc:spChg chg="mod">
-            <ac:chgData name="Xin Zou" userId="260b9726081dae15" providerId="LiveId" clId="{B55CB833-3568-49B5-9D65-A0FB87B7FBB5}" dt="2018-10-08T00:52:04.753" v="0"/>
-            <ac:spMkLst>
-              <pc:docMk/>
-              <pc:sldMasterMk cId="846276100" sldId="2147483780"/>
-              <pc:sldLayoutMk cId="171744047" sldId="2147483782"/>
-              <ac:spMk id="2" creationId="{00000000-0000-0000-0000-000000000000}"/>
-            </ac:spMkLst>
-          </pc:spChg>
-        </pc:sldLayoutChg>
-        <pc:sldLayoutChg chg="modSp">
-          <pc:chgData name="Xin Zou" userId="260b9726081dae15" providerId="LiveId" clId="{B55CB833-3568-49B5-9D65-A0FB87B7FBB5}" dt="2018-10-08T00:52:04.753" v="0"/>
-          <pc:sldLayoutMkLst>
-            <pc:docMk/>
-            <pc:sldMasterMk cId="846276100" sldId="2147483780"/>
-            <pc:sldLayoutMk cId="1101634726" sldId="2147483783"/>
-          </pc:sldLayoutMkLst>
-          <pc:spChg chg="mod">
-            <ac:chgData name="Xin Zou" userId="260b9726081dae15" providerId="LiveId" clId="{B55CB833-3568-49B5-9D65-A0FB87B7FBB5}" dt="2018-10-08T00:52:04.753" v="0"/>
-            <ac:spMkLst>
-              <pc:docMk/>
-              <pc:sldMasterMk cId="846276100" sldId="2147483780"/>
-              <pc:sldLayoutMk cId="1101634726" sldId="2147483783"/>
-              <ac:spMk id="2" creationId="{00000000-0000-0000-0000-000000000000}"/>
-            </ac:spMkLst>
-          </pc:spChg>
-          <pc:spChg chg="mod">
-            <ac:chgData name="Xin Zou" userId="260b9726081dae15" providerId="LiveId" clId="{B55CB833-3568-49B5-9D65-A0FB87B7FBB5}" dt="2018-10-08T00:52:04.753" v="0"/>
-            <ac:spMkLst>
-              <pc:docMk/>
-              <pc:sldMasterMk cId="846276100" sldId="2147483780"/>
-              <pc:sldLayoutMk cId="1101634726" sldId="2147483783"/>
-              <ac:spMk id="3" creationId="{00000000-0000-0000-0000-000000000000}"/>
-            </ac:spMkLst>
-          </pc:spChg>
-          <pc:spChg chg="mod">
-            <ac:chgData name="Xin Zou" userId="260b9726081dae15" providerId="LiveId" clId="{B55CB833-3568-49B5-9D65-A0FB87B7FBB5}" dt="2018-10-08T00:52:04.753" v="0"/>
-            <ac:spMkLst>
-              <pc:docMk/>
-              <pc:sldMasterMk cId="846276100" sldId="2147483780"/>
-              <pc:sldLayoutMk cId="1101634726" sldId="2147483783"/>
-              <ac:spMk id="9" creationId="{00000000-0000-0000-0000-000000000000}"/>
-            </ac:spMkLst>
-          </pc:spChg>
-          <pc:spChg chg="mod">
-            <ac:chgData name="Xin Zou" userId="260b9726081dae15" providerId="LiveId" clId="{B55CB833-3568-49B5-9D65-A0FB87B7FBB5}" dt="2018-10-08T00:52:04.753" v="0"/>
-            <ac:spMkLst>
-              <pc:docMk/>
-              <pc:sldMasterMk cId="846276100" sldId="2147483780"/>
-              <pc:sldLayoutMk cId="1101634726" sldId="2147483783"/>
-              <ac:spMk id="12" creationId="{00000000-0000-0000-0000-000000000000}"/>
-            </ac:spMkLst>
-          </pc:spChg>
-        </pc:sldLayoutChg>
-        <pc:sldLayoutChg chg="modSp">
-          <pc:chgData name="Xin Zou" userId="260b9726081dae15" providerId="LiveId" clId="{B55CB833-3568-49B5-9D65-A0FB87B7FBB5}" dt="2018-10-08T00:52:04.753" v="0"/>
-          <pc:sldLayoutMkLst>
-            <pc:docMk/>
-            <pc:sldMasterMk cId="846276100" sldId="2147483780"/>
-            <pc:sldLayoutMk cId="4182124218" sldId="2147483784"/>
-          </pc:sldLayoutMkLst>
-          <pc:spChg chg="mod">
-            <ac:chgData name="Xin Zou" userId="260b9726081dae15" providerId="LiveId" clId="{B55CB833-3568-49B5-9D65-A0FB87B7FBB5}" dt="2018-10-08T00:52:04.753" v="0"/>
-            <ac:spMkLst>
-              <pc:docMk/>
-              <pc:sldMasterMk cId="846276100" sldId="2147483780"/>
-              <pc:sldLayoutMk cId="4182124218" sldId="2147483784"/>
-              <ac:spMk id="3" creationId="{00000000-0000-0000-0000-000000000000}"/>
-            </ac:spMkLst>
-          </pc:spChg>
-          <pc:spChg chg="mod">
-            <ac:chgData name="Xin Zou" userId="260b9726081dae15" providerId="LiveId" clId="{B55CB833-3568-49B5-9D65-A0FB87B7FBB5}" dt="2018-10-08T00:52:04.753" v="0"/>
-            <ac:spMkLst>
-              <pc:docMk/>
-              <pc:sldMasterMk cId="846276100" sldId="2147483780"/>
-              <pc:sldLayoutMk cId="4182124218" sldId="2147483784"/>
-              <ac:spMk id="4" creationId="{00000000-0000-0000-0000-000000000000}"/>
-            </ac:spMkLst>
-          </pc:spChg>
-        </pc:sldLayoutChg>
-        <pc:sldLayoutChg chg="modSp">
-          <pc:chgData name="Xin Zou" userId="260b9726081dae15" providerId="LiveId" clId="{B55CB833-3568-49B5-9D65-A0FB87B7FBB5}" dt="2018-10-08T00:52:04.753" v="0"/>
-          <pc:sldLayoutMkLst>
-            <pc:docMk/>
-            <pc:sldMasterMk cId="846276100" sldId="2147483780"/>
-            <pc:sldLayoutMk cId="738730040" sldId="2147483785"/>
-          </pc:sldLayoutMkLst>
-          <pc:spChg chg="mod">
-            <ac:chgData name="Xin Zou" userId="260b9726081dae15" providerId="LiveId" clId="{B55CB833-3568-49B5-9D65-A0FB87B7FBB5}" dt="2018-10-08T00:52:04.753" v="0"/>
-            <ac:spMkLst>
-              <pc:docMk/>
-              <pc:sldMasterMk cId="846276100" sldId="2147483780"/>
-              <pc:sldLayoutMk cId="738730040" sldId="2147483785"/>
-              <ac:spMk id="3" creationId="{00000000-0000-0000-0000-000000000000}"/>
-            </ac:spMkLst>
-          </pc:spChg>
-          <pc:spChg chg="mod">
-            <ac:chgData name="Xin Zou" userId="260b9726081dae15" providerId="LiveId" clId="{B55CB833-3568-49B5-9D65-A0FB87B7FBB5}" dt="2018-10-08T00:52:04.753" v="0"/>
-            <ac:spMkLst>
-              <pc:docMk/>
-              <pc:sldMasterMk cId="846276100" sldId="2147483780"/>
-              <pc:sldLayoutMk cId="738730040" sldId="2147483785"/>
-              <ac:spMk id="4" creationId="{00000000-0000-0000-0000-000000000000}"/>
-            </ac:spMkLst>
-          </pc:spChg>
-          <pc:spChg chg="mod">
-            <ac:chgData name="Xin Zou" userId="260b9726081dae15" providerId="LiveId" clId="{B55CB833-3568-49B5-9D65-A0FB87B7FBB5}" dt="2018-10-08T00:52:04.753" v="0"/>
-            <ac:spMkLst>
-              <pc:docMk/>
-              <pc:sldMasterMk cId="846276100" sldId="2147483780"/>
-              <pc:sldLayoutMk cId="738730040" sldId="2147483785"/>
-              <ac:spMk id="5" creationId="{00000000-0000-0000-0000-000000000000}"/>
-            </ac:spMkLst>
-          </pc:spChg>
-          <pc:spChg chg="mod">
-            <ac:chgData name="Xin Zou" userId="260b9726081dae15" providerId="LiveId" clId="{B55CB833-3568-49B5-9D65-A0FB87B7FBB5}" dt="2018-10-08T00:52:04.753" v="0"/>
-            <ac:spMkLst>
-              <pc:docMk/>
-              <pc:sldMasterMk cId="846276100" sldId="2147483780"/>
-              <pc:sldLayoutMk cId="738730040" sldId="2147483785"/>
-              <ac:spMk id="6" creationId="{00000000-0000-0000-0000-000000000000}"/>
-            </ac:spMkLst>
-          </pc:spChg>
-        </pc:sldLayoutChg>
-        <pc:sldLayoutChg chg="modSp">
-          <pc:chgData name="Xin Zou" userId="260b9726081dae15" providerId="LiveId" clId="{B55CB833-3568-49B5-9D65-A0FB87B7FBB5}" dt="2018-10-08T00:52:04.753" v="0"/>
-          <pc:sldLayoutMkLst>
-            <pc:docMk/>
-            <pc:sldMasterMk cId="846276100" sldId="2147483780"/>
-            <pc:sldLayoutMk cId="116513520" sldId="2147483788"/>
-          </pc:sldLayoutMkLst>
-          <pc:spChg chg="mod">
-            <ac:chgData name="Xin Zou" userId="260b9726081dae15" providerId="LiveId" clId="{B55CB833-3568-49B5-9D65-A0FB87B7FBB5}" dt="2018-10-08T00:52:04.753" v="0"/>
-            <ac:spMkLst>
-              <pc:docMk/>
-              <pc:sldMasterMk cId="846276100" sldId="2147483780"/>
-              <pc:sldLayoutMk cId="116513520" sldId="2147483788"/>
-              <ac:spMk id="2" creationId="{00000000-0000-0000-0000-000000000000}"/>
-            </ac:spMkLst>
-          </pc:spChg>
-          <pc:spChg chg="mod">
-            <ac:chgData name="Xin Zou" userId="260b9726081dae15" providerId="LiveId" clId="{B55CB833-3568-49B5-9D65-A0FB87B7FBB5}" dt="2018-10-08T00:52:04.753" v="0"/>
-            <ac:spMkLst>
-              <pc:docMk/>
-              <pc:sldMasterMk cId="846276100" sldId="2147483780"/>
-              <pc:sldLayoutMk cId="116513520" sldId="2147483788"/>
-              <ac:spMk id="3" creationId="{00000000-0000-0000-0000-000000000000}"/>
-            </ac:spMkLst>
-          </pc:spChg>
-          <pc:spChg chg="mod">
-            <ac:chgData name="Xin Zou" userId="260b9726081dae15" providerId="LiveId" clId="{B55CB833-3568-49B5-9D65-A0FB87B7FBB5}" dt="2018-10-08T00:52:04.753" v="0"/>
-            <ac:spMkLst>
-              <pc:docMk/>
-              <pc:sldMasterMk cId="846276100" sldId="2147483780"/>
-              <pc:sldLayoutMk cId="116513520" sldId="2147483788"/>
-              <ac:spMk id="4" creationId="{00000000-0000-0000-0000-000000000000}"/>
-            </ac:spMkLst>
-          </pc:spChg>
-          <pc:spChg chg="mod">
-            <ac:chgData name="Xin Zou" userId="260b9726081dae15" providerId="LiveId" clId="{B55CB833-3568-49B5-9D65-A0FB87B7FBB5}" dt="2018-10-08T00:52:04.753" v="0"/>
-            <ac:spMkLst>
-              <pc:docMk/>
-              <pc:sldMasterMk cId="846276100" sldId="2147483780"/>
-              <pc:sldLayoutMk cId="116513520" sldId="2147483788"/>
-              <ac:spMk id="9" creationId="{00000000-0000-0000-0000-000000000000}"/>
-            </ac:spMkLst>
-          </pc:spChg>
-          <pc:spChg chg="mod">
-            <ac:chgData name="Xin Zou" userId="260b9726081dae15" providerId="LiveId" clId="{B55CB833-3568-49B5-9D65-A0FB87B7FBB5}" dt="2018-10-08T00:52:04.753" v="0"/>
-            <ac:spMkLst>
-              <pc:docMk/>
-              <pc:sldMasterMk cId="846276100" sldId="2147483780"/>
-              <pc:sldLayoutMk cId="116513520" sldId="2147483788"/>
-              <ac:spMk id="12" creationId="{00000000-0000-0000-0000-000000000000}"/>
-            </ac:spMkLst>
-          </pc:spChg>
-        </pc:sldLayoutChg>
-        <pc:sldLayoutChg chg="modSp">
-          <pc:chgData name="Xin Zou" userId="260b9726081dae15" providerId="LiveId" clId="{B55CB833-3568-49B5-9D65-A0FB87B7FBB5}" dt="2018-10-08T00:52:04.753" v="0"/>
-          <pc:sldLayoutMkLst>
-            <pc:docMk/>
-            <pc:sldMasterMk cId="846276100" sldId="2147483780"/>
-            <pc:sldLayoutMk cId="82185721" sldId="2147483789"/>
-          </pc:sldLayoutMkLst>
-          <pc:spChg chg="mod">
-            <ac:chgData name="Xin Zou" userId="260b9726081dae15" providerId="LiveId" clId="{B55CB833-3568-49B5-9D65-A0FB87B7FBB5}" dt="2018-10-08T00:52:04.753" v="0"/>
-            <ac:spMkLst>
-              <pc:docMk/>
-              <pc:sldMasterMk cId="846276100" sldId="2147483780"/>
-              <pc:sldLayoutMk cId="82185721" sldId="2147483789"/>
-              <ac:spMk id="2" creationId="{00000000-0000-0000-0000-000000000000}"/>
-            </ac:spMkLst>
-          </pc:spChg>
-          <pc:spChg chg="mod">
-            <ac:chgData name="Xin Zou" userId="260b9726081dae15" providerId="LiveId" clId="{B55CB833-3568-49B5-9D65-A0FB87B7FBB5}" dt="2018-10-08T00:52:04.753" v="0"/>
-            <ac:spMkLst>
-              <pc:docMk/>
-              <pc:sldMasterMk cId="846276100" sldId="2147483780"/>
-              <pc:sldLayoutMk cId="82185721" sldId="2147483789"/>
-              <ac:spMk id="3" creationId="{00000000-0000-0000-0000-000000000000}"/>
-            </ac:spMkLst>
-          </pc:spChg>
-          <pc:spChg chg="mod">
-            <ac:chgData name="Xin Zou" userId="260b9726081dae15" providerId="LiveId" clId="{B55CB833-3568-49B5-9D65-A0FB87B7FBB5}" dt="2018-10-08T00:52:04.753" v="0"/>
-            <ac:spMkLst>
-              <pc:docMk/>
-              <pc:sldMasterMk cId="846276100" sldId="2147483780"/>
-              <pc:sldLayoutMk cId="82185721" sldId="2147483789"/>
-              <ac:spMk id="4" creationId="{00000000-0000-0000-0000-000000000000}"/>
-            </ac:spMkLst>
-          </pc:spChg>
-          <pc:spChg chg="mod">
-            <ac:chgData name="Xin Zou" userId="260b9726081dae15" providerId="LiveId" clId="{B55CB833-3568-49B5-9D65-A0FB87B7FBB5}" dt="2018-10-08T00:52:04.753" v="0"/>
-            <ac:spMkLst>
-              <pc:docMk/>
-              <pc:sldMasterMk cId="846276100" sldId="2147483780"/>
-              <pc:sldLayoutMk cId="82185721" sldId="2147483789"/>
-              <ac:spMk id="5" creationId="{00000000-0000-0000-0000-000000000000}"/>
-            </ac:spMkLst>
-          </pc:spChg>
-          <pc:spChg chg="mod">
-            <ac:chgData name="Xin Zou" userId="260b9726081dae15" providerId="LiveId" clId="{B55CB833-3568-49B5-9D65-A0FB87B7FBB5}" dt="2018-10-08T00:52:04.753" v="0"/>
-            <ac:spMkLst>
-              <pc:docMk/>
-              <pc:sldMasterMk cId="846276100" sldId="2147483780"/>
-              <pc:sldLayoutMk cId="82185721" sldId="2147483789"/>
-              <ac:spMk id="6" creationId="{00000000-0000-0000-0000-000000000000}"/>
-            </ac:spMkLst>
-          </pc:spChg>
-          <pc:spChg chg="mod">
-            <ac:chgData name="Xin Zou" userId="260b9726081dae15" providerId="LiveId" clId="{B55CB833-3568-49B5-9D65-A0FB87B7FBB5}" dt="2018-10-08T00:52:04.753" v="0"/>
-            <ac:spMkLst>
-              <pc:docMk/>
-              <pc:sldMasterMk cId="846276100" sldId="2147483780"/>
-              <pc:sldLayoutMk cId="82185721" sldId="2147483789"/>
-              <ac:spMk id="7" creationId="{00000000-0000-0000-0000-000000000000}"/>
-            </ac:spMkLst>
-          </pc:spChg>
-          <pc:spChg chg="mod">
-            <ac:chgData name="Xin Zou" userId="260b9726081dae15" providerId="LiveId" clId="{B55CB833-3568-49B5-9D65-A0FB87B7FBB5}" dt="2018-10-08T00:52:04.753" v="0"/>
-            <ac:spMkLst>
-              <pc:docMk/>
-              <pc:sldMasterMk cId="846276100" sldId="2147483780"/>
-              <pc:sldLayoutMk cId="82185721" sldId="2147483789"/>
-              <ac:spMk id="9" creationId="{00000000-0000-0000-0000-000000000000}"/>
-            </ac:spMkLst>
-          </pc:spChg>
-          <pc:spChg chg="mod">
-            <ac:chgData name="Xin Zou" userId="260b9726081dae15" providerId="LiveId" clId="{B55CB833-3568-49B5-9D65-A0FB87B7FBB5}" dt="2018-10-08T00:52:04.753" v="0"/>
-            <ac:spMkLst>
-              <pc:docMk/>
-              <pc:sldMasterMk cId="846276100" sldId="2147483780"/>
-              <pc:sldLayoutMk cId="82185721" sldId="2147483789"/>
-              <ac:spMk id="11" creationId="{00000000-0000-0000-0000-000000000000}"/>
-            </ac:spMkLst>
-          </pc:spChg>
-        </pc:sldLayoutChg>
-        <pc:sldLayoutChg chg="modSp">
-          <pc:chgData name="Xin Zou" userId="260b9726081dae15" providerId="LiveId" clId="{B55CB833-3568-49B5-9D65-A0FB87B7FBB5}" dt="2018-10-08T00:52:04.753" v="0"/>
-          <pc:sldLayoutMkLst>
-            <pc:docMk/>
-            <pc:sldMasterMk cId="846276100" sldId="2147483780"/>
-            <pc:sldLayoutMk cId="3266833299" sldId="2147483791"/>
-          </pc:sldLayoutMkLst>
-          <pc:spChg chg="mod">
-            <ac:chgData name="Xin Zou" userId="260b9726081dae15" providerId="LiveId" clId="{B55CB833-3568-49B5-9D65-A0FB87B7FBB5}" dt="2018-10-08T00:52:04.753" v="0"/>
-            <ac:spMkLst>
-              <pc:docMk/>
-              <pc:sldMasterMk cId="846276100" sldId="2147483780"/>
-              <pc:sldLayoutMk cId="3266833299" sldId="2147483791"/>
-              <ac:spMk id="2" creationId="{00000000-0000-0000-0000-000000000000}"/>
-            </ac:spMkLst>
-          </pc:spChg>
-          <pc:spChg chg="mod">
-            <ac:chgData name="Xin Zou" userId="260b9726081dae15" providerId="LiveId" clId="{B55CB833-3568-49B5-9D65-A0FB87B7FBB5}" dt="2018-10-08T00:52:04.753" v="0"/>
-            <ac:spMkLst>
-              <pc:docMk/>
-              <pc:sldMasterMk cId="846276100" sldId="2147483780"/>
-              <pc:sldLayoutMk cId="3266833299" sldId="2147483791"/>
-              <ac:spMk id="3" creationId="{00000000-0000-0000-0000-000000000000}"/>
-            </ac:spMkLst>
-          </pc:spChg>
-          <pc:spChg chg="mod">
-            <ac:chgData name="Xin Zou" userId="260b9726081dae15" providerId="LiveId" clId="{B55CB833-3568-49B5-9D65-A0FB87B7FBB5}" dt="2018-10-08T00:52:04.753" v="0"/>
-            <ac:spMkLst>
-              <pc:docMk/>
-              <pc:sldMasterMk cId="846276100" sldId="2147483780"/>
-              <pc:sldLayoutMk cId="3266833299" sldId="2147483791"/>
-              <ac:spMk id="5" creationId="{00000000-0000-0000-0000-000000000000}"/>
-            </ac:spMkLst>
-          </pc:spChg>
-          <pc:spChg chg="mod">
-            <ac:chgData name="Xin Zou" userId="260b9726081dae15" providerId="LiveId" clId="{B55CB833-3568-49B5-9D65-A0FB87B7FBB5}" dt="2018-10-08T00:52:04.753" v="0"/>
-            <ac:spMkLst>
-              <pc:docMk/>
-              <pc:sldMasterMk cId="846276100" sldId="2147483780"/>
-              <pc:sldLayoutMk cId="3266833299" sldId="2147483791"/>
-              <ac:spMk id="8" creationId="{00000000-0000-0000-0000-000000000000}"/>
-            </ac:spMkLst>
-          </pc:spChg>
-          <pc:spChg chg="mod">
-            <ac:chgData name="Xin Zou" userId="260b9726081dae15" providerId="LiveId" clId="{B55CB833-3568-49B5-9D65-A0FB87B7FBB5}" dt="2018-10-08T00:52:04.753" v="0"/>
-            <ac:spMkLst>
-              <pc:docMk/>
-              <pc:sldMasterMk cId="846276100" sldId="2147483780"/>
-              <pc:sldLayoutMk cId="3266833299" sldId="2147483791"/>
-              <ac:spMk id="9" creationId="{00000000-0000-0000-0000-000000000000}"/>
-            </ac:spMkLst>
-          </pc:spChg>
-        </pc:sldLayoutChg>
-      </pc:sldMasterChg>
-    </pc:docChg>
-  </pc:docChgLst>
-</pc:chgInfo>
-</file>
-
 <file path=ppt/diagrams/colors1.xml><?xml version="1.0" encoding="utf-8"?>
 <dgm:colorsDef xmlns:dgm="http://schemas.openxmlformats.org/drawingml/2006/diagram" xmlns:a="http://schemas.openxmlformats.org/drawingml/2006/main" uniqueId="urn:microsoft.com/office/officeart/2005/8/colors/accent6_2">
   <dgm:title val=""/>
@@ -1034,117 +150,39 @@
   <dgm:catLst>
     <dgm:cat type="accent6" pri="11200"/>
   </dgm:catLst>
-  <dgm:styleLbl name="node0">
+  <dgm:styleLbl name="alignAcc1">
     <dgm:fillClrLst meth="repeat">
-      <a:schemeClr val="accent6"/>
-    </dgm:fillClrLst>
-    <dgm:linClrLst meth="repeat">
-      <a:schemeClr val="lt1"/>
-    </dgm:linClrLst>
-    <dgm:effectClrLst/>
-    <dgm:txLinClrLst/>
-    <dgm:txFillClrLst/>
-    <dgm:txEffectClrLst/>
-  </dgm:styleLbl>
-  <dgm:styleLbl name="node1">
-    <dgm:fillClrLst meth="repeat">
-      <a:schemeClr val="accent6"/>
-    </dgm:fillClrLst>
-    <dgm:linClrLst meth="repeat">
-      <a:schemeClr val="lt1"/>
-    </dgm:linClrLst>
-    <dgm:effectClrLst/>
-    <dgm:txLinClrLst/>
-    <dgm:txFillClrLst/>
-    <dgm:txEffectClrLst/>
-  </dgm:styleLbl>
-  <dgm:styleLbl name="alignNode1">
-    <dgm:fillClrLst meth="repeat">
-      <a:schemeClr val="accent6"/>
+      <a:schemeClr val="lt1">
+        <a:alpha val="90000"/>
+      </a:schemeClr>
     </dgm:fillClrLst>
     <dgm:linClrLst meth="repeat">
       <a:schemeClr val="accent6"/>
     </dgm:linClrLst>
     <dgm:effectClrLst/>
     <dgm:txLinClrLst/>
-    <dgm:txFillClrLst/>
+    <dgm:txFillClrLst meth="repeat">
+      <a:schemeClr val="dk1"/>
+    </dgm:txFillClrLst>
     <dgm:txEffectClrLst/>
   </dgm:styleLbl>
-  <dgm:styleLbl name="lnNode1">
-    <dgm:fillClrLst meth="repeat">
-      <a:schemeClr val="accent6"/>
-    </dgm:fillClrLst>
-    <dgm:linClrLst meth="repeat">
-      <a:schemeClr val="lt1"/>
-    </dgm:linClrLst>
-    <dgm:effectClrLst/>
-    <dgm:txLinClrLst/>
-    <dgm:txFillClrLst/>
-    <dgm:txEffectClrLst/>
-  </dgm:styleLbl>
-  <dgm:styleLbl name="vennNode1">
+  <dgm:styleLbl name="alignAccFollowNode1">
     <dgm:fillClrLst meth="repeat">
       <a:schemeClr val="accent6">
-        <a:alpha val="50000"/>
+        <a:alpha val="90000"/>
+        <a:tint val="40000"/>
       </a:schemeClr>
     </dgm:fillClrLst>
     <dgm:linClrLst meth="repeat">
-      <a:schemeClr val="lt1"/>
-    </dgm:linClrLst>
-    <dgm:effectClrLst/>
-    <dgm:txLinClrLst/>
-    <dgm:txFillClrLst/>
-    <dgm:txEffectClrLst/>
-  </dgm:styleLbl>
-  <dgm:styleLbl name="node2">
-    <dgm:fillClrLst meth="repeat">
-      <a:schemeClr val="accent6"/>
-    </dgm:fillClrLst>
-    <dgm:linClrLst meth="repeat">
-      <a:schemeClr val="lt1"/>
-    </dgm:linClrLst>
-    <dgm:effectClrLst/>
-    <dgm:txLinClrLst/>
-    <dgm:txFillClrLst/>
-    <dgm:txEffectClrLst/>
-  </dgm:styleLbl>
-  <dgm:styleLbl name="node3">
-    <dgm:fillClrLst meth="repeat">
-      <a:schemeClr val="accent6"/>
-    </dgm:fillClrLst>
-    <dgm:linClrLst meth="repeat">
-      <a:schemeClr val="lt1"/>
-    </dgm:linClrLst>
-    <dgm:effectClrLst/>
-    <dgm:txLinClrLst/>
-    <dgm:txFillClrLst/>
-    <dgm:txEffectClrLst/>
-  </dgm:styleLbl>
-  <dgm:styleLbl name="node4">
-    <dgm:fillClrLst meth="repeat">
-      <a:schemeClr val="accent6"/>
-    </dgm:fillClrLst>
-    <dgm:linClrLst meth="repeat">
-      <a:schemeClr val="lt1"/>
-    </dgm:linClrLst>
-    <dgm:effectClrLst/>
-    <dgm:txLinClrLst/>
-    <dgm:txFillClrLst/>
-    <dgm:txEffectClrLst/>
-  </dgm:styleLbl>
-  <dgm:styleLbl name="fgImgPlace1">
-    <dgm:fillClrLst meth="repeat">
       <a:schemeClr val="accent6">
-        <a:tint val="50000"/>
+        <a:alpha val="90000"/>
+        <a:tint val="40000"/>
       </a:schemeClr>
-    </dgm:fillClrLst>
-    <dgm:linClrLst meth="repeat">
-      <a:schemeClr val="lt1"/>
     </dgm:linClrLst>
     <dgm:effectClrLst/>
     <dgm:txLinClrLst/>
     <dgm:txFillClrLst meth="repeat">
-      <a:schemeClr val="lt1"/>
+      <a:schemeClr val="dk1"/>
     </dgm:txFillClrLst>
     <dgm:txEffectClrLst/>
   </dgm:styleLbl>
@@ -1164,71 +202,7 @@
     </dgm:txFillClrLst>
     <dgm:txEffectClrLst/>
   </dgm:styleLbl>
-  <dgm:styleLbl name="bgImgPlace1">
-    <dgm:fillClrLst meth="repeat">
-      <a:schemeClr val="accent6">
-        <a:tint val="50000"/>
-      </a:schemeClr>
-    </dgm:fillClrLst>
-    <dgm:linClrLst meth="repeat">
-      <a:schemeClr val="lt1"/>
-    </dgm:linClrLst>
-    <dgm:effectClrLst/>
-    <dgm:txLinClrLst/>
-    <dgm:txFillClrLst meth="repeat">
-      <a:schemeClr val="lt1"/>
-    </dgm:txFillClrLst>
-    <dgm:txEffectClrLst/>
-  </dgm:styleLbl>
-  <dgm:styleLbl name="sibTrans2D1">
-    <dgm:fillClrLst meth="repeat">
-      <a:schemeClr val="accent6">
-        <a:tint val="60000"/>
-      </a:schemeClr>
-    </dgm:fillClrLst>
-    <dgm:linClrLst meth="repeat">
-      <a:schemeClr val="accent6">
-        <a:tint val="60000"/>
-      </a:schemeClr>
-    </dgm:linClrLst>
-    <dgm:effectClrLst/>
-    <dgm:txLinClrLst/>
-    <dgm:txFillClrLst/>
-    <dgm:txEffectClrLst/>
-  </dgm:styleLbl>
-  <dgm:styleLbl name="fgSibTrans2D1">
-    <dgm:fillClrLst meth="repeat">
-      <a:schemeClr val="accent6">
-        <a:tint val="60000"/>
-      </a:schemeClr>
-    </dgm:fillClrLst>
-    <dgm:linClrLst meth="repeat">
-      <a:schemeClr val="accent6">
-        <a:tint val="60000"/>
-      </a:schemeClr>
-    </dgm:linClrLst>
-    <dgm:effectClrLst/>
-    <dgm:txLinClrLst/>
-    <dgm:txFillClrLst/>
-    <dgm:txEffectClrLst/>
-  </dgm:styleLbl>
-  <dgm:styleLbl name="bgSibTrans2D1">
-    <dgm:fillClrLst meth="repeat">
-      <a:schemeClr val="accent6">
-        <a:tint val="60000"/>
-      </a:schemeClr>
-    </dgm:fillClrLst>
-    <dgm:linClrLst meth="repeat">
-      <a:schemeClr val="accent6">
-        <a:tint val="60000"/>
-      </a:schemeClr>
-    </dgm:linClrLst>
-    <dgm:effectClrLst/>
-    <dgm:txLinClrLst/>
-    <dgm:txFillClrLst/>
-    <dgm:txEffectClrLst/>
-  </dgm:styleLbl>
-  <dgm:styleLbl name="sibTrans1D1">
+  <dgm:styleLbl name="alignNode1">
     <dgm:fillClrLst meth="repeat">
       <a:schemeClr val="accent6"/>
     </dgm:fillClrLst>
@@ -1237,25 +211,7 @@
     </dgm:linClrLst>
     <dgm:effectClrLst/>
     <dgm:txLinClrLst/>
-    <dgm:txFillClrLst meth="repeat">
-      <a:schemeClr val="tx1"/>
-    </dgm:txFillClrLst>
-    <dgm:txEffectClrLst/>
-  </dgm:styleLbl>
-  <dgm:styleLbl name="callout">
-    <dgm:fillClrLst meth="repeat">
-      <a:schemeClr val="accent6"/>
-    </dgm:fillClrLst>
-    <dgm:linClrLst meth="repeat">
-      <a:schemeClr val="accent6">
-        <a:tint val="50000"/>
-      </a:schemeClr>
-    </dgm:linClrLst>
-    <dgm:effectClrLst/>
-    <dgm:txLinClrLst/>
-    <dgm:txFillClrLst meth="repeat">
-      <a:schemeClr val="tx1"/>
-    </dgm:txFillClrLst>
+    <dgm:txFillClrLst/>
     <dgm:txEffectClrLst/>
   </dgm:styleLbl>
   <dgm:styleLbl name="asst0">
@@ -1318,7 +274,75 @@
     <dgm:txFillClrLst/>
     <dgm:txEffectClrLst/>
   </dgm:styleLbl>
-  <dgm:styleLbl name="parChTrans2D1">
+  <dgm:styleLbl name="bgAcc1">
+    <dgm:fillClrLst meth="repeat">
+      <a:schemeClr val="lt1">
+        <a:alpha val="90000"/>
+      </a:schemeClr>
+    </dgm:fillClrLst>
+    <dgm:linClrLst meth="repeat">
+      <a:schemeClr val="accent6"/>
+    </dgm:linClrLst>
+    <dgm:effectClrLst/>
+    <dgm:txLinClrLst/>
+    <dgm:txFillClrLst meth="repeat">
+      <a:schemeClr val="dk1"/>
+    </dgm:txFillClrLst>
+    <dgm:txEffectClrLst/>
+  </dgm:styleLbl>
+  <dgm:styleLbl name="bgAccFollowNode1">
+    <dgm:fillClrLst meth="repeat">
+      <a:schemeClr val="accent6">
+        <a:alpha val="90000"/>
+        <a:tint val="40000"/>
+      </a:schemeClr>
+    </dgm:fillClrLst>
+    <dgm:linClrLst meth="repeat">
+      <a:schemeClr val="accent6">
+        <a:alpha val="90000"/>
+        <a:tint val="40000"/>
+      </a:schemeClr>
+    </dgm:linClrLst>
+    <dgm:effectClrLst/>
+    <dgm:txLinClrLst/>
+    <dgm:txFillClrLst meth="repeat">
+      <a:schemeClr val="dk1"/>
+    </dgm:txFillClrLst>
+    <dgm:txEffectClrLst/>
+  </dgm:styleLbl>
+  <dgm:styleLbl name="bgImgPlace1">
+    <dgm:fillClrLst meth="repeat">
+      <a:schemeClr val="accent6">
+        <a:tint val="50000"/>
+      </a:schemeClr>
+    </dgm:fillClrLst>
+    <dgm:linClrLst meth="repeat">
+      <a:schemeClr val="lt1"/>
+    </dgm:linClrLst>
+    <dgm:effectClrLst/>
+    <dgm:txLinClrLst/>
+    <dgm:txFillClrLst meth="repeat">
+      <a:schemeClr val="lt1"/>
+    </dgm:txFillClrLst>
+    <dgm:txEffectClrLst/>
+  </dgm:styleLbl>
+  <dgm:styleLbl name="bgShp">
+    <dgm:fillClrLst meth="repeat">
+      <a:schemeClr val="accent6">
+        <a:tint val="40000"/>
+      </a:schemeClr>
+    </dgm:fillClrLst>
+    <dgm:linClrLst meth="repeat">
+      <a:schemeClr val="accent6"/>
+    </dgm:linClrLst>
+    <dgm:effectClrLst/>
+    <dgm:txLinClrLst/>
+    <dgm:txFillClrLst meth="repeat">
+      <a:schemeClr val="dk1"/>
+    </dgm:txFillClrLst>
+    <dgm:txEffectClrLst/>
+  </dgm:styleLbl>
+  <dgm:styleLbl name="bgSibTrans2D1">
     <dgm:fillClrLst meth="repeat">
       <a:schemeClr val="accent6">
         <a:tint val="60000"/>
@@ -1331,14 +355,46 @@
     </dgm:linClrLst>
     <dgm:effectClrLst/>
     <dgm:txLinClrLst/>
+    <dgm:txFillClrLst/>
+    <dgm:txEffectClrLst/>
+  </dgm:styleLbl>
+  <dgm:styleLbl name="callout">
+    <dgm:fillClrLst meth="repeat">
+      <a:schemeClr val="accent6"/>
+    </dgm:fillClrLst>
+    <dgm:linClrLst meth="repeat">
+      <a:schemeClr val="accent6">
+        <a:tint val="50000"/>
+      </a:schemeClr>
+    </dgm:linClrLst>
+    <dgm:effectClrLst/>
+    <dgm:txLinClrLst/>
     <dgm:txFillClrLst meth="repeat">
-      <a:schemeClr val="lt1"/>
+      <a:schemeClr val="tx1"/>
     </dgm:txFillClrLst>
     <dgm:txEffectClrLst/>
   </dgm:styleLbl>
-  <dgm:styleLbl name="parChTrans2D2">
+  <dgm:styleLbl name="conFgAcc1">
     <dgm:fillClrLst meth="repeat">
+      <a:schemeClr val="lt1">
+        <a:alpha val="90000"/>
+      </a:schemeClr>
+    </dgm:fillClrLst>
+    <dgm:linClrLst meth="repeat">
       <a:schemeClr val="accent6"/>
+    </dgm:linClrLst>
+    <dgm:effectClrLst/>
+    <dgm:txLinClrLst/>
+    <dgm:txFillClrLst meth="repeat">
+      <a:schemeClr val="dk1"/>
+    </dgm:txFillClrLst>
+    <dgm:txEffectClrLst/>
+  </dgm:styleLbl>
+  <dgm:styleLbl name="dkBgShp">
+    <dgm:fillClrLst meth="repeat">
+      <a:schemeClr val="accent6">
+        <a:shade val="80000"/>
+      </a:schemeClr>
     </dgm:fillClrLst>
     <dgm:linClrLst meth="repeat">
       <a:schemeClr val="accent6"/>
@@ -1350,12 +406,114 @@
     </dgm:txFillClrLst>
     <dgm:txEffectClrLst/>
   </dgm:styleLbl>
-  <dgm:styleLbl name="parChTrans2D3">
+  <dgm:styleLbl name="fgAcc0">
     <dgm:fillClrLst meth="repeat">
-      <a:schemeClr val="accent6"/>
+      <a:schemeClr val="lt1">
+        <a:alpha val="90000"/>
+      </a:schemeClr>
     </dgm:fillClrLst>
     <dgm:linClrLst meth="repeat">
       <a:schemeClr val="accent6"/>
+    </dgm:linClrLst>
+    <dgm:effectClrLst/>
+    <dgm:txLinClrLst/>
+    <dgm:txFillClrLst meth="repeat">
+      <a:schemeClr val="dk1"/>
+    </dgm:txFillClrLst>
+    <dgm:txEffectClrLst/>
+  </dgm:styleLbl>
+  <dgm:styleLbl name="fgAcc1">
+    <dgm:fillClrLst meth="repeat">
+      <a:schemeClr val="lt1">
+        <a:alpha val="90000"/>
+      </a:schemeClr>
+    </dgm:fillClrLst>
+    <dgm:linClrLst meth="repeat">
+      <a:schemeClr val="accent6"/>
+    </dgm:linClrLst>
+    <dgm:effectClrLst/>
+    <dgm:txLinClrLst/>
+    <dgm:txFillClrLst meth="repeat">
+      <a:schemeClr val="dk1"/>
+    </dgm:txFillClrLst>
+    <dgm:txEffectClrLst/>
+  </dgm:styleLbl>
+  <dgm:styleLbl name="fgAcc2">
+    <dgm:fillClrLst meth="repeat">
+      <a:schemeClr val="lt1">
+        <a:alpha val="90000"/>
+      </a:schemeClr>
+    </dgm:fillClrLst>
+    <dgm:linClrLst meth="repeat">
+      <a:schemeClr val="accent6"/>
+    </dgm:linClrLst>
+    <dgm:effectClrLst/>
+    <dgm:txLinClrLst/>
+    <dgm:txFillClrLst meth="repeat">
+      <a:schemeClr val="dk1"/>
+    </dgm:txFillClrLst>
+    <dgm:txEffectClrLst/>
+  </dgm:styleLbl>
+  <dgm:styleLbl name="fgAcc3">
+    <dgm:fillClrLst meth="repeat">
+      <a:schemeClr val="lt1">
+        <a:alpha val="90000"/>
+      </a:schemeClr>
+    </dgm:fillClrLst>
+    <dgm:linClrLst meth="repeat">
+      <a:schemeClr val="accent6"/>
+    </dgm:linClrLst>
+    <dgm:effectClrLst/>
+    <dgm:txLinClrLst/>
+    <dgm:txFillClrLst meth="repeat">
+      <a:schemeClr val="dk1"/>
+    </dgm:txFillClrLst>
+    <dgm:txEffectClrLst/>
+  </dgm:styleLbl>
+  <dgm:styleLbl name="fgAcc4">
+    <dgm:fillClrLst meth="repeat">
+      <a:schemeClr val="lt1">
+        <a:alpha val="90000"/>
+      </a:schemeClr>
+    </dgm:fillClrLst>
+    <dgm:linClrLst meth="repeat">
+      <a:schemeClr val="accent6"/>
+    </dgm:linClrLst>
+    <dgm:effectClrLst/>
+    <dgm:txLinClrLst/>
+    <dgm:txFillClrLst meth="repeat">
+      <a:schemeClr val="dk1"/>
+    </dgm:txFillClrLst>
+    <dgm:txEffectClrLst/>
+  </dgm:styleLbl>
+  <dgm:styleLbl name="fgAccFollowNode1">
+    <dgm:fillClrLst meth="repeat">
+      <a:schemeClr val="accent6">
+        <a:alpha val="90000"/>
+        <a:tint val="40000"/>
+      </a:schemeClr>
+    </dgm:fillClrLst>
+    <dgm:linClrLst meth="repeat">
+      <a:schemeClr val="accent6">
+        <a:alpha val="90000"/>
+        <a:tint val="40000"/>
+      </a:schemeClr>
+    </dgm:linClrLst>
+    <dgm:effectClrLst/>
+    <dgm:txLinClrLst/>
+    <dgm:txFillClrLst meth="repeat">
+      <a:schemeClr val="dk1"/>
+    </dgm:txFillClrLst>
+    <dgm:txEffectClrLst/>
+  </dgm:styleLbl>
+  <dgm:styleLbl name="fgImgPlace1">
+    <dgm:fillClrLst meth="repeat">
+      <a:schemeClr val="accent6">
+        <a:tint val="50000"/>
+      </a:schemeClr>
+    </dgm:fillClrLst>
+    <dgm:linClrLst meth="repeat">
+      <a:schemeClr val="lt1"/>
     </dgm:linClrLst>
     <dgm:effectClrLst/>
     <dgm:txLinClrLst/>
@@ -1364,18 +522,108 @@
     </dgm:txFillClrLst>
     <dgm:txEffectClrLst/>
   </dgm:styleLbl>
-  <dgm:styleLbl name="parChTrans2D4">
+  <dgm:styleLbl name="fgShp">
+    <dgm:fillClrLst meth="repeat">
+      <a:schemeClr val="accent6">
+        <a:tint val="60000"/>
+      </a:schemeClr>
+    </dgm:fillClrLst>
+    <dgm:linClrLst meth="repeat">
+      <a:schemeClr val="lt1"/>
+    </dgm:linClrLst>
+    <dgm:effectClrLst/>
+    <dgm:txLinClrLst/>
+    <dgm:txFillClrLst meth="repeat">
+      <a:schemeClr val="dk1"/>
+    </dgm:txFillClrLst>
+    <dgm:txEffectClrLst/>
+  </dgm:styleLbl>
+  <dgm:styleLbl name="fgSibTrans2D1">
+    <dgm:fillClrLst meth="repeat">
+      <a:schemeClr val="accent6">
+        <a:tint val="60000"/>
+      </a:schemeClr>
+    </dgm:fillClrLst>
+    <dgm:linClrLst meth="repeat">
+      <a:schemeClr val="accent6">
+        <a:tint val="60000"/>
+      </a:schemeClr>
+    </dgm:linClrLst>
+    <dgm:effectClrLst/>
+    <dgm:txLinClrLst/>
+    <dgm:txFillClrLst/>
+    <dgm:txEffectClrLst/>
+  </dgm:styleLbl>
+  <dgm:styleLbl name="lnNode1">
     <dgm:fillClrLst meth="repeat">
       <a:schemeClr val="accent6"/>
     </dgm:fillClrLst>
     <dgm:linClrLst meth="repeat">
-      <a:schemeClr val="accent6"/>
+      <a:schemeClr val="lt1"/>
     </dgm:linClrLst>
     <dgm:effectClrLst/>
     <dgm:txLinClrLst/>
-    <dgm:txFillClrLst meth="repeat">
+    <dgm:txFillClrLst/>
+    <dgm:txEffectClrLst/>
+  </dgm:styleLbl>
+  <dgm:styleLbl name="node0">
+    <dgm:fillClrLst meth="repeat">
+      <a:schemeClr val="accent6"/>
+    </dgm:fillClrLst>
+    <dgm:linClrLst meth="repeat">
       <a:schemeClr val="lt1"/>
-    </dgm:txFillClrLst>
+    </dgm:linClrLst>
+    <dgm:effectClrLst/>
+    <dgm:txLinClrLst/>
+    <dgm:txFillClrLst/>
+    <dgm:txEffectClrLst/>
+  </dgm:styleLbl>
+  <dgm:styleLbl name="node1">
+    <dgm:fillClrLst meth="repeat">
+      <a:schemeClr val="accent6"/>
+    </dgm:fillClrLst>
+    <dgm:linClrLst meth="repeat">
+      <a:schemeClr val="lt1"/>
+    </dgm:linClrLst>
+    <dgm:effectClrLst/>
+    <dgm:txLinClrLst/>
+    <dgm:txFillClrLst/>
+    <dgm:txEffectClrLst/>
+  </dgm:styleLbl>
+  <dgm:styleLbl name="node2">
+    <dgm:fillClrLst meth="repeat">
+      <a:schemeClr val="accent6"/>
+    </dgm:fillClrLst>
+    <dgm:linClrLst meth="repeat">
+      <a:schemeClr val="lt1"/>
+    </dgm:linClrLst>
+    <dgm:effectClrLst/>
+    <dgm:txLinClrLst/>
+    <dgm:txFillClrLst/>
+    <dgm:txEffectClrLst/>
+  </dgm:styleLbl>
+  <dgm:styleLbl name="node3">
+    <dgm:fillClrLst meth="repeat">
+      <a:schemeClr val="accent6"/>
+    </dgm:fillClrLst>
+    <dgm:linClrLst meth="repeat">
+      <a:schemeClr val="lt1"/>
+    </dgm:linClrLst>
+    <dgm:effectClrLst/>
+    <dgm:txLinClrLst/>
+    <dgm:txFillClrLst/>
+    <dgm:txEffectClrLst/>
+  </dgm:styleLbl>
+  <dgm:styleLbl name="node4">
+    <dgm:fillClrLst meth="repeat">
+      <a:schemeClr val="accent6"/>
+    </dgm:fillClrLst>
+    <dgm:linClrLst meth="repeat">
+      <a:schemeClr val="lt1"/>
+    </dgm:linClrLst>
+    <dgm:effectClrLst/>
+    <dgm:txLinClrLst/>
+    <dgm:txFillClrLst/>
     <dgm:txEffectClrLst/>
   </dgm:styleLbl>
   <dgm:styleLbl name="parChTrans1D1">
@@ -1442,11 +690,27 @@
     </dgm:txFillClrLst>
     <dgm:txEffectClrLst/>
   </dgm:styleLbl>
-  <dgm:styleLbl name="fgAcc1">
+  <dgm:styleLbl name="parChTrans2D1">
     <dgm:fillClrLst meth="repeat">
-      <a:schemeClr val="lt1">
-        <a:alpha val="90000"/>
+      <a:schemeClr val="accent6">
+        <a:tint val="60000"/>
       </a:schemeClr>
+    </dgm:fillClrLst>
+    <dgm:linClrLst meth="repeat">
+      <a:schemeClr val="accent6">
+        <a:tint val="60000"/>
+      </a:schemeClr>
+    </dgm:linClrLst>
+    <dgm:effectClrLst/>
+    <dgm:txLinClrLst/>
+    <dgm:txFillClrLst meth="repeat">
+      <a:schemeClr val="lt1"/>
+    </dgm:txFillClrLst>
+    <dgm:txEffectClrLst/>
+  </dgm:styleLbl>
+  <dgm:styleLbl name="parChTrans2D2">
+    <dgm:fillClrLst meth="repeat">
+      <a:schemeClr val="accent6"/>
     </dgm:fillClrLst>
     <dgm:linClrLst meth="repeat">
       <a:schemeClr val="accent6"/>
@@ -1454,15 +718,13 @@
     <dgm:effectClrLst/>
     <dgm:txLinClrLst/>
     <dgm:txFillClrLst meth="repeat">
-      <a:schemeClr val="dk1"/>
+      <a:schemeClr val="lt1"/>
     </dgm:txFillClrLst>
     <dgm:txEffectClrLst/>
   </dgm:styleLbl>
-  <dgm:styleLbl name="conFgAcc1">
+  <dgm:styleLbl name="parChTrans2D3">
     <dgm:fillClrLst meth="repeat">
-      <a:schemeClr val="lt1">
-        <a:alpha val="90000"/>
-      </a:schemeClr>
+      <a:schemeClr val="accent6"/>
     </dgm:fillClrLst>
     <dgm:linClrLst meth="repeat">
       <a:schemeClr val="accent6"/>
@@ -1470,15 +732,13 @@
     <dgm:effectClrLst/>
     <dgm:txLinClrLst/>
     <dgm:txFillClrLst meth="repeat">
-      <a:schemeClr val="dk1"/>
+      <a:schemeClr val="lt1"/>
     </dgm:txFillClrLst>
     <dgm:txEffectClrLst/>
   </dgm:styleLbl>
-  <dgm:styleLbl name="alignAcc1">
+  <dgm:styleLbl name="parChTrans2D4">
     <dgm:fillClrLst meth="repeat">
-      <a:schemeClr val="lt1">
-        <a:alpha val="90000"/>
-      </a:schemeClr>
+      <a:schemeClr val="accent6"/>
     </dgm:fillClrLst>
     <dgm:linClrLst meth="repeat">
       <a:schemeClr val="accent6"/>
@@ -1486,15 +746,31 @@
     <dgm:effectClrLst/>
     <dgm:txLinClrLst/>
     <dgm:txFillClrLst meth="repeat">
-      <a:schemeClr val="dk1"/>
+      <a:schemeClr val="lt1"/>
     </dgm:txFillClrLst>
     <dgm:txEffectClrLst/>
   </dgm:styleLbl>
-  <dgm:styleLbl name="trAlignAcc1">
+  <dgm:styleLbl name="revTx">
     <dgm:fillClrLst meth="repeat">
       <a:schemeClr val="lt1">
-        <a:alpha val="40000"/>
+        <a:alpha val="0"/>
       </a:schemeClr>
+    </dgm:fillClrLst>
+    <dgm:linClrLst meth="repeat">
+      <a:schemeClr val="dk1">
+        <a:alpha val="0"/>
+      </a:schemeClr>
+    </dgm:linClrLst>
+    <dgm:effectClrLst/>
+    <dgm:txLinClrLst/>
+    <dgm:txFillClrLst meth="repeat">
+      <a:schemeClr val="tx1"/>
+    </dgm:txFillClrLst>
+    <dgm:txEffectClrLst/>
+  </dgm:styleLbl>
+  <dgm:styleLbl name="sibTrans1D1">
+    <dgm:fillClrLst meth="repeat">
+      <a:schemeClr val="accent6"/>
     </dgm:fillClrLst>
     <dgm:linClrLst meth="repeat">
       <a:schemeClr val="accent6"/>
@@ -1502,38 +778,24 @@
     <dgm:effectClrLst/>
     <dgm:txLinClrLst/>
     <dgm:txFillClrLst meth="repeat">
-      <a:schemeClr val="dk1"/>
+      <a:schemeClr val="tx1"/>
     </dgm:txFillClrLst>
     <dgm:txEffectClrLst/>
   </dgm:styleLbl>
-  <dgm:styleLbl name="bgAcc1">
+  <dgm:styleLbl name="sibTrans2D1">
     <dgm:fillClrLst meth="repeat">
-      <a:schemeClr val="lt1">
-        <a:alpha val="90000"/>
+      <a:schemeClr val="accent6">
+        <a:tint val="60000"/>
       </a:schemeClr>
     </dgm:fillClrLst>
     <dgm:linClrLst meth="repeat">
-      <a:schemeClr val="accent6"/>
+      <a:schemeClr val="accent6">
+        <a:tint val="60000"/>
+      </a:schemeClr>
     </dgm:linClrLst>
     <dgm:effectClrLst/>
     <dgm:txLinClrLst/>
-    <dgm:txFillClrLst meth="repeat">
-      <a:schemeClr val="dk1"/>
-    </dgm:txFillClrLst>
-    <dgm:txEffectClrLst/>
-  </dgm:styleLbl>
-  <dgm:styleLbl name="solidFgAcc1">
-    <dgm:fillClrLst meth="repeat">
-      <a:schemeClr val="lt1"/>
-    </dgm:fillClrLst>
-    <dgm:linClrLst meth="repeat">
-      <a:schemeClr val="accent6"/>
-    </dgm:linClrLst>
-    <dgm:effectClrLst/>
-    <dgm:txLinClrLst/>
-    <dgm:txFillClrLst meth="repeat">
-      <a:schemeClr val="dk1"/>
-    </dgm:txFillClrLst>
+    <dgm:txFillClrLst/>
     <dgm:txEffectClrLst/>
   </dgm:styleLbl>
   <dgm:styleLbl name="solidAlignAcc1">
@@ -1564,71 +826,9 @@
     </dgm:txFillClrLst>
     <dgm:txEffectClrLst/>
   </dgm:styleLbl>
-  <dgm:styleLbl name="fgAccFollowNode1">
+  <dgm:styleLbl name="solidFgAcc1">
     <dgm:fillClrLst meth="repeat">
-      <a:schemeClr val="accent6">
-        <a:alpha val="90000"/>
-        <a:tint val="40000"/>
-      </a:schemeClr>
-    </dgm:fillClrLst>
-    <dgm:linClrLst meth="repeat">
-      <a:schemeClr val="accent6">
-        <a:alpha val="90000"/>
-        <a:tint val="40000"/>
-      </a:schemeClr>
-    </dgm:linClrLst>
-    <dgm:effectClrLst/>
-    <dgm:txLinClrLst/>
-    <dgm:txFillClrLst meth="repeat">
-      <a:schemeClr val="dk1"/>
-    </dgm:txFillClrLst>
-    <dgm:txEffectClrLst/>
-  </dgm:styleLbl>
-  <dgm:styleLbl name="alignAccFollowNode1">
-    <dgm:fillClrLst meth="repeat">
-      <a:schemeClr val="accent6">
-        <a:alpha val="90000"/>
-        <a:tint val="40000"/>
-      </a:schemeClr>
-    </dgm:fillClrLst>
-    <dgm:linClrLst meth="repeat">
-      <a:schemeClr val="accent6">
-        <a:alpha val="90000"/>
-        <a:tint val="40000"/>
-      </a:schemeClr>
-    </dgm:linClrLst>
-    <dgm:effectClrLst/>
-    <dgm:txLinClrLst/>
-    <dgm:txFillClrLst meth="repeat">
-      <a:schemeClr val="dk1"/>
-    </dgm:txFillClrLst>
-    <dgm:txEffectClrLst/>
-  </dgm:styleLbl>
-  <dgm:styleLbl name="bgAccFollowNode1">
-    <dgm:fillClrLst meth="repeat">
-      <a:schemeClr val="accent6">
-        <a:alpha val="90000"/>
-        <a:tint val="40000"/>
-      </a:schemeClr>
-    </dgm:fillClrLst>
-    <dgm:linClrLst meth="repeat">
-      <a:schemeClr val="accent6">
-        <a:alpha val="90000"/>
-        <a:tint val="40000"/>
-      </a:schemeClr>
-    </dgm:linClrLst>
-    <dgm:effectClrLst/>
-    <dgm:txLinClrLst/>
-    <dgm:txFillClrLst meth="repeat">
-      <a:schemeClr val="dk1"/>
-    </dgm:txFillClrLst>
-    <dgm:txEffectClrLst/>
-  </dgm:styleLbl>
-  <dgm:styleLbl name="fgAcc0">
-    <dgm:fillClrLst meth="repeat">
-      <a:schemeClr val="lt1">
-        <a:alpha val="90000"/>
-      </a:schemeClr>
+      <a:schemeClr val="lt1"/>
     </dgm:fillClrLst>
     <dgm:linClrLst meth="repeat">
       <a:schemeClr val="accent6"/>
@@ -1640,10 +840,10 @@
     </dgm:txFillClrLst>
     <dgm:txEffectClrLst/>
   </dgm:styleLbl>
-  <dgm:styleLbl name="fgAcc2">
+  <dgm:styleLbl name="trAlignAcc1">
     <dgm:fillClrLst meth="repeat">
       <a:schemeClr val="lt1">
-        <a:alpha val="90000"/>
+        <a:alpha val="40000"/>
       </a:schemeClr>
     </dgm:fillClrLst>
     <dgm:linClrLst meth="repeat">
@@ -1653,70 +853,6 @@
     <dgm:txLinClrLst/>
     <dgm:txFillClrLst meth="repeat">
       <a:schemeClr val="dk1"/>
-    </dgm:txFillClrLst>
-    <dgm:txEffectClrLst/>
-  </dgm:styleLbl>
-  <dgm:styleLbl name="fgAcc3">
-    <dgm:fillClrLst meth="repeat">
-      <a:schemeClr val="lt1">
-        <a:alpha val="90000"/>
-      </a:schemeClr>
-    </dgm:fillClrLst>
-    <dgm:linClrLst meth="repeat">
-      <a:schemeClr val="accent6"/>
-    </dgm:linClrLst>
-    <dgm:effectClrLst/>
-    <dgm:txLinClrLst/>
-    <dgm:txFillClrLst meth="repeat">
-      <a:schemeClr val="dk1"/>
-    </dgm:txFillClrLst>
-    <dgm:txEffectClrLst/>
-  </dgm:styleLbl>
-  <dgm:styleLbl name="fgAcc4">
-    <dgm:fillClrLst meth="repeat">
-      <a:schemeClr val="lt1">
-        <a:alpha val="90000"/>
-      </a:schemeClr>
-    </dgm:fillClrLst>
-    <dgm:linClrLst meth="repeat">
-      <a:schemeClr val="accent6"/>
-    </dgm:linClrLst>
-    <dgm:effectClrLst/>
-    <dgm:txLinClrLst/>
-    <dgm:txFillClrLst meth="repeat">
-      <a:schemeClr val="dk1"/>
-    </dgm:txFillClrLst>
-    <dgm:txEffectClrLst/>
-  </dgm:styleLbl>
-  <dgm:styleLbl name="bgShp">
-    <dgm:fillClrLst meth="repeat">
-      <a:schemeClr val="accent6">
-        <a:tint val="40000"/>
-      </a:schemeClr>
-    </dgm:fillClrLst>
-    <dgm:linClrLst meth="repeat">
-      <a:schemeClr val="accent6"/>
-    </dgm:linClrLst>
-    <dgm:effectClrLst/>
-    <dgm:txLinClrLst/>
-    <dgm:txFillClrLst meth="repeat">
-      <a:schemeClr val="dk1"/>
-    </dgm:txFillClrLst>
-    <dgm:txEffectClrLst/>
-  </dgm:styleLbl>
-  <dgm:styleLbl name="dkBgShp">
-    <dgm:fillClrLst meth="repeat">
-      <a:schemeClr val="accent6">
-        <a:shade val="80000"/>
-      </a:schemeClr>
-    </dgm:fillClrLst>
-    <dgm:linClrLst meth="repeat">
-      <a:schemeClr val="accent6"/>
-    </dgm:linClrLst>
-    <dgm:effectClrLst/>
-    <dgm:txLinClrLst/>
-    <dgm:txFillClrLst meth="repeat">
-      <a:schemeClr val="lt1"/>
     </dgm:txFillClrLst>
     <dgm:txEffectClrLst/>
   </dgm:styleLbl>
@@ -1737,10 +873,10 @@
     </dgm:txFillClrLst>
     <dgm:txEffectClrLst/>
   </dgm:styleLbl>
-  <dgm:styleLbl name="fgShp">
+  <dgm:styleLbl name="vennNode1">
     <dgm:fillClrLst meth="repeat">
       <a:schemeClr val="accent6">
-        <a:tint val="60000"/>
+        <a:alpha val="50000"/>
       </a:schemeClr>
     </dgm:fillClrLst>
     <dgm:linClrLst meth="repeat">
@@ -1748,27 +884,7 @@
     </dgm:linClrLst>
     <dgm:effectClrLst/>
     <dgm:txLinClrLst/>
-    <dgm:txFillClrLst meth="repeat">
-      <a:schemeClr val="dk1"/>
-    </dgm:txFillClrLst>
-    <dgm:txEffectClrLst/>
-  </dgm:styleLbl>
-  <dgm:styleLbl name="revTx">
-    <dgm:fillClrLst meth="repeat">
-      <a:schemeClr val="lt1">
-        <a:alpha val="0"/>
-      </a:schemeClr>
-    </dgm:fillClrLst>
-    <dgm:linClrLst meth="repeat">
-      <a:schemeClr val="dk1">
-        <a:alpha val="0"/>
-      </a:schemeClr>
-    </dgm:linClrLst>
-    <dgm:effectClrLst/>
-    <dgm:txLinClrLst/>
-    <dgm:txFillClrLst meth="repeat">
-      <a:schemeClr val="tx1"/>
-    </dgm:txFillClrLst>
+    <dgm:txFillClrLst/>
     <dgm:txEffectClrLst/>
   </dgm:styleLbl>
 </dgm:colorsDef>
@@ -1807,7 +923,7 @@
         </a:p>
       </dgm:t>
     </dgm:pt>
-    <dgm:pt modelId="{396298CB-2037-40C6-B406-B860D20C1CC6}" type="parTrans" cxnId="{18F0CB4F-8AFE-47C9-A8A7-57B21A438AFC}">
+    <dgm:pt modelId="{396298CB-2037-40C6-B406-B860D20C1CC6}" cxnId="{18F0CB4F-8AFE-47C9-A8A7-57B21A438AFC}" type="parTrans">
       <dgm:prSet/>
       <dgm:spPr/>
       <dgm:t>
@@ -1818,7 +934,7 @@
         </a:p>
       </dgm:t>
     </dgm:pt>
-    <dgm:pt modelId="{CC414898-C5AD-49CE-8215-9EDC326B7FC5}" type="sibTrans" cxnId="{18F0CB4F-8AFE-47C9-A8A7-57B21A438AFC}">
+    <dgm:pt modelId="{CC414898-C5AD-49CE-8215-9EDC326B7FC5}" cxnId="{18F0CB4F-8AFE-47C9-A8A7-57B21A438AFC}" type="sibTrans">
       <dgm:prSet/>
       <dgm:spPr/>
       <dgm:t>
@@ -1864,7 +980,7 @@
         </a:p>
       </dgm:t>
     </dgm:pt>
-    <dgm:pt modelId="{DF910A9D-A527-4A2A-BE23-55B6F3998106}" type="parTrans" cxnId="{B849AC62-02BD-4C81-88BD-FA1FCE4C5116}">
+    <dgm:pt modelId="{DF910A9D-A527-4A2A-BE23-55B6F3998106}" cxnId="{B849AC62-02BD-4C81-88BD-FA1FCE4C5116}" type="parTrans">
       <dgm:prSet/>
       <dgm:spPr/>
       <dgm:t>
@@ -1875,7 +991,7 @@
         </a:p>
       </dgm:t>
     </dgm:pt>
-    <dgm:pt modelId="{5B504091-E90E-4087-BFF0-7300F0166A4A}" type="sibTrans" cxnId="{B849AC62-02BD-4C81-88BD-FA1FCE4C5116}">
+    <dgm:pt modelId="{5B504091-E90E-4087-BFF0-7300F0166A4A}" cxnId="{B849AC62-02BD-4C81-88BD-FA1FCE4C5116}" type="sibTrans">
       <dgm:prSet/>
       <dgm:spPr/>
       <dgm:t>
@@ -1913,7 +1029,7 @@
         </a:p>
       </dgm:t>
     </dgm:pt>
-    <dgm:pt modelId="{B9C675AC-DD01-4EB7-B9D7-31E0F788E78B}" type="parTrans" cxnId="{05A0CAA0-A784-4D86-9CD2-ED8EB3BFD367}">
+    <dgm:pt modelId="{B9C675AC-DD01-4EB7-B9D7-31E0F788E78B}" cxnId="{05A0CAA0-A784-4D86-9CD2-ED8EB3BFD367}" type="parTrans">
       <dgm:prSet/>
       <dgm:spPr/>
       <dgm:t>
@@ -1924,7 +1040,7 @@
         </a:p>
       </dgm:t>
     </dgm:pt>
-    <dgm:pt modelId="{C2D01B66-1FA1-47D1-B312-2DB2EBA03D04}" type="sibTrans" cxnId="{05A0CAA0-A784-4D86-9CD2-ED8EB3BFD367}">
+    <dgm:pt modelId="{C2D01B66-1FA1-47D1-B312-2DB2EBA03D04}" cxnId="{05A0CAA0-A784-4D86-9CD2-ED8EB3BFD367}" type="sibTrans">
       <dgm:prSet/>
       <dgm:spPr/>
       <dgm:t>
@@ -1954,7 +1070,7 @@
         </a:p>
       </dgm:t>
     </dgm:pt>
-    <dgm:pt modelId="{7D8BE620-E359-4D36-A0FC-2444A08F0EA7}" type="parTrans" cxnId="{9C114923-BE82-4A3C-B7BF-FC3BAB944CD2}">
+    <dgm:pt modelId="{7D8BE620-E359-4D36-A0FC-2444A08F0EA7}" cxnId="{9C114923-BE82-4A3C-B7BF-FC3BAB944CD2}" type="parTrans">
       <dgm:prSet/>
       <dgm:spPr/>
       <dgm:t>
@@ -1965,7 +1081,7 @@
         </a:p>
       </dgm:t>
     </dgm:pt>
-    <dgm:pt modelId="{B428C00B-4225-4452-9130-2D90D12D3276}" type="sibTrans" cxnId="{9C114923-BE82-4A3C-B7BF-FC3BAB944CD2}">
+    <dgm:pt modelId="{B428C00B-4225-4452-9130-2D90D12D3276}" cxnId="{9C114923-BE82-4A3C-B7BF-FC3BAB944CD2}" type="sibTrans">
       <dgm:prSet/>
       <dgm:spPr/>
       <dgm:t>
@@ -1995,7 +1111,7 @@
         </a:p>
       </dgm:t>
     </dgm:pt>
-    <dgm:pt modelId="{0CE7A48B-DE55-4C8D-8D39-67490B947390}" type="parTrans" cxnId="{2E18E122-B0DB-4EA5-9150-50540D5648D2}">
+    <dgm:pt modelId="{0CE7A48B-DE55-4C8D-8D39-67490B947390}" cxnId="{2E18E122-B0DB-4EA5-9150-50540D5648D2}" type="parTrans">
       <dgm:prSet/>
       <dgm:spPr/>
       <dgm:t>
@@ -2006,7 +1122,7 @@
         </a:p>
       </dgm:t>
     </dgm:pt>
-    <dgm:pt modelId="{6F6DA9A0-70DE-479D-BEDE-9D8E6A7C7B64}" type="sibTrans" cxnId="{2E18E122-B0DB-4EA5-9150-50540D5648D2}">
+    <dgm:pt modelId="{6F6DA9A0-70DE-479D-BEDE-9D8E6A7C7B64}" cxnId="{2E18E122-B0DB-4EA5-9150-50540D5648D2}" type="sibTrans">
       <dgm:prSet/>
       <dgm:spPr/>
       <dgm:t>
@@ -2036,7 +1152,7 @@
         </a:p>
       </dgm:t>
     </dgm:pt>
-    <dgm:pt modelId="{4B7B9700-BF73-455E-A57D-B6AE11C86C54}" type="parTrans" cxnId="{36B5A1F0-5700-4608-80D5-31D7B70E44AC}">
+    <dgm:pt modelId="{4B7B9700-BF73-455E-A57D-B6AE11C86C54}" cxnId="{36B5A1F0-5700-4608-80D5-31D7B70E44AC}" type="parTrans">
       <dgm:prSet/>
       <dgm:spPr/>
       <dgm:t>
@@ -2047,7 +1163,7 @@
         </a:p>
       </dgm:t>
     </dgm:pt>
-    <dgm:pt modelId="{6E8686A0-1025-4687-B223-09E2ACACEA5B}" type="sibTrans" cxnId="{36B5A1F0-5700-4608-80D5-31D7B70E44AC}">
+    <dgm:pt modelId="{6E8686A0-1025-4687-B223-09E2ACACEA5B}" cxnId="{36B5A1F0-5700-4608-80D5-31D7B70E44AC}" type="sibTrans">
       <dgm:prSet/>
       <dgm:spPr/>
       <dgm:t>
@@ -2077,7 +1193,7 @@
         </a:p>
       </dgm:t>
     </dgm:pt>
-    <dgm:pt modelId="{7F42747B-97AA-4C0B-90C9-312E44B7C0AF}" type="parTrans" cxnId="{486B83F4-56DF-4CAB-AE63-F8570EFF50F8}">
+    <dgm:pt modelId="{7F42747B-97AA-4C0B-90C9-312E44B7C0AF}" cxnId="{486B83F4-56DF-4CAB-AE63-F8570EFF50F8}" type="parTrans">
       <dgm:prSet/>
       <dgm:spPr/>
       <dgm:t>
@@ -2088,7 +1204,7 @@
         </a:p>
       </dgm:t>
     </dgm:pt>
-    <dgm:pt modelId="{C6B18ADD-C8C8-4F96-9C24-B30645B25645}" type="sibTrans" cxnId="{486B83F4-56DF-4CAB-AE63-F8570EFF50F8}">
+    <dgm:pt modelId="{C6B18ADD-C8C8-4F96-9C24-B30645B25645}" cxnId="{486B83F4-56DF-4CAB-AE63-F8570EFF50F8}" type="sibTrans">
       <dgm:prSet/>
       <dgm:spPr/>
       <dgm:t>
@@ -2118,7 +1234,7 @@
         </a:p>
       </dgm:t>
     </dgm:pt>
-    <dgm:pt modelId="{15234FC7-D1B8-4991-9CD8-0D25FDCE2A84}" type="parTrans" cxnId="{4F06FCC1-8B5B-436C-ABD7-E5AA54E47D9B}">
+    <dgm:pt modelId="{15234FC7-D1B8-4991-9CD8-0D25FDCE2A84}" cxnId="{4F06FCC1-8B5B-436C-ABD7-E5AA54E47D9B}" type="parTrans">
       <dgm:prSet/>
       <dgm:spPr/>
       <dgm:t>
@@ -2129,7 +1245,7 @@
         </a:p>
       </dgm:t>
     </dgm:pt>
-    <dgm:pt modelId="{5EA64FA6-37CE-4B43-80EE-357BBD5BFE44}" type="sibTrans" cxnId="{4F06FCC1-8B5B-436C-ABD7-E5AA54E47D9B}">
+    <dgm:pt modelId="{5EA64FA6-37CE-4B43-80EE-357BBD5BFE44}" cxnId="{4F06FCC1-8B5B-436C-ABD7-E5AA54E47D9B}" type="sibTrans">
       <dgm:prSet/>
       <dgm:spPr/>
       <dgm:t>
@@ -2334,26 +1450,33 @@
   <dgm:whole/>
   <dgm:extLst>
     <a:ext uri="http://schemas.microsoft.com/office/drawing/2008/diagram">
-      <dsp:dataModelExt xmlns:dsp="http://schemas.microsoft.com/office/drawing/2008/diagram" relId="rId7" minVer="http://schemas.openxmlformats.org/drawingml/2006/diagram"/>
+      <dsp:dataModelExt xmlns:dsp="http://schemas.microsoft.com/office/drawing/2008/diagram" relId="rId6" minVer="http://schemas.openxmlformats.org/drawingml/2006/diagram"/>
     </a:ext>
   </dgm:extLst>
 </dgm:dataModel>
 </file>
 
 <file path=ppt/diagrams/drawing1.xml><?xml version="1.0" encoding="utf-8"?>
-<dsp:drawing xmlns:dgm="http://schemas.openxmlformats.org/drawingml/2006/diagram" xmlns:dsp="http://schemas.microsoft.com/office/drawing/2008/diagram" xmlns:a="http://schemas.openxmlformats.org/drawingml/2006/main">
+<dsp:drawing xmlns:dgm="http://schemas.openxmlformats.org/drawingml/2006/diagram" xmlns:dsp="http://schemas.microsoft.com/office/drawing/2008/diagram" xmlns:a="http://schemas.openxmlformats.org/drawingml/2006/main" xmlns:r="http://schemas.openxmlformats.org/officeDocument/2006/relationships">
   <dsp:spTree>
     <dsp:nvGrpSpPr>
-      <dsp:cNvPr id="0" name=""/>
+      <dsp:cNvPr id="2" name="组合 1"/>
       <dsp:cNvGrpSpPr/>
     </dsp:nvGrpSpPr>
-    <dsp:grpSpPr/>
+    <dsp:grpSpPr>
+      <a:xfrm>
+        <a:off x="0" y="0"/>
+        <a:ext cx="6912245" cy="5536883"/>
+        <a:chOff x="0" y="0"/>
+        <a:chExt cx="6912245" cy="5536883"/>
+      </a:xfrm>
+    </dsp:grpSpPr>
     <dsp:sp modelId="{CACCE9CC-B4E4-4D92-978E-B8D407788CE3}">
       <dsp:nvSpPr>
-        <dsp:cNvPr id="0" name=""/>
+        <dsp:cNvPr id="3" name="直接连接符 2"/>
         <dsp:cNvSpPr/>
       </dsp:nvSpPr>
-      <dsp:spPr>
+      <dsp:spPr bwMode="white">
         <a:xfrm>
           <a:off x="0" y="0"/>
           <a:ext cx="6912245" cy="0"/>
@@ -2361,34 +1484,13 @@
         <a:prstGeom prst="line">
           <a:avLst/>
         </a:prstGeom>
-        <a:solidFill>
-          <a:schemeClr val="accent6">
-            <a:hueOff val="0"/>
-            <a:satOff val="0"/>
-            <a:lumOff val="0"/>
-            <a:alphaOff val="0"/>
-          </a:schemeClr>
-        </a:solidFill>
-        <a:ln w="12700" cap="flat" cmpd="sng" algn="ctr">
-          <a:solidFill>
-            <a:schemeClr val="accent6">
-              <a:hueOff val="0"/>
-              <a:satOff val="0"/>
-              <a:lumOff val="0"/>
-              <a:alphaOff val="0"/>
-            </a:schemeClr>
-          </a:solidFill>
-          <a:prstDash val="solid"/>
-          <a:miter lim="800000"/>
-        </a:ln>
-        <a:effectLst/>
       </dsp:spPr>
       <dsp:style>
         <a:lnRef idx="2">
-          <a:scrgbClr r="0" g="0" b="0"/>
+          <a:schemeClr val="accent6"/>
         </a:lnRef>
         <a:fillRef idx="1">
-          <a:scrgbClr r="0" g="0" b="0"/>
+          <a:schemeClr val="accent6"/>
         </a:fillRef>
         <a:effectRef idx="0">
           <a:scrgbClr r="0" g="0" b="0"/>
@@ -2397,13 +1499,17 @@
           <a:schemeClr val="lt1"/>
         </a:fontRef>
       </dsp:style>
+      <dsp:txXfrm>
+        <a:off x="0" y="0"/>
+        <a:ext cx="6912245" cy="0"/>
+      </dsp:txXfrm>
     </dsp:sp>
     <dsp:sp modelId="{611C6A86-EE01-407E-B053-A278DF4AAB05}">
       <dsp:nvSpPr>
-        <dsp:cNvPr id="0" name=""/>
+        <dsp:cNvPr id="4" name="矩形 3"/>
         <dsp:cNvSpPr/>
       </dsp:nvSpPr>
-      <dsp:spPr>
+      <dsp:spPr bwMode="white">
         <a:xfrm>
           <a:off x="0" y="0"/>
           <a:ext cx="6912245" cy="692110"/>
@@ -2411,18 +1517,17 @@
         <a:prstGeom prst="rect">
           <a:avLst/>
         </a:prstGeom>
-        <a:noFill/>
-        <a:ln>
-          <a:noFill/>
-        </a:ln>
-        <a:effectLst/>
       </dsp:spPr>
       <dsp:style>
         <a:lnRef idx="0">
-          <a:scrgbClr r="0" g="0" b="0"/>
+          <a:schemeClr val="dk1">
+            <a:alpha val="0"/>
+          </a:schemeClr>
         </a:lnRef>
         <a:fillRef idx="0">
-          <a:scrgbClr r="0" g="0" b="0"/>
+          <a:schemeClr val="lt1">
+            <a:alpha val="0"/>
+          </a:schemeClr>
         </a:fillRef>
         <a:effectRef idx="0">
           <a:scrgbClr r="0" g="0" b="0"/>
@@ -2430,14 +1535,40 @@
         <a:fontRef idx="minor"/>
       </dsp:style>
       <dsp:txBody>
-        <a:bodyPr spcFirstLastPara="0" vert="horz" wrap="square" lIns="53340" tIns="53340" rIns="53340" bIns="53340" numCol="1" spcCol="1270" anchor="t" anchorCtr="0">
-          <a:noAutofit/>
-        </a:bodyPr>
-        <a:lstStyle/>
+        <a:bodyPr lIns="64769" tIns="64769" rIns="64769" bIns="64769" anchor="t"/>
+        <a:lstStyle>
+          <a:lvl1pPr algn="l">
+            <a:defRPr sz="1700"/>
+          </a:lvl1pPr>
+          <a:lvl2pPr marL="114300" indent="-114300" algn="l">
+            <a:defRPr sz="1300"/>
+          </a:lvl2pPr>
+          <a:lvl3pPr marL="228600" indent="-114300" algn="l">
+            <a:defRPr sz="1300"/>
+          </a:lvl3pPr>
+          <a:lvl4pPr marL="342900" indent="-114300" algn="l">
+            <a:defRPr sz="1300"/>
+          </a:lvl4pPr>
+          <a:lvl5pPr marL="457200" indent="-114300" algn="l">
+            <a:defRPr sz="1300"/>
+          </a:lvl5pPr>
+          <a:lvl6pPr marL="571500" indent="-114300" algn="l">
+            <a:defRPr sz="1300"/>
+          </a:lvl6pPr>
+          <a:lvl7pPr marL="685800" indent="-114300" algn="l">
+            <a:defRPr sz="1300"/>
+          </a:lvl7pPr>
+          <a:lvl8pPr marL="800100" indent="-114300" algn="l">
+            <a:defRPr sz="1300"/>
+          </a:lvl8pPr>
+          <a:lvl9pPr marL="914400" indent="-114300" algn="l">
+            <a:defRPr sz="1300"/>
+          </a:lvl9pPr>
+        </a:lstStyle>
         <a:p>
-          <a:pPr marL="0" lvl="0" indent="0" algn="l" defTabSz="622300">
+          <a:pPr lvl="0">
             <a:lnSpc>
-              <a:spcPct val="90000"/>
+              <a:spcPct val="100000"/>
             </a:lnSpc>
             <a:spcBef>
               <a:spcPct val="0"/>
@@ -2445,17 +1576,28 @@
             <a:spcAft>
               <a:spcPct val="35000"/>
             </a:spcAft>
-            <a:buNone/>
           </a:pPr>
           <a:r>
-            <a:rPr lang="en-US" sz="1400" kern="1200" dirty="0"/>
+            <a:rPr lang="en-US" dirty="0">
+              <a:solidFill>
+                <a:schemeClr val="tx1"/>
+              </a:solidFill>
+            </a:rPr>
             <a:t>1. </a:t>
           </a:r>
           <a:r>
-            <a:rPr lang="zh-CN" sz="1400" kern="1200" dirty="0"/>
+            <a:rPr lang="zh-CN" dirty="0">
+              <a:solidFill>
+                <a:schemeClr val="tx1"/>
+              </a:solidFill>
+            </a:rPr>
             <a:t>保持会议轻松愉快的氛围，可以考虑换一个开会的环境，如有饮料、零食相伴 就更好了。 </a:t>
           </a:r>
-          <a:endParaRPr lang="en-US" sz="1400" kern="1200" dirty="0"/>
+          <a:endParaRPr lang="en-US" dirty="0">
+            <a:solidFill>
+              <a:schemeClr val="tx1"/>
+            </a:solidFill>
+          </a:endParaRPr>
         </a:p>
       </dsp:txBody>
       <dsp:txXfrm>
@@ -2465,10 +1607,10 @@
     </dsp:sp>
     <dsp:sp modelId="{6F7E5C8E-E337-46E0-9030-B82EC656696C}">
       <dsp:nvSpPr>
-        <dsp:cNvPr id="0" name=""/>
+        <dsp:cNvPr id="5" name="直接连接符 4"/>
         <dsp:cNvSpPr/>
       </dsp:nvSpPr>
-      <dsp:spPr>
+      <dsp:spPr bwMode="white">
         <a:xfrm>
           <a:off x="0" y="692110"/>
           <a:ext cx="6912245" cy="0"/>
@@ -2476,34 +1618,13 @@
         <a:prstGeom prst="line">
           <a:avLst/>
         </a:prstGeom>
-        <a:solidFill>
-          <a:schemeClr val="accent6">
-            <a:hueOff val="0"/>
-            <a:satOff val="0"/>
-            <a:lumOff val="0"/>
-            <a:alphaOff val="0"/>
-          </a:schemeClr>
-        </a:solidFill>
-        <a:ln w="12700" cap="flat" cmpd="sng" algn="ctr">
-          <a:solidFill>
-            <a:schemeClr val="accent6">
-              <a:hueOff val="0"/>
-              <a:satOff val="0"/>
-              <a:lumOff val="0"/>
-              <a:alphaOff val="0"/>
-            </a:schemeClr>
-          </a:solidFill>
-          <a:prstDash val="solid"/>
-          <a:miter lim="800000"/>
-        </a:ln>
-        <a:effectLst/>
       </dsp:spPr>
       <dsp:style>
         <a:lnRef idx="2">
-          <a:scrgbClr r="0" g="0" b="0"/>
+          <a:schemeClr val="accent6"/>
         </a:lnRef>
         <a:fillRef idx="1">
-          <a:scrgbClr r="0" g="0" b="0"/>
+          <a:schemeClr val="accent6"/>
         </a:fillRef>
         <a:effectRef idx="0">
           <a:scrgbClr r="0" g="0" b="0"/>
@@ -2512,13 +1633,17 @@
           <a:schemeClr val="lt1"/>
         </a:fontRef>
       </dsp:style>
+      <dsp:txXfrm>
+        <a:off x="0" y="692110"/>
+        <a:ext cx="6912245" cy="0"/>
+      </dsp:txXfrm>
     </dsp:sp>
     <dsp:sp modelId="{4A04762E-A42D-4FBF-B2D5-ABC422F427BE}">
       <dsp:nvSpPr>
-        <dsp:cNvPr id="0" name=""/>
+        <dsp:cNvPr id="6" name="矩形 5"/>
         <dsp:cNvSpPr/>
       </dsp:nvSpPr>
-      <dsp:spPr>
+      <dsp:spPr bwMode="white">
         <a:xfrm>
           <a:off x="0" y="692110"/>
           <a:ext cx="6912245" cy="692110"/>
@@ -2526,18 +1651,17 @@
         <a:prstGeom prst="rect">
           <a:avLst/>
         </a:prstGeom>
-        <a:noFill/>
-        <a:ln>
-          <a:noFill/>
-        </a:ln>
-        <a:effectLst/>
       </dsp:spPr>
       <dsp:style>
         <a:lnRef idx="0">
-          <a:scrgbClr r="0" g="0" b="0"/>
+          <a:schemeClr val="dk1">
+            <a:alpha val="0"/>
+          </a:schemeClr>
         </a:lnRef>
         <a:fillRef idx="0">
-          <a:scrgbClr r="0" g="0" b="0"/>
+          <a:schemeClr val="lt1">
+            <a:alpha val="0"/>
+          </a:schemeClr>
         </a:fillRef>
         <a:effectRef idx="0">
           <a:scrgbClr r="0" g="0" b="0"/>
@@ -2545,14 +1669,40 @@
         <a:fontRef idx="minor"/>
       </dsp:style>
       <dsp:txBody>
-        <a:bodyPr spcFirstLastPara="0" vert="horz" wrap="square" lIns="53340" tIns="53340" rIns="53340" bIns="53340" numCol="1" spcCol="1270" anchor="t" anchorCtr="0">
-          <a:noAutofit/>
-        </a:bodyPr>
-        <a:lstStyle/>
+        <a:bodyPr lIns="64769" tIns="64769" rIns="64769" bIns="64769" anchor="t"/>
+        <a:lstStyle>
+          <a:lvl1pPr algn="l">
+            <a:defRPr sz="1700"/>
+          </a:lvl1pPr>
+          <a:lvl2pPr marL="114300" indent="-114300" algn="l">
+            <a:defRPr sz="1300"/>
+          </a:lvl2pPr>
+          <a:lvl3pPr marL="228600" indent="-114300" algn="l">
+            <a:defRPr sz="1300"/>
+          </a:lvl3pPr>
+          <a:lvl4pPr marL="342900" indent="-114300" algn="l">
+            <a:defRPr sz="1300"/>
+          </a:lvl4pPr>
+          <a:lvl5pPr marL="457200" indent="-114300" algn="l">
+            <a:defRPr sz="1300"/>
+          </a:lvl5pPr>
+          <a:lvl6pPr marL="571500" indent="-114300" algn="l">
+            <a:defRPr sz="1300"/>
+          </a:lvl6pPr>
+          <a:lvl7pPr marL="685800" indent="-114300" algn="l">
+            <a:defRPr sz="1300"/>
+          </a:lvl7pPr>
+          <a:lvl8pPr marL="800100" indent="-114300" algn="l">
+            <a:defRPr sz="1300"/>
+          </a:lvl8pPr>
+          <a:lvl9pPr marL="914400" indent="-114300" algn="l">
+            <a:defRPr sz="1300"/>
+          </a:lvl9pPr>
+        </a:lstStyle>
         <a:p>
-          <a:pPr marL="0" lvl="0" indent="0" algn="l" defTabSz="622300">
+          <a:pPr lvl="0">
             <a:lnSpc>
-              <a:spcPct val="90000"/>
+              <a:spcPct val="100000"/>
             </a:lnSpc>
             <a:spcBef>
               <a:spcPct val="0"/>
@@ -2560,33 +1710,60 @@
             <a:spcAft>
               <a:spcPct val="35000"/>
             </a:spcAft>
-            <a:buNone/>
           </a:pPr>
           <a:r>
-            <a:rPr lang="en-US" sz="1400" kern="1200"/>
+            <a:rPr lang="en-US">
+              <a:solidFill>
+                <a:schemeClr val="tx1"/>
+              </a:solidFill>
+            </a:rPr>
             <a:t>2. </a:t>
           </a:r>
           <a:r>
-            <a:rPr lang="zh-CN" sz="1400" kern="1200"/>
+            <a:rPr lang="zh-CN">
+              <a:solidFill>
+                <a:schemeClr val="tx1"/>
+              </a:solidFill>
+            </a:rPr>
             <a:t>当 </a:t>
           </a:r>
           <a:r>
-            <a:rPr lang="en-US" sz="1400" kern="1200"/>
+            <a:rPr lang="en-US">
+              <a:solidFill>
+                <a:schemeClr val="tx1"/>
+              </a:solidFill>
+            </a:rPr>
             <a:t>[ </a:t>
           </a:r>
           <a:r>
-            <a:rPr lang="zh-CN" sz="1400" kern="1200"/>
+            <a:rPr lang="zh-CN">
+              <a:solidFill>
+                <a:schemeClr val="tx1"/>
+              </a:solidFill>
+            </a:rPr>
             <a:t>大官</a:t>
           </a:r>
           <a:r>
-            <a:rPr lang="en-US" sz="1400" kern="1200"/>
+            <a:rPr lang="en-US">
+              <a:solidFill>
+                <a:schemeClr val="tx1"/>
+              </a:solidFill>
+            </a:rPr>
             <a:t>] </a:t>
           </a:r>
           <a:r>
-            <a:rPr lang="zh-CN" sz="1400" kern="1200"/>
+            <a:rPr lang="zh-CN">
+              <a:solidFill>
+                <a:schemeClr val="tx1"/>
+              </a:solidFill>
+            </a:rPr>
             <a:t>的最好不要出现，让大家畅所欲言。（即使出现，也要夹着尾巴，不要为自 己以前的行为辩护，当个好听众。） </a:t>
           </a:r>
-          <a:endParaRPr lang="en-US" sz="1400" kern="1200"/>
+          <a:endParaRPr lang="en-US">
+            <a:solidFill>
+              <a:schemeClr val="tx1"/>
+            </a:solidFill>
+          </a:endParaRPr>
         </a:p>
       </dsp:txBody>
       <dsp:txXfrm>
@@ -2596,45 +1773,24 @@
     </dsp:sp>
     <dsp:sp modelId="{1A0858CD-0F1F-4152-AC71-12BE0768E5B3}">
       <dsp:nvSpPr>
-        <dsp:cNvPr id="0" name=""/>
+        <dsp:cNvPr id="7" name="直接连接符 6"/>
         <dsp:cNvSpPr/>
       </dsp:nvSpPr>
-      <dsp:spPr>
+      <dsp:spPr bwMode="white">
         <a:xfrm>
-          <a:off x="0" y="1384220"/>
+          <a:off x="0" y="1384221"/>
           <a:ext cx="6912245" cy="0"/>
         </a:xfrm>
         <a:prstGeom prst="line">
           <a:avLst/>
         </a:prstGeom>
-        <a:solidFill>
-          <a:schemeClr val="accent6">
-            <a:hueOff val="0"/>
-            <a:satOff val="0"/>
-            <a:lumOff val="0"/>
-            <a:alphaOff val="0"/>
-          </a:schemeClr>
-        </a:solidFill>
-        <a:ln w="12700" cap="flat" cmpd="sng" algn="ctr">
-          <a:solidFill>
-            <a:schemeClr val="accent6">
-              <a:hueOff val="0"/>
-              <a:satOff val="0"/>
-              <a:lumOff val="0"/>
-              <a:alphaOff val="0"/>
-            </a:schemeClr>
-          </a:solidFill>
-          <a:prstDash val="solid"/>
-          <a:miter lim="800000"/>
-        </a:ln>
-        <a:effectLst/>
       </dsp:spPr>
       <dsp:style>
         <a:lnRef idx="2">
-          <a:scrgbClr r="0" g="0" b="0"/>
+          <a:schemeClr val="accent6"/>
         </a:lnRef>
         <a:fillRef idx="1">
-          <a:scrgbClr r="0" g="0" b="0"/>
+          <a:schemeClr val="accent6"/>
         </a:fillRef>
         <a:effectRef idx="0">
           <a:scrgbClr r="0" g="0" b="0"/>
@@ -2643,32 +1799,35 @@
           <a:schemeClr val="lt1"/>
         </a:fontRef>
       </dsp:style>
+      <dsp:txXfrm>
+        <a:off x="0" y="1384221"/>
+        <a:ext cx="6912245" cy="0"/>
+      </dsp:txXfrm>
     </dsp:sp>
     <dsp:sp modelId="{7CF22D40-6A27-4144-9DAE-4D44B8326DEC}">
       <dsp:nvSpPr>
-        <dsp:cNvPr id="0" name=""/>
+        <dsp:cNvPr id="8" name="矩形 7"/>
         <dsp:cNvSpPr/>
       </dsp:nvSpPr>
-      <dsp:spPr>
+      <dsp:spPr bwMode="white">
         <a:xfrm>
-          <a:off x="0" y="1384220"/>
+          <a:off x="0" y="1384221"/>
           <a:ext cx="6912245" cy="692110"/>
         </a:xfrm>
         <a:prstGeom prst="rect">
           <a:avLst/>
         </a:prstGeom>
-        <a:noFill/>
-        <a:ln>
-          <a:noFill/>
-        </a:ln>
-        <a:effectLst/>
       </dsp:spPr>
       <dsp:style>
         <a:lnRef idx="0">
-          <a:scrgbClr r="0" g="0" b="0"/>
+          <a:schemeClr val="dk1">
+            <a:alpha val="0"/>
+          </a:schemeClr>
         </a:lnRef>
         <a:fillRef idx="0">
-          <a:scrgbClr r="0" g="0" b="0"/>
+          <a:schemeClr val="lt1">
+            <a:alpha val="0"/>
+          </a:schemeClr>
         </a:fillRef>
         <a:effectRef idx="0">
           <a:scrgbClr r="0" g="0" b="0"/>
@@ -2676,14 +1835,40 @@
         <a:fontRef idx="minor"/>
       </dsp:style>
       <dsp:txBody>
-        <a:bodyPr spcFirstLastPara="0" vert="horz" wrap="square" lIns="53340" tIns="53340" rIns="53340" bIns="53340" numCol="1" spcCol="1270" anchor="t" anchorCtr="0">
-          <a:noAutofit/>
-        </a:bodyPr>
-        <a:lstStyle/>
+        <a:bodyPr lIns="64769" tIns="64769" rIns="64769" bIns="64769" anchor="t"/>
+        <a:lstStyle>
+          <a:lvl1pPr algn="l">
+            <a:defRPr sz="1700"/>
+          </a:lvl1pPr>
+          <a:lvl2pPr marL="114300" indent="-114300" algn="l">
+            <a:defRPr sz="1300"/>
+          </a:lvl2pPr>
+          <a:lvl3pPr marL="228600" indent="-114300" algn="l">
+            <a:defRPr sz="1300"/>
+          </a:lvl3pPr>
+          <a:lvl4pPr marL="342900" indent="-114300" algn="l">
+            <a:defRPr sz="1300"/>
+          </a:lvl4pPr>
+          <a:lvl5pPr marL="457200" indent="-114300" algn="l">
+            <a:defRPr sz="1300"/>
+          </a:lvl5pPr>
+          <a:lvl6pPr marL="571500" indent="-114300" algn="l">
+            <a:defRPr sz="1300"/>
+          </a:lvl6pPr>
+          <a:lvl7pPr marL="685800" indent="-114300" algn="l">
+            <a:defRPr sz="1300"/>
+          </a:lvl7pPr>
+          <a:lvl8pPr marL="800100" indent="-114300" algn="l">
+            <a:defRPr sz="1300"/>
+          </a:lvl8pPr>
+          <a:lvl9pPr marL="914400" indent="-114300" algn="l">
+            <a:defRPr sz="1300"/>
+          </a:lvl9pPr>
+        </a:lstStyle>
         <a:p>
-          <a:pPr marL="0" lvl="0" indent="0" algn="l" defTabSz="622300">
+          <a:pPr lvl="0">
             <a:lnSpc>
-              <a:spcPct val="90000"/>
+              <a:spcPct val="100000"/>
             </a:lnSpc>
             <a:spcBef>
               <a:spcPct val="0"/>
@@ -2691,38 +1876,57 @@
             <a:spcAft>
               <a:spcPct val="35000"/>
             </a:spcAft>
-            <a:buNone/>
           </a:pPr>
           <a:r>
-            <a:rPr lang="en-US" sz="1400" kern="1200"/>
+            <a:rPr lang="en-US">
+              <a:solidFill>
+                <a:schemeClr val="tx1"/>
+              </a:solidFill>
+            </a:rPr>
             <a:t>3. </a:t>
           </a:r>
           <a:r>
-            <a:rPr lang="zh-CN" sz="1400" kern="1200"/>
+            <a:rPr lang="zh-CN">
+              <a:solidFill>
+                <a:schemeClr val="tx1"/>
+              </a:solidFill>
+            </a:rPr>
             <a:t>坚持对事不对人的原创，强调</a:t>
           </a:r>
           <a:r>
-            <a:rPr lang="en-US" sz="1400" kern="1200"/>
+            <a:rPr lang="en-US">
+              <a:solidFill>
+                <a:schemeClr val="tx1"/>
+              </a:solidFill>
+            </a:rPr>
             <a:t>— </a:t>
           </a:r>
           <a:r>
-            <a:rPr lang="zh-CN" sz="1400" kern="1200"/>
+            <a:rPr lang="zh-CN">
+              <a:solidFill>
+                <a:schemeClr val="tx1"/>
+              </a:solidFill>
+            </a:rPr>
             <a:t>如果再有一次机会，会如何改进？而不是挖历史 旧账。 </a:t>
           </a:r>
-          <a:endParaRPr lang="en-US" sz="1400" kern="1200"/>
+          <a:endParaRPr lang="en-US">
+            <a:solidFill>
+              <a:schemeClr val="tx1"/>
+            </a:solidFill>
+          </a:endParaRPr>
         </a:p>
       </dsp:txBody>
       <dsp:txXfrm>
-        <a:off x="0" y="1384220"/>
+        <a:off x="0" y="1384221"/>
         <a:ext cx="6912245" cy="692110"/>
       </dsp:txXfrm>
     </dsp:sp>
     <dsp:sp modelId="{809D47BF-6F27-4E03-B0A5-621AD4384EDE}">
       <dsp:nvSpPr>
-        <dsp:cNvPr id="0" name=""/>
+        <dsp:cNvPr id="9" name="直接连接符 8"/>
         <dsp:cNvSpPr/>
       </dsp:nvSpPr>
-      <dsp:spPr>
+      <dsp:spPr bwMode="white">
         <a:xfrm>
           <a:off x="0" y="2076331"/>
           <a:ext cx="6912245" cy="0"/>
@@ -2730,34 +1934,13 @@
         <a:prstGeom prst="line">
           <a:avLst/>
         </a:prstGeom>
-        <a:solidFill>
-          <a:schemeClr val="accent6">
-            <a:hueOff val="0"/>
-            <a:satOff val="0"/>
-            <a:lumOff val="0"/>
-            <a:alphaOff val="0"/>
-          </a:schemeClr>
-        </a:solidFill>
-        <a:ln w="12700" cap="flat" cmpd="sng" algn="ctr">
-          <a:solidFill>
-            <a:schemeClr val="accent6">
-              <a:hueOff val="0"/>
-              <a:satOff val="0"/>
-              <a:lumOff val="0"/>
-              <a:alphaOff val="0"/>
-            </a:schemeClr>
-          </a:solidFill>
-          <a:prstDash val="solid"/>
-          <a:miter lim="800000"/>
-        </a:ln>
-        <a:effectLst/>
       </dsp:spPr>
       <dsp:style>
         <a:lnRef idx="2">
-          <a:scrgbClr r="0" g="0" b="0"/>
+          <a:schemeClr val="accent6"/>
         </a:lnRef>
         <a:fillRef idx="1">
-          <a:scrgbClr r="0" g="0" b="0"/>
+          <a:schemeClr val="accent6"/>
         </a:fillRef>
         <a:effectRef idx="0">
           <a:scrgbClr r="0" g="0" b="0"/>
@@ -2766,13 +1949,17 @@
           <a:schemeClr val="lt1"/>
         </a:fontRef>
       </dsp:style>
+      <dsp:txXfrm>
+        <a:off x="0" y="2076331"/>
+        <a:ext cx="6912245" cy="0"/>
+      </dsp:txXfrm>
     </dsp:sp>
     <dsp:sp modelId="{5F893374-6709-43EE-9321-1917B3672322}">
       <dsp:nvSpPr>
-        <dsp:cNvPr id="0" name=""/>
+        <dsp:cNvPr id="10" name="矩形 9"/>
         <dsp:cNvSpPr/>
       </dsp:nvSpPr>
-      <dsp:spPr>
+      <dsp:spPr bwMode="white">
         <a:xfrm>
           <a:off x="0" y="2076331"/>
           <a:ext cx="6912245" cy="692110"/>
@@ -2780,18 +1967,17 @@
         <a:prstGeom prst="rect">
           <a:avLst/>
         </a:prstGeom>
-        <a:noFill/>
-        <a:ln>
-          <a:noFill/>
-        </a:ln>
-        <a:effectLst/>
       </dsp:spPr>
       <dsp:style>
         <a:lnRef idx="0">
-          <a:scrgbClr r="0" g="0" b="0"/>
+          <a:schemeClr val="dk1">
+            <a:alpha val="0"/>
+          </a:schemeClr>
         </a:lnRef>
         <a:fillRef idx="0">
-          <a:scrgbClr r="0" g="0" b="0"/>
+          <a:schemeClr val="lt1">
+            <a:alpha val="0"/>
+          </a:schemeClr>
         </a:fillRef>
         <a:effectRef idx="0">
           <a:scrgbClr r="0" g="0" b="0"/>
@@ -2799,14 +1985,40 @@
         <a:fontRef idx="minor"/>
       </dsp:style>
       <dsp:txBody>
-        <a:bodyPr spcFirstLastPara="0" vert="horz" wrap="square" lIns="53340" tIns="53340" rIns="53340" bIns="53340" numCol="1" spcCol="1270" anchor="t" anchorCtr="0">
-          <a:noAutofit/>
-        </a:bodyPr>
-        <a:lstStyle/>
+        <a:bodyPr lIns="64769" tIns="64769" rIns="64769" bIns="64769" anchor="t"/>
+        <a:lstStyle>
+          <a:lvl1pPr algn="l">
+            <a:defRPr sz="1700"/>
+          </a:lvl1pPr>
+          <a:lvl2pPr marL="114300" indent="-114300" algn="l">
+            <a:defRPr sz="1300"/>
+          </a:lvl2pPr>
+          <a:lvl3pPr marL="228600" indent="-114300" algn="l">
+            <a:defRPr sz="1300"/>
+          </a:lvl3pPr>
+          <a:lvl4pPr marL="342900" indent="-114300" algn="l">
+            <a:defRPr sz="1300"/>
+          </a:lvl4pPr>
+          <a:lvl5pPr marL="457200" indent="-114300" algn="l">
+            <a:defRPr sz="1300"/>
+          </a:lvl5pPr>
+          <a:lvl6pPr marL="571500" indent="-114300" algn="l">
+            <a:defRPr sz="1300"/>
+          </a:lvl6pPr>
+          <a:lvl7pPr marL="685800" indent="-114300" algn="l">
+            <a:defRPr sz="1300"/>
+          </a:lvl7pPr>
+          <a:lvl8pPr marL="800100" indent="-114300" algn="l">
+            <a:defRPr sz="1300"/>
+          </a:lvl8pPr>
+          <a:lvl9pPr marL="914400" indent="-114300" algn="l">
+            <a:defRPr sz="1300"/>
+          </a:lvl9pPr>
+        </a:lstStyle>
         <a:p>
-          <a:pPr marL="0" lvl="0" indent="0" algn="l" defTabSz="622300">
+          <a:pPr lvl="0">
             <a:lnSpc>
-              <a:spcPct val="90000"/>
+              <a:spcPct val="100000"/>
             </a:lnSpc>
             <a:spcBef>
               <a:spcPct val="0"/>
@@ -2814,17 +2026,28 @@
             <a:spcAft>
               <a:spcPct val="35000"/>
             </a:spcAft>
-            <a:buNone/>
           </a:pPr>
           <a:r>
-            <a:rPr lang="en-US" sz="1400" kern="1200"/>
+            <a:rPr lang="en-US">
+              <a:solidFill>
+                <a:schemeClr val="tx1"/>
+              </a:solidFill>
+            </a:rPr>
             <a:t>4. </a:t>
           </a:r>
           <a:r>
-            <a:rPr lang="zh-CN" sz="1400" kern="1200"/>
+            <a:rPr lang="zh-CN">
+              <a:solidFill>
+                <a:schemeClr val="tx1"/>
+              </a:solidFill>
+            </a:rPr>
             <a:t>照顾到模板提及的各个领域，可以深入团队最感兴趣的部分。 </a:t>
           </a:r>
-          <a:endParaRPr lang="en-US" sz="1400" kern="1200"/>
+          <a:endParaRPr lang="en-US">
+            <a:solidFill>
+              <a:schemeClr val="tx1"/>
+            </a:solidFill>
+          </a:endParaRPr>
         </a:p>
       </dsp:txBody>
       <dsp:txXfrm>
@@ -2834,45 +2057,24 @@
     </dsp:sp>
     <dsp:sp modelId="{3A0F393A-4AA8-4573-8825-A4D4032CE6B6}">
       <dsp:nvSpPr>
-        <dsp:cNvPr id="0" name=""/>
+        <dsp:cNvPr id="11" name="直接连接符 10"/>
         <dsp:cNvSpPr/>
       </dsp:nvSpPr>
-      <dsp:spPr>
+      <dsp:spPr bwMode="white">
         <a:xfrm>
-          <a:off x="0" y="2768441"/>
+          <a:off x="0" y="2768442"/>
           <a:ext cx="6912245" cy="0"/>
         </a:xfrm>
         <a:prstGeom prst="line">
           <a:avLst/>
         </a:prstGeom>
-        <a:solidFill>
-          <a:schemeClr val="accent6">
-            <a:hueOff val="0"/>
-            <a:satOff val="0"/>
-            <a:lumOff val="0"/>
-            <a:alphaOff val="0"/>
-          </a:schemeClr>
-        </a:solidFill>
-        <a:ln w="12700" cap="flat" cmpd="sng" algn="ctr">
-          <a:solidFill>
-            <a:schemeClr val="accent6">
-              <a:hueOff val="0"/>
-              <a:satOff val="0"/>
-              <a:lumOff val="0"/>
-              <a:alphaOff val="0"/>
-            </a:schemeClr>
-          </a:solidFill>
-          <a:prstDash val="solid"/>
-          <a:miter lim="800000"/>
-        </a:ln>
-        <a:effectLst/>
       </dsp:spPr>
       <dsp:style>
         <a:lnRef idx="2">
-          <a:scrgbClr r="0" g="0" b="0"/>
+          <a:schemeClr val="accent6"/>
         </a:lnRef>
         <a:fillRef idx="1">
-          <a:scrgbClr r="0" g="0" b="0"/>
+          <a:schemeClr val="accent6"/>
         </a:fillRef>
         <a:effectRef idx="0">
           <a:scrgbClr r="0" g="0" b="0"/>
@@ -2881,32 +2083,35 @@
           <a:schemeClr val="lt1"/>
         </a:fontRef>
       </dsp:style>
+      <dsp:txXfrm>
+        <a:off x="0" y="2768442"/>
+        <a:ext cx="6912245" cy="0"/>
+      </dsp:txXfrm>
     </dsp:sp>
     <dsp:sp modelId="{1D33255F-45B9-4A59-8EB4-04A7D1717B31}">
       <dsp:nvSpPr>
-        <dsp:cNvPr id="0" name=""/>
+        <dsp:cNvPr id="12" name="矩形 11"/>
         <dsp:cNvSpPr/>
       </dsp:nvSpPr>
-      <dsp:spPr>
+      <dsp:spPr bwMode="white">
         <a:xfrm>
-          <a:off x="0" y="2768441"/>
+          <a:off x="0" y="2768442"/>
           <a:ext cx="6912245" cy="692110"/>
         </a:xfrm>
         <a:prstGeom prst="rect">
           <a:avLst/>
         </a:prstGeom>
-        <a:noFill/>
-        <a:ln>
-          <a:noFill/>
-        </a:ln>
-        <a:effectLst/>
       </dsp:spPr>
       <dsp:style>
         <a:lnRef idx="0">
-          <a:scrgbClr r="0" g="0" b="0"/>
+          <a:schemeClr val="dk1">
+            <a:alpha val="0"/>
+          </a:schemeClr>
         </a:lnRef>
         <a:fillRef idx="0">
-          <a:scrgbClr r="0" g="0" b="0"/>
+          <a:schemeClr val="lt1">
+            <a:alpha val="0"/>
+          </a:schemeClr>
         </a:fillRef>
         <a:effectRef idx="0">
           <a:scrgbClr r="0" g="0" b="0"/>
@@ -2914,14 +2119,40 @@
         <a:fontRef idx="minor"/>
       </dsp:style>
       <dsp:txBody>
-        <a:bodyPr spcFirstLastPara="0" vert="horz" wrap="square" lIns="53340" tIns="53340" rIns="53340" bIns="53340" numCol="1" spcCol="1270" anchor="t" anchorCtr="0">
-          <a:noAutofit/>
-        </a:bodyPr>
-        <a:lstStyle/>
+        <a:bodyPr lIns="64769" tIns="64769" rIns="64769" bIns="64769" anchor="t"/>
+        <a:lstStyle>
+          <a:lvl1pPr algn="l">
+            <a:defRPr sz="1700"/>
+          </a:lvl1pPr>
+          <a:lvl2pPr marL="114300" indent="-114300" algn="l">
+            <a:defRPr sz="1300"/>
+          </a:lvl2pPr>
+          <a:lvl3pPr marL="228600" indent="-114300" algn="l">
+            <a:defRPr sz="1300"/>
+          </a:lvl3pPr>
+          <a:lvl4pPr marL="342900" indent="-114300" algn="l">
+            <a:defRPr sz="1300"/>
+          </a:lvl4pPr>
+          <a:lvl5pPr marL="457200" indent="-114300" algn="l">
+            <a:defRPr sz="1300"/>
+          </a:lvl5pPr>
+          <a:lvl6pPr marL="571500" indent="-114300" algn="l">
+            <a:defRPr sz="1300"/>
+          </a:lvl6pPr>
+          <a:lvl7pPr marL="685800" indent="-114300" algn="l">
+            <a:defRPr sz="1300"/>
+          </a:lvl7pPr>
+          <a:lvl8pPr marL="800100" indent="-114300" algn="l">
+            <a:defRPr sz="1300"/>
+          </a:lvl8pPr>
+          <a:lvl9pPr marL="914400" indent="-114300" algn="l">
+            <a:defRPr sz="1300"/>
+          </a:lvl9pPr>
+        </a:lstStyle>
         <a:p>
-          <a:pPr marL="0" lvl="0" indent="0" algn="l" defTabSz="622300">
+          <a:pPr lvl="0">
             <a:lnSpc>
-              <a:spcPct val="90000"/>
+              <a:spcPct val="100000"/>
             </a:lnSpc>
             <a:spcBef>
               <a:spcPct val="0"/>
@@ -2929,65 +2160,55 @@
             <a:spcAft>
               <a:spcPct val="35000"/>
             </a:spcAft>
-            <a:buNone/>
           </a:pPr>
           <a:r>
-            <a:rPr lang="en-US" sz="1400" kern="1200"/>
+            <a:rPr lang="en-US">
+              <a:solidFill>
+                <a:schemeClr val="tx1"/>
+              </a:solidFill>
+            </a:rPr>
             <a:t>5. </a:t>
           </a:r>
           <a:r>
-            <a:rPr lang="zh-CN" sz="1400" kern="1200"/>
+            <a:rPr lang="zh-CN">
+              <a:solidFill>
+                <a:schemeClr val="tx1"/>
+              </a:solidFill>
+            </a:rPr>
             <a:t>让所有人都有充分发言的机会。 </a:t>
           </a:r>
-          <a:endParaRPr lang="en-US" sz="1400" kern="1200"/>
+          <a:endParaRPr lang="en-US">
+            <a:solidFill>
+              <a:schemeClr val="tx1"/>
+            </a:solidFill>
+          </a:endParaRPr>
         </a:p>
       </dsp:txBody>
       <dsp:txXfrm>
-        <a:off x="0" y="2768441"/>
+        <a:off x="0" y="2768442"/>
         <a:ext cx="6912245" cy="692110"/>
       </dsp:txXfrm>
     </dsp:sp>
     <dsp:sp modelId="{B54DACC4-52F2-4B27-BD55-773E8F35DE52}">
       <dsp:nvSpPr>
-        <dsp:cNvPr id="0" name=""/>
+        <dsp:cNvPr id="13" name="直接连接符 12"/>
         <dsp:cNvSpPr/>
       </dsp:nvSpPr>
-      <dsp:spPr>
+      <dsp:spPr bwMode="white">
         <a:xfrm>
-          <a:off x="0" y="3460551"/>
+          <a:off x="0" y="3460552"/>
           <a:ext cx="6912245" cy="0"/>
         </a:xfrm>
         <a:prstGeom prst="line">
           <a:avLst/>
         </a:prstGeom>
-        <a:solidFill>
-          <a:schemeClr val="accent6">
-            <a:hueOff val="0"/>
-            <a:satOff val="0"/>
-            <a:lumOff val="0"/>
-            <a:alphaOff val="0"/>
-          </a:schemeClr>
-        </a:solidFill>
-        <a:ln w="12700" cap="flat" cmpd="sng" algn="ctr">
-          <a:solidFill>
-            <a:schemeClr val="accent6">
-              <a:hueOff val="0"/>
-              <a:satOff val="0"/>
-              <a:lumOff val="0"/>
-              <a:alphaOff val="0"/>
-            </a:schemeClr>
-          </a:solidFill>
-          <a:prstDash val="solid"/>
-          <a:miter lim="800000"/>
-        </a:ln>
-        <a:effectLst/>
       </dsp:spPr>
       <dsp:style>
         <a:lnRef idx="2">
-          <a:scrgbClr r="0" g="0" b="0"/>
+          <a:schemeClr val="accent6"/>
         </a:lnRef>
         <a:fillRef idx="1">
-          <a:scrgbClr r="0" g="0" b="0"/>
+          <a:schemeClr val="accent6"/>
         </a:fillRef>
         <a:effectRef idx="0">
           <a:scrgbClr r="0" g="0" b="0"/>
@@ -2996,32 +2217,35 @@
           <a:schemeClr val="lt1"/>
         </a:fontRef>
       </dsp:style>
+      <dsp:txXfrm>
+        <a:off x="0" y="3460552"/>
+        <a:ext cx="6912245" cy="0"/>
+      </dsp:txXfrm>
     </dsp:sp>
     <dsp:sp modelId="{A2DA5316-2F7F-4F4E-8FCE-A26E0991D1B3}">
       <dsp:nvSpPr>
-        <dsp:cNvPr id="0" name=""/>
+        <dsp:cNvPr id="14" name="矩形 13"/>
         <dsp:cNvSpPr/>
       </dsp:nvSpPr>
-      <dsp:spPr>
+      <dsp:spPr bwMode="white">
         <a:xfrm>
-          <a:off x="0" y="3460551"/>
+          <a:off x="0" y="3460552"/>
           <a:ext cx="6912245" cy="692110"/>
         </a:xfrm>
         <a:prstGeom prst="rect">
           <a:avLst/>
         </a:prstGeom>
-        <a:noFill/>
-        <a:ln>
-          <a:noFill/>
-        </a:ln>
-        <a:effectLst/>
       </dsp:spPr>
       <dsp:style>
         <a:lnRef idx="0">
-          <a:scrgbClr r="0" g="0" b="0"/>
+          <a:schemeClr val="dk1">
+            <a:alpha val="0"/>
+          </a:schemeClr>
         </a:lnRef>
         <a:fillRef idx="0">
-          <a:scrgbClr r="0" g="0" b="0"/>
+          <a:schemeClr val="lt1">
+            <a:alpha val="0"/>
+          </a:schemeClr>
         </a:fillRef>
         <a:effectRef idx="0">
           <a:scrgbClr r="0" g="0" b="0"/>
@@ -3029,14 +2253,40 @@
         <a:fontRef idx="minor"/>
       </dsp:style>
       <dsp:txBody>
-        <a:bodyPr spcFirstLastPara="0" vert="horz" wrap="square" lIns="53340" tIns="53340" rIns="53340" bIns="53340" numCol="1" spcCol="1270" anchor="t" anchorCtr="0">
-          <a:noAutofit/>
-        </a:bodyPr>
-        <a:lstStyle/>
+        <a:bodyPr lIns="64769" tIns="64769" rIns="64769" bIns="64769" anchor="t"/>
+        <a:lstStyle>
+          <a:lvl1pPr algn="l">
+            <a:defRPr sz="1700"/>
+          </a:lvl1pPr>
+          <a:lvl2pPr marL="114300" indent="-114300" algn="l">
+            <a:defRPr sz="1300"/>
+          </a:lvl2pPr>
+          <a:lvl3pPr marL="228600" indent="-114300" algn="l">
+            <a:defRPr sz="1300"/>
+          </a:lvl3pPr>
+          <a:lvl4pPr marL="342900" indent="-114300" algn="l">
+            <a:defRPr sz="1300"/>
+          </a:lvl4pPr>
+          <a:lvl5pPr marL="457200" indent="-114300" algn="l">
+            <a:defRPr sz="1300"/>
+          </a:lvl5pPr>
+          <a:lvl6pPr marL="571500" indent="-114300" algn="l">
+            <a:defRPr sz="1300"/>
+          </a:lvl6pPr>
+          <a:lvl7pPr marL="685800" indent="-114300" algn="l">
+            <a:defRPr sz="1300"/>
+          </a:lvl7pPr>
+          <a:lvl8pPr marL="800100" indent="-114300" algn="l">
+            <a:defRPr sz="1300"/>
+          </a:lvl8pPr>
+          <a:lvl9pPr marL="914400" indent="-114300" algn="l">
+            <a:defRPr sz="1300"/>
+          </a:lvl9pPr>
+        </a:lstStyle>
         <a:p>
-          <a:pPr marL="0" lvl="0" indent="0" algn="l" defTabSz="622300">
+          <a:pPr lvl="0">
             <a:lnSpc>
-              <a:spcPct val="90000"/>
+              <a:spcPct val="100000"/>
             </a:lnSpc>
             <a:spcBef>
               <a:spcPct val="0"/>
@@ -3044,30 +2294,41 @@
             <a:spcAft>
               <a:spcPct val="35000"/>
             </a:spcAft>
-            <a:buNone/>
           </a:pPr>
           <a:r>
-            <a:rPr lang="en-US" sz="1400" kern="1200"/>
+            <a:rPr lang="en-US">
+              <a:solidFill>
+                <a:schemeClr val="tx1"/>
+              </a:solidFill>
+            </a:rPr>
             <a:t>6. </a:t>
           </a:r>
           <a:r>
-            <a:rPr lang="zh-CN" sz="1400" kern="1200"/>
+            <a:rPr lang="zh-CN">
+              <a:solidFill>
+                <a:schemeClr val="tx1"/>
+              </a:solidFill>
+            </a:rPr>
             <a:t>有人记录发言要点，最后列出所有改进意见。 </a:t>
           </a:r>
-          <a:endParaRPr lang="en-US" sz="1400" kern="1200"/>
+          <a:endParaRPr lang="en-US">
+            <a:solidFill>
+              <a:schemeClr val="tx1"/>
+            </a:solidFill>
+          </a:endParaRPr>
         </a:p>
       </dsp:txBody>
       <dsp:txXfrm>
-        <a:off x="0" y="3460551"/>
+        <a:off x="0" y="3460552"/>
         <a:ext cx="6912245" cy="692110"/>
       </dsp:txXfrm>
     </dsp:sp>
     <dsp:sp modelId="{A90943EC-BAB8-452C-8CCA-EE8AFFAA1DF0}">
       <dsp:nvSpPr>
-        <dsp:cNvPr id="0" name=""/>
+        <dsp:cNvPr id="15" name="直接连接符 14"/>
         <dsp:cNvSpPr/>
       </dsp:nvSpPr>
-      <dsp:spPr>
+      <dsp:spPr bwMode="white">
         <a:xfrm>
           <a:off x="0" y="4152662"/>
           <a:ext cx="6912245" cy="0"/>
@@ -3075,34 +2336,13 @@
         <a:prstGeom prst="line">
           <a:avLst/>
         </a:prstGeom>
-        <a:solidFill>
-          <a:schemeClr val="accent6">
-            <a:hueOff val="0"/>
-            <a:satOff val="0"/>
-            <a:lumOff val="0"/>
-            <a:alphaOff val="0"/>
-          </a:schemeClr>
-        </a:solidFill>
-        <a:ln w="12700" cap="flat" cmpd="sng" algn="ctr">
-          <a:solidFill>
-            <a:schemeClr val="accent6">
-              <a:hueOff val="0"/>
-              <a:satOff val="0"/>
-              <a:lumOff val="0"/>
-              <a:alphaOff val="0"/>
-            </a:schemeClr>
-          </a:solidFill>
-          <a:prstDash val="solid"/>
-          <a:miter lim="800000"/>
-        </a:ln>
-        <a:effectLst/>
       </dsp:spPr>
       <dsp:style>
         <a:lnRef idx="2">
-          <a:scrgbClr r="0" g="0" b="0"/>
+          <a:schemeClr val="accent6"/>
         </a:lnRef>
         <a:fillRef idx="1">
-          <a:scrgbClr r="0" g="0" b="0"/>
+          <a:schemeClr val="accent6"/>
         </a:fillRef>
         <a:effectRef idx="0">
           <a:scrgbClr r="0" g="0" b="0"/>
@@ -3111,13 +2351,17 @@
           <a:schemeClr val="lt1"/>
         </a:fontRef>
       </dsp:style>
+      <dsp:txXfrm>
+        <a:off x="0" y="4152662"/>
+        <a:ext cx="6912245" cy="0"/>
+      </dsp:txXfrm>
     </dsp:sp>
     <dsp:sp modelId="{EC49D4FE-B8A1-48B5-861E-C9FEFB9117A0}">
       <dsp:nvSpPr>
-        <dsp:cNvPr id="0" name=""/>
+        <dsp:cNvPr id="16" name="矩形 15"/>
         <dsp:cNvSpPr/>
       </dsp:nvSpPr>
-      <dsp:spPr>
+      <dsp:spPr bwMode="white">
         <a:xfrm>
           <a:off x="0" y="4152662"/>
           <a:ext cx="6912245" cy="692110"/>
@@ -3125,18 +2369,17 @@
         <a:prstGeom prst="rect">
           <a:avLst/>
         </a:prstGeom>
-        <a:noFill/>
-        <a:ln>
-          <a:noFill/>
-        </a:ln>
-        <a:effectLst/>
       </dsp:spPr>
       <dsp:style>
         <a:lnRef idx="0">
-          <a:scrgbClr r="0" g="0" b="0"/>
+          <a:schemeClr val="dk1">
+            <a:alpha val="0"/>
+          </a:schemeClr>
         </a:lnRef>
         <a:fillRef idx="0">
-          <a:scrgbClr r="0" g="0" b="0"/>
+          <a:schemeClr val="lt1">
+            <a:alpha val="0"/>
+          </a:schemeClr>
         </a:fillRef>
         <a:effectRef idx="0">
           <a:scrgbClr r="0" g="0" b="0"/>
@@ -3144,14 +2387,40 @@
         <a:fontRef idx="minor"/>
       </dsp:style>
       <dsp:txBody>
-        <a:bodyPr spcFirstLastPara="0" vert="horz" wrap="square" lIns="53340" tIns="53340" rIns="53340" bIns="53340" numCol="1" spcCol="1270" anchor="t" anchorCtr="0">
-          <a:noAutofit/>
-        </a:bodyPr>
-        <a:lstStyle/>
+        <a:bodyPr lIns="64769" tIns="64769" rIns="64769" bIns="64769" anchor="t"/>
+        <a:lstStyle>
+          <a:lvl1pPr algn="l">
+            <a:defRPr sz="1700"/>
+          </a:lvl1pPr>
+          <a:lvl2pPr marL="114300" indent="-114300" algn="l">
+            <a:defRPr sz="1300"/>
+          </a:lvl2pPr>
+          <a:lvl3pPr marL="228600" indent="-114300" algn="l">
+            <a:defRPr sz="1300"/>
+          </a:lvl3pPr>
+          <a:lvl4pPr marL="342900" indent="-114300" algn="l">
+            <a:defRPr sz="1300"/>
+          </a:lvl4pPr>
+          <a:lvl5pPr marL="457200" indent="-114300" algn="l">
+            <a:defRPr sz="1300"/>
+          </a:lvl5pPr>
+          <a:lvl6pPr marL="571500" indent="-114300" algn="l">
+            <a:defRPr sz="1300"/>
+          </a:lvl6pPr>
+          <a:lvl7pPr marL="685800" indent="-114300" algn="l">
+            <a:defRPr sz="1300"/>
+          </a:lvl7pPr>
+          <a:lvl8pPr marL="800100" indent="-114300" algn="l">
+            <a:defRPr sz="1300"/>
+          </a:lvl8pPr>
+          <a:lvl9pPr marL="914400" indent="-114300" algn="l">
+            <a:defRPr sz="1300"/>
+          </a:lvl9pPr>
+        </a:lstStyle>
         <a:p>
-          <a:pPr marL="0" lvl="0" indent="0" algn="l" defTabSz="622300">
+          <a:pPr lvl="0">
             <a:lnSpc>
-              <a:spcPct val="90000"/>
+              <a:spcPct val="100000"/>
             </a:lnSpc>
             <a:spcBef>
               <a:spcPct val="0"/>
@@ -3159,17 +2428,28 @@
             <a:spcAft>
               <a:spcPct val="35000"/>
             </a:spcAft>
-            <a:buNone/>
           </a:pPr>
           <a:r>
-            <a:rPr lang="en-US" sz="1400" kern="1200"/>
+            <a:rPr lang="en-US">
+              <a:solidFill>
+                <a:schemeClr val="tx1"/>
+              </a:solidFill>
+            </a:rPr>
             <a:t>7. </a:t>
           </a:r>
           <a:r>
-            <a:rPr lang="zh-CN" sz="1400" kern="1200"/>
+            <a:rPr lang="zh-CN">
+              <a:solidFill>
+                <a:schemeClr val="tx1"/>
+              </a:solidFill>
+            </a:rPr>
             <a:t>最后大家可以投票，如果我只有三票，投给哪些改进意见？ </a:t>
           </a:r>
-          <a:endParaRPr lang="en-US" sz="1400" kern="1200"/>
+          <a:endParaRPr lang="en-US">
+            <a:solidFill>
+              <a:schemeClr val="tx1"/>
+            </a:solidFill>
+          </a:endParaRPr>
         </a:p>
       </dsp:txBody>
       <dsp:txXfrm>
@@ -3179,45 +2459,24 @@
     </dsp:sp>
     <dsp:sp modelId="{4B992AE0-C851-4C1E-93FF-DFA55406ED0E}">
       <dsp:nvSpPr>
-        <dsp:cNvPr id="0" name=""/>
+        <dsp:cNvPr id="17" name="直接连接符 16"/>
         <dsp:cNvSpPr/>
       </dsp:nvSpPr>
-      <dsp:spPr>
+      <dsp:spPr bwMode="white">
         <a:xfrm>
-          <a:off x="0" y="4844772"/>
+          <a:off x="0" y="4844773"/>
           <a:ext cx="6912245" cy="0"/>
         </a:xfrm>
         <a:prstGeom prst="line">
           <a:avLst/>
         </a:prstGeom>
-        <a:solidFill>
-          <a:schemeClr val="accent6">
-            <a:hueOff val="0"/>
-            <a:satOff val="0"/>
-            <a:lumOff val="0"/>
-            <a:alphaOff val="0"/>
-          </a:schemeClr>
-        </a:solidFill>
-        <a:ln w="12700" cap="flat" cmpd="sng" algn="ctr">
-          <a:solidFill>
-            <a:schemeClr val="accent6">
-              <a:hueOff val="0"/>
-              <a:satOff val="0"/>
-              <a:lumOff val="0"/>
-              <a:alphaOff val="0"/>
-            </a:schemeClr>
-          </a:solidFill>
-          <a:prstDash val="solid"/>
-          <a:miter lim="800000"/>
-        </a:ln>
-        <a:effectLst/>
       </dsp:spPr>
       <dsp:style>
         <a:lnRef idx="2">
-          <a:scrgbClr r="0" g="0" b="0"/>
+          <a:schemeClr val="accent6"/>
         </a:lnRef>
         <a:fillRef idx="1">
-          <a:scrgbClr r="0" g="0" b="0"/>
+          <a:schemeClr val="accent6"/>
         </a:fillRef>
         <a:effectRef idx="0">
           <a:scrgbClr r="0" g="0" b="0"/>
@@ -3226,32 +2485,35 @@
           <a:schemeClr val="lt1"/>
         </a:fontRef>
       </dsp:style>
+      <dsp:txXfrm>
+        <a:off x="0" y="4844773"/>
+        <a:ext cx="6912245" cy="0"/>
+      </dsp:txXfrm>
     </dsp:sp>
     <dsp:sp modelId="{3C920B09-0F38-4124-80FA-71C4C075FC97}">
       <dsp:nvSpPr>
-        <dsp:cNvPr id="0" name=""/>
+        <dsp:cNvPr id="18" name="矩形 17"/>
         <dsp:cNvSpPr/>
       </dsp:nvSpPr>
-      <dsp:spPr>
+      <dsp:spPr bwMode="white">
         <a:xfrm>
-          <a:off x="0" y="4844772"/>
+          <a:off x="0" y="4844773"/>
           <a:ext cx="6912245" cy="692110"/>
         </a:xfrm>
         <a:prstGeom prst="rect">
           <a:avLst/>
         </a:prstGeom>
-        <a:noFill/>
-        <a:ln>
-          <a:noFill/>
-        </a:ln>
-        <a:effectLst/>
       </dsp:spPr>
       <dsp:style>
         <a:lnRef idx="0">
-          <a:scrgbClr r="0" g="0" b="0"/>
+          <a:schemeClr val="dk1">
+            <a:alpha val="0"/>
+          </a:schemeClr>
         </a:lnRef>
         <a:fillRef idx="0">
-          <a:scrgbClr r="0" g="0" b="0"/>
+          <a:schemeClr val="lt1">
+            <a:alpha val="0"/>
+          </a:schemeClr>
         </a:fillRef>
         <a:effectRef idx="0">
           <a:scrgbClr r="0" g="0" b="0"/>
@@ -3259,14 +2521,40 @@
         <a:fontRef idx="minor"/>
       </dsp:style>
       <dsp:txBody>
-        <a:bodyPr spcFirstLastPara="0" vert="horz" wrap="square" lIns="53340" tIns="53340" rIns="53340" bIns="53340" numCol="1" spcCol="1270" anchor="t" anchorCtr="0">
-          <a:noAutofit/>
-        </a:bodyPr>
-        <a:lstStyle/>
+        <a:bodyPr lIns="64769" tIns="64769" rIns="64769" bIns="64769" anchor="t"/>
+        <a:lstStyle>
+          <a:lvl1pPr algn="l">
+            <a:defRPr sz="1700"/>
+          </a:lvl1pPr>
+          <a:lvl2pPr marL="114300" indent="-114300" algn="l">
+            <a:defRPr sz="1300"/>
+          </a:lvl2pPr>
+          <a:lvl3pPr marL="228600" indent="-114300" algn="l">
+            <a:defRPr sz="1300"/>
+          </a:lvl3pPr>
+          <a:lvl4pPr marL="342900" indent="-114300" algn="l">
+            <a:defRPr sz="1300"/>
+          </a:lvl4pPr>
+          <a:lvl5pPr marL="457200" indent="-114300" algn="l">
+            <a:defRPr sz="1300"/>
+          </a:lvl5pPr>
+          <a:lvl6pPr marL="571500" indent="-114300" algn="l">
+            <a:defRPr sz="1300"/>
+          </a:lvl6pPr>
+          <a:lvl7pPr marL="685800" indent="-114300" algn="l">
+            <a:defRPr sz="1300"/>
+          </a:lvl7pPr>
+          <a:lvl8pPr marL="800100" indent="-114300" algn="l">
+            <a:defRPr sz="1300"/>
+          </a:lvl8pPr>
+          <a:lvl9pPr marL="914400" indent="-114300" algn="l">
+            <a:defRPr sz="1300"/>
+          </a:lvl9pPr>
+        </a:lstStyle>
         <a:p>
-          <a:pPr marL="0" lvl="0" indent="0" algn="l" defTabSz="622300">
+          <a:pPr lvl="0">
             <a:lnSpc>
-              <a:spcPct val="90000"/>
+              <a:spcPct val="100000"/>
             </a:lnSpc>
             <a:spcBef>
               <a:spcPct val="0"/>
@@ -3274,21 +2562,32 @@
             <a:spcAft>
               <a:spcPct val="35000"/>
             </a:spcAft>
-            <a:buNone/>
           </a:pPr>
           <a:r>
-            <a:rPr lang="en-US" sz="1400" kern="1200"/>
+            <a:rPr lang="en-US">
+              <a:solidFill>
+                <a:schemeClr val="tx1"/>
+              </a:solidFill>
+            </a:rPr>
             <a:t>8. </a:t>
           </a:r>
           <a:r>
-            <a:rPr lang="zh-CN" sz="1400" kern="1200"/>
+            <a:rPr lang="zh-CN">
+              <a:solidFill>
+                <a:schemeClr val="tx1"/>
+              </a:solidFill>
+            </a:rPr>
             <a:t>领导们保证要采取行动，执行票数最高的一些改进意见。</a:t>
           </a:r>
-          <a:endParaRPr lang="en-US" sz="1400" kern="1200"/>
+          <a:endParaRPr lang="en-US">
+            <a:solidFill>
+              <a:schemeClr val="tx1"/>
+            </a:solidFill>
+          </a:endParaRPr>
         </a:p>
       </dsp:txBody>
       <dsp:txXfrm>
-        <a:off x="0" y="4844772"/>
+        <a:off x="0" y="4844773"/>
         <a:ext cx="6912245" cy="692110"/>
       </dsp:txXfrm>
     </dsp:sp>
@@ -3773,15 +3072,503 @@
     <a:camera prst="orthographicFront"/>
     <a:lightRig rig="threePt" dir="t"/>
   </dgm:scene3d>
-  <dgm:styleLbl name="node0">
+  <dgm:styleLbl name="alignAcc1">
     <dgm:scene3d>
       <a:camera prst="orthographicFront"/>
       <a:lightRig rig="threePt" dir="t"/>
     </dgm:scene3d>
-    <dgm:sp3d/>
     <dgm:txPr/>
     <dgm:style>
       <a:lnRef idx="2">
+        <a:scrgbClr r="0" g="0" b="0"/>
+      </a:lnRef>
+      <a:fillRef idx="1">
+        <a:scrgbClr r="0" g="0" b="0"/>
+      </a:fillRef>
+      <a:effectRef idx="0">
+        <a:scrgbClr r="0" g="0" b="0"/>
+      </a:effectRef>
+      <a:fontRef idx="minor"/>
+    </dgm:style>
+  </dgm:styleLbl>
+  <dgm:styleLbl name="alignAccFollowNode1">
+    <dgm:scene3d>
+      <a:camera prst="orthographicFront"/>
+      <a:lightRig rig="threePt" dir="t"/>
+    </dgm:scene3d>
+    <dgm:txPr/>
+    <dgm:style>
+      <a:lnRef idx="2">
+        <a:scrgbClr r="0" g="0" b="0"/>
+      </a:lnRef>
+      <a:fillRef idx="1">
+        <a:scrgbClr r="0" g="0" b="0"/>
+      </a:fillRef>
+      <a:effectRef idx="0">
+        <a:scrgbClr r="0" g="0" b="0"/>
+      </a:effectRef>
+      <a:fontRef idx="minor"/>
+    </dgm:style>
+  </dgm:styleLbl>
+  <dgm:styleLbl name="alignImgPlace1">
+    <dgm:scene3d>
+      <a:camera prst="orthographicFront"/>
+      <a:lightRig rig="threePt" dir="t"/>
+    </dgm:scene3d>
+    <dgm:txPr/>
+    <dgm:style>
+      <a:lnRef idx="2">
+        <a:scrgbClr r="0" g="0" b="0"/>
+      </a:lnRef>
+      <a:fillRef idx="1">
+        <a:scrgbClr r="0" g="0" b="0"/>
+      </a:fillRef>
+      <a:effectRef idx="0">
+        <a:scrgbClr r="0" g="0" b="0"/>
+      </a:effectRef>
+      <a:fontRef idx="minor"/>
+    </dgm:style>
+  </dgm:styleLbl>
+  <dgm:styleLbl name="alignNode1">
+    <dgm:scene3d>
+      <a:camera prst="orthographicFront"/>
+      <a:lightRig rig="threePt" dir="t"/>
+    </dgm:scene3d>
+    <dgm:txPr/>
+    <dgm:style>
+      <a:lnRef idx="2">
+        <a:scrgbClr r="0" g="0" b="0"/>
+      </a:lnRef>
+      <a:fillRef idx="1">
+        <a:scrgbClr r="0" g="0" b="0"/>
+      </a:fillRef>
+      <a:effectRef idx="0">
+        <a:scrgbClr r="0" g="0" b="0"/>
+      </a:effectRef>
+      <a:fontRef idx="minor">
+        <a:schemeClr val="lt1"/>
+      </a:fontRef>
+    </dgm:style>
+  </dgm:styleLbl>
+  <dgm:styleLbl name="asst0">
+    <dgm:scene3d>
+      <a:camera prst="orthographicFront"/>
+      <a:lightRig rig="threePt" dir="t"/>
+    </dgm:scene3d>
+    <dgm:txPr/>
+    <dgm:style>
+      <a:lnRef idx="2">
+        <a:scrgbClr r="0" g="0" b="0"/>
+      </a:lnRef>
+      <a:fillRef idx="1">
+        <a:scrgbClr r="0" g="0" b="0"/>
+      </a:fillRef>
+      <a:effectRef idx="0">
+        <a:scrgbClr r="0" g="0" b="0"/>
+      </a:effectRef>
+      <a:fontRef idx="minor">
+        <a:schemeClr val="lt1"/>
+      </a:fontRef>
+    </dgm:style>
+  </dgm:styleLbl>
+  <dgm:styleLbl name="asst1">
+    <dgm:scene3d>
+      <a:camera prst="orthographicFront"/>
+      <a:lightRig rig="threePt" dir="t"/>
+    </dgm:scene3d>
+    <dgm:txPr/>
+    <dgm:style>
+      <a:lnRef idx="2">
+        <a:scrgbClr r="0" g="0" b="0"/>
+      </a:lnRef>
+      <a:fillRef idx="1">
+        <a:scrgbClr r="0" g="0" b="0"/>
+      </a:fillRef>
+      <a:effectRef idx="0">
+        <a:scrgbClr r="0" g="0" b="0"/>
+      </a:effectRef>
+      <a:fontRef idx="minor">
+        <a:schemeClr val="lt1"/>
+      </a:fontRef>
+    </dgm:style>
+  </dgm:styleLbl>
+  <dgm:styleLbl name="asst2">
+    <dgm:scene3d>
+      <a:camera prst="orthographicFront"/>
+      <a:lightRig rig="threePt" dir="t"/>
+    </dgm:scene3d>
+    <dgm:txPr/>
+    <dgm:style>
+      <a:lnRef idx="2">
+        <a:scrgbClr r="0" g="0" b="0"/>
+      </a:lnRef>
+      <a:fillRef idx="1">
+        <a:scrgbClr r="0" g="0" b="0"/>
+      </a:fillRef>
+      <a:effectRef idx="0">
+        <a:scrgbClr r="0" g="0" b="0"/>
+      </a:effectRef>
+      <a:fontRef idx="minor">
+        <a:schemeClr val="lt1"/>
+      </a:fontRef>
+    </dgm:style>
+  </dgm:styleLbl>
+  <dgm:styleLbl name="asst3">
+    <dgm:scene3d>
+      <a:camera prst="orthographicFront"/>
+      <a:lightRig rig="threePt" dir="t"/>
+    </dgm:scene3d>
+    <dgm:txPr/>
+    <dgm:style>
+      <a:lnRef idx="2">
+        <a:scrgbClr r="0" g="0" b="0"/>
+      </a:lnRef>
+      <a:fillRef idx="1">
+        <a:scrgbClr r="0" g="0" b="0"/>
+      </a:fillRef>
+      <a:effectRef idx="0">
+        <a:scrgbClr r="0" g="0" b="0"/>
+      </a:effectRef>
+      <a:fontRef idx="minor">
+        <a:schemeClr val="lt1"/>
+      </a:fontRef>
+    </dgm:style>
+  </dgm:styleLbl>
+  <dgm:styleLbl name="asst4">
+    <dgm:scene3d>
+      <a:camera prst="orthographicFront"/>
+      <a:lightRig rig="threePt" dir="t"/>
+    </dgm:scene3d>
+    <dgm:txPr/>
+    <dgm:style>
+      <a:lnRef idx="2">
+        <a:scrgbClr r="0" g="0" b="0"/>
+      </a:lnRef>
+      <a:fillRef idx="1">
+        <a:scrgbClr r="0" g="0" b="0"/>
+      </a:fillRef>
+      <a:effectRef idx="0">
+        <a:scrgbClr r="0" g="0" b="0"/>
+      </a:effectRef>
+      <a:fontRef idx="minor">
+        <a:schemeClr val="lt1"/>
+      </a:fontRef>
+    </dgm:style>
+  </dgm:styleLbl>
+  <dgm:styleLbl name="bgAcc1">
+    <dgm:scene3d>
+      <a:camera prst="orthographicFront"/>
+      <a:lightRig rig="threePt" dir="t"/>
+    </dgm:scene3d>
+    <dgm:txPr/>
+    <dgm:style>
+      <a:lnRef idx="2">
+        <a:scrgbClr r="0" g="0" b="0"/>
+      </a:lnRef>
+      <a:fillRef idx="1">
+        <a:scrgbClr r="0" g="0" b="0"/>
+      </a:fillRef>
+      <a:effectRef idx="0">
+        <a:scrgbClr r="0" g="0" b="0"/>
+      </a:effectRef>
+      <a:fontRef idx="minor"/>
+    </dgm:style>
+  </dgm:styleLbl>
+  <dgm:styleLbl name="bgAccFollowNode1">
+    <dgm:scene3d>
+      <a:camera prst="orthographicFront"/>
+      <a:lightRig rig="threePt" dir="t"/>
+    </dgm:scene3d>
+    <dgm:txPr/>
+    <dgm:style>
+      <a:lnRef idx="2">
+        <a:scrgbClr r="0" g="0" b="0"/>
+      </a:lnRef>
+      <a:fillRef idx="1">
+        <a:scrgbClr r="0" g="0" b="0"/>
+      </a:fillRef>
+      <a:effectRef idx="0">
+        <a:scrgbClr r="0" g="0" b="0"/>
+      </a:effectRef>
+      <a:fontRef idx="minor"/>
+    </dgm:style>
+  </dgm:styleLbl>
+  <dgm:styleLbl name="bgImgPlace1">
+    <dgm:scene3d>
+      <a:camera prst="orthographicFront"/>
+      <a:lightRig rig="threePt" dir="t"/>
+    </dgm:scene3d>
+    <dgm:txPr/>
+    <dgm:style>
+      <a:lnRef idx="2">
+        <a:scrgbClr r="0" g="0" b="0"/>
+      </a:lnRef>
+      <a:fillRef idx="1">
+        <a:scrgbClr r="0" g="0" b="0"/>
+      </a:fillRef>
+      <a:effectRef idx="0">
+        <a:scrgbClr r="0" g="0" b="0"/>
+      </a:effectRef>
+      <a:fontRef idx="minor"/>
+    </dgm:style>
+  </dgm:styleLbl>
+  <dgm:styleLbl name="bgShp">
+    <dgm:scene3d>
+      <a:camera prst="orthographicFront"/>
+      <a:lightRig rig="threePt" dir="t"/>
+    </dgm:scene3d>
+    <dgm:txPr/>
+    <dgm:style>
+      <a:lnRef idx="0">
+        <a:scrgbClr r="0" g="0" b="0"/>
+      </a:lnRef>
+      <a:fillRef idx="1">
+        <a:scrgbClr r="0" g="0" b="0"/>
+      </a:fillRef>
+      <a:effectRef idx="0">
+        <a:scrgbClr r="0" g="0" b="0"/>
+      </a:effectRef>
+      <a:fontRef idx="minor"/>
+    </dgm:style>
+  </dgm:styleLbl>
+  <dgm:styleLbl name="bgSibTrans2D1">
+    <dgm:scene3d>
+      <a:camera prst="orthographicFront"/>
+      <a:lightRig rig="threePt" dir="t"/>
+    </dgm:scene3d>
+    <dgm:txPr/>
+    <dgm:style>
+      <a:lnRef idx="0">
+        <a:scrgbClr r="0" g="0" b="0"/>
+      </a:lnRef>
+      <a:fillRef idx="1">
+        <a:scrgbClr r="0" g="0" b="0"/>
+      </a:fillRef>
+      <a:effectRef idx="0">
+        <a:scrgbClr r="0" g="0" b="0"/>
+      </a:effectRef>
+      <a:fontRef idx="minor">
+        <a:schemeClr val="lt1"/>
+      </a:fontRef>
+    </dgm:style>
+  </dgm:styleLbl>
+  <dgm:styleLbl name="callout">
+    <dgm:scene3d>
+      <a:camera prst="orthographicFront"/>
+      <a:lightRig rig="threePt" dir="t"/>
+    </dgm:scene3d>
+    <dgm:txPr/>
+    <dgm:style>
+      <a:lnRef idx="2">
+        <a:scrgbClr r="0" g="0" b="0"/>
+      </a:lnRef>
+      <a:fillRef idx="1">
+        <a:scrgbClr r="0" g="0" b="0"/>
+      </a:fillRef>
+      <a:effectRef idx="0">
+        <a:scrgbClr r="0" g="0" b="0"/>
+      </a:effectRef>
+      <a:fontRef idx="minor"/>
+    </dgm:style>
+  </dgm:styleLbl>
+  <dgm:styleLbl name="conFgAcc1">
+    <dgm:scene3d>
+      <a:camera prst="orthographicFront"/>
+      <a:lightRig rig="threePt" dir="t"/>
+    </dgm:scene3d>
+    <dgm:txPr/>
+    <dgm:style>
+      <a:lnRef idx="2">
+        <a:scrgbClr r="0" g="0" b="0"/>
+      </a:lnRef>
+      <a:fillRef idx="1">
+        <a:scrgbClr r="0" g="0" b="0"/>
+      </a:fillRef>
+      <a:effectRef idx="0">
+        <a:scrgbClr r="0" g="0" b="0"/>
+      </a:effectRef>
+      <a:fontRef idx="minor"/>
+    </dgm:style>
+  </dgm:styleLbl>
+  <dgm:styleLbl name="dkBgShp">
+    <dgm:scene3d>
+      <a:camera prst="orthographicFront"/>
+      <a:lightRig rig="threePt" dir="t"/>
+    </dgm:scene3d>
+    <dgm:txPr/>
+    <dgm:style>
+      <a:lnRef idx="0">
+        <a:scrgbClr r="0" g="0" b="0"/>
+      </a:lnRef>
+      <a:fillRef idx="1">
+        <a:scrgbClr r="0" g="0" b="0"/>
+      </a:fillRef>
+      <a:effectRef idx="0">
+        <a:scrgbClr r="0" g="0" b="0"/>
+      </a:effectRef>
+      <a:fontRef idx="minor"/>
+    </dgm:style>
+  </dgm:styleLbl>
+  <dgm:styleLbl name="fgAcc0">
+    <dgm:scene3d>
+      <a:camera prst="orthographicFront"/>
+      <a:lightRig rig="threePt" dir="t"/>
+    </dgm:scene3d>
+    <dgm:txPr/>
+    <dgm:style>
+      <a:lnRef idx="2">
+        <a:scrgbClr r="0" g="0" b="0"/>
+      </a:lnRef>
+      <a:fillRef idx="1">
+        <a:scrgbClr r="0" g="0" b="0"/>
+      </a:fillRef>
+      <a:effectRef idx="0">
+        <a:scrgbClr r="0" g="0" b="0"/>
+      </a:effectRef>
+      <a:fontRef idx="minor"/>
+    </dgm:style>
+  </dgm:styleLbl>
+  <dgm:styleLbl name="fgAcc1">
+    <dgm:scene3d>
+      <a:camera prst="orthographicFront"/>
+      <a:lightRig rig="threePt" dir="t"/>
+    </dgm:scene3d>
+    <dgm:txPr/>
+    <dgm:style>
+      <a:lnRef idx="2">
+        <a:scrgbClr r="0" g="0" b="0"/>
+      </a:lnRef>
+      <a:fillRef idx="1">
+        <a:scrgbClr r="0" g="0" b="0"/>
+      </a:fillRef>
+      <a:effectRef idx="0">
+        <a:scrgbClr r="0" g="0" b="0"/>
+      </a:effectRef>
+      <a:fontRef idx="minor"/>
+    </dgm:style>
+  </dgm:styleLbl>
+  <dgm:styleLbl name="fgAcc2">
+    <dgm:scene3d>
+      <a:camera prst="orthographicFront"/>
+      <a:lightRig rig="threePt" dir="t"/>
+    </dgm:scene3d>
+    <dgm:txPr/>
+    <dgm:style>
+      <a:lnRef idx="2">
+        <a:scrgbClr r="0" g="0" b="0"/>
+      </a:lnRef>
+      <a:fillRef idx="1">
+        <a:scrgbClr r="0" g="0" b="0"/>
+      </a:fillRef>
+      <a:effectRef idx="0">
+        <a:scrgbClr r="0" g="0" b="0"/>
+      </a:effectRef>
+      <a:fontRef idx="minor"/>
+    </dgm:style>
+  </dgm:styleLbl>
+  <dgm:styleLbl name="fgAcc3">
+    <dgm:scene3d>
+      <a:camera prst="orthographicFront"/>
+      <a:lightRig rig="threePt" dir="t"/>
+    </dgm:scene3d>
+    <dgm:txPr/>
+    <dgm:style>
+      <a:lnRef idx="2">
+        <a:scrgbClr r="0" g="0" b="0"/>
+      </a:lnRef>
+      <a:fillRef idx="1">
+        <a:scrgbClr r="0" g="0" b="0"/>
+      </a:fillRef>
+      <a:effectRef idx="0">
+        <a:scrgbClr r="0" g="0" b="0"/>
+      </a:effectRef>
+      <a:fontRef idx="minor"/>
+    </dgm:style>
+  </dgm:styleLbl>
+  <dgm:styleLbl name="fgAcc4">
+    <dgm:scene3d>
+      <a:camera prst="orthographicFront"/>
+      <a:lightRig rig="threePt" dir="t"/>
+    </dgm:scene3d>
+    <dgm:txPr/>
+    <dgm:style>
+      <a:lnRef idx="2">
+        <a:scrgbClr r="0" g="0" b="0"/>
+      </a:lnRef>
+      <a:fillRef idx="1">
+        <a:scrgbClr r="0" g="0" b="0"/>
+      </a:fillRef>
+      <a:effectRef idx="0">
+        <a:scrgbClr r="0" g="0" b="0"/>
+      </a:effectRef>
+      <a:fontRef idx="minor"/>
+    </dgm:style>
+  </dgm:styleLbl>
+  <dgm:styleLbl name="fgAccFollowNode1">
+    <dgm:scene3d>
+      <a:camera prst="orthographicFront"/>
+      <a:lightRig rig="threePt" dir="t"/>
+    </dgm:scene3d>
+    <dgm:txPr/>
+    <dgm:style>
+      <a:lnRef idx="2">
+        <a:scrgbClr r="0" g="0" b="0"/>
+      </a:lnRef>
+      <a:fillRef idx="1">
+        <a:scrgbClr r="0" g="0" b="0"/>
+      </a:fillRef>
+      <a:effectRef idx="0">
+        <a:scrgbClr r="0" g="0" b="0"/>
+      </a:effectRef>
+      <a:fontRef idx="minor"/>
+    </dgm:style>
+  </dgm:styleLbl>
+  <dgm:styleLbl name="fgImgPlace1">
+    <dgm:scene3d>
+      <a:camera prst="orthographicFront"/>
+      <a:lightRig rig="threePt" dir="t"/>
+    </dgm:scene3d>
+    <dgm:txPr/>
+    <dgm:style>
+      <a:lnRef idx="2">
+        <a:scrgbClr r="0" g="0" b="0"/>
+      </a:lnRef>
+      <a:fillRef idx="1">
+        <a:scrgbClr r="0" g="0" b="0"/>
+      </a:fillRef>
+      <a:effectRef idx="0">
+        <a:scrgbClr r="0" g="0" b="0"/>
+      </a:effectRef>
+      <a:fontRef idx="minor"/>
+    </dgm:style>
+  </dgm:styleLbl>
+  <dgm:styleLbl name="fgShp">
+    <dgm:scene3d>
+      <a:camera prst="orthographicFront"/>
+      <a:lightRig rig="threePt" dir="t"/>
+    </dgm:scene3d>
+    <dgm:txPr/>
+    <dgm:style>
+      <a:lnRef idx="2">
+        <a:scrgbClr r="0" g="0" b="0"/>
+      </a:lnRef>
+      <a:fillRef idx="1">
+        <a:scrgbClr r="0" g="0" b="0"/>
+      </a:fillRef>
+      <a:effectRef idx="0">
+        <a:scrgbClr r="0" g="0" b="0"/>
+      </a:effectRef>
+      <a:fontRef idx="minor"/>
+    </dgm:style>
+  </dgm:styleLbl>
+  <dgm:styleLbl name="fgSibTrans2D1">
+    <dgm:scene3d>
+      <a:camera prst="orthographicFront"/>
+      <a:lightRig rig="threePt" dir="t"/>
+    </dgm:scene3d>
+    <dgm:txPr/>
+    <dgm:style>
+      <a:lnRef idx="0">
         <a:scrgbClr r="0" g="0" b="0"/>
       </a:lnRef>
       <a:fillRef idx="1">
@@ -3800,7 +3587,6 @@
       <a:camera prst="orthographicFront"/>
       <a:lightRig rig="threePt" dir="t"/>
     </dgm:scene3d>
-    <dgm:sp3d/>
     <dgm:txPr/>
     <dgm:style>
       <a:lnRef idx="2">
@@ -3817,34 +3603,11 @@
       </a:fontRef>
     </dgm:style>
   </dgm:styleLbl>
-  <dgm:styleLbl name="vennNode1">
+  <dgm:styleLbl name="node0">
     <dgm:scene3d>
       <a:camera prst="orthographicFront"/>
       <a:lightRig rig="threePt" dir="t"/>
     </dgm:scene3d>
-    <dgm:sp3d/>
-    <dgm:txPr/>
-    <dgm:style>
-      <a:lnRef idx="2">
-        <a:scrgbClr r="0" g="0" b="0"/>
-      </a:lnRef>
-      <a:fillRef idx="1">
-        <a:scrgbClr r="0" g="0" b="0"/>
-      </a:fillRef>
-      <a:effectRef idx="0">
-        <a:scrgbClr r="0" g="0" b="0"/>
-      </a:effectRef>
-      <a:fontRef idx="minor">
-        <a:schemeClr val="tx1"/>
-      </a:fontRef>
-    </dgm:style>
-  </dgm:styleLbl>
-  <dgm:styleLbl name="alignNode1">
-    <dgm:scene3d>
-      <a:camera prst="orthographicFront"/>
-      <a:lightRig rig="threePt" dir="t"/>
-    </dgm:scene3d>
-    <dgm:sp3d/>
     <dgm:txPr/>
     <dgm:style>
       <a:lnRef idx="2">
@@ -3866,7 +3629,6 @@
       <a:camera prst="orthographicFront"/>
       <a:lightRig rig="threePt" dir="t"/>
     </dgm:scene3d>
-    <dgm:sp3d/>
     <dgm:txPr/>
     <dgm:style>
       <a:lnRef idx="2">
@@ -3888,7 +3650,6 @@
       <a:camera prst="orthographicFront"/>
       <a:lightRig rig="threePt" dir="t"/>
     </dgm:scene3d>
-    <dgm:sp3d/>
     <dgm:txPr/>
     <dgm:style>
       <a:lnRef idx="2">
@@ -3910,7 +3671,6 @@
       <a:camera prst="orthographicFront"/>
       <a:lightRig rig="threePt" dir="t"/>
     </dgm:scene3d>
-    <dgm:sp3d/>
     <dgm:txPr/>
     <dgm:style>
       <a:lnRef idx="2">
@@ -3932,7 +3692,6 @@
       <a:camera prst="orthographicFront"/>
       <a:lightRig rig="threePt" dir="t"/>
     </dgm:scene3d>
-    <dgm:sp3d/>
     <dgm:txPr/>
     <dgm:style>
       <a:lnRef idx="2">
@@ -3949,18 +3708,17 @@
       </a:fontRef>
     </dgm:style>
   </dgm:styleLbl>
-  <dgm:styleLbl name="fgImgPlace1">
+  <dgm:styleLbl name="parChTrans1D1">
     <dgm:scene3d>
       <a:camera prst="orthographicFront"/>
       <a:lightRig rig="threePt" dir="t"/>
     </dgm:scene3d>
-    <dgm:sp3d/>
     <dgm:txPr/>
     <dgm:style>
       <a:lnRef idx="2">
         <a:scrgbClr r="0" g="0" b="0"/>
       </a:lnRef>
-      <a:fillRef idx="1">
+      <a:fillRef idx="0">
         <a:scrgbClr r="0" g="0" b="0"/>
       </a:fillRef>
       <a:effectRef idx="0">
@@ -3969,18 +3727,17 @@
       <a:fontRef idx="minor"/>
     </dgm:style>
   </dgm:styleLbl>
-  <dgm:styleLbl name="alignImgPlace1">
+  <dgm:styleLbl name="parChTrans1D2">
     <dgm:scene3d>
       <a:camera prst="orthographicFront"/>
       <a:lightRig rig="threePt" dir="t"/>
     </dgm:scene3d>
-    <dgm:sp3d/>
     <dgm:txPr/>
     <dgm:style>
       <a:lnRef idx="2">
         <a:scrgbClr r="0" g="0" b="0"/>
       </a:lnRef>
-      <a:fillRef idx="1">
+      <a:fillRef idx="0">
         <a:scrgbClr r="0" g="0" b="0"/>
       </a:fillRef>
       <a:effectRef idx="0">
@@ -3989,18 +3746,17 @@
       <a:fontRef idx="minor"/>
     </dgm:style>
   </dgm:styleLbl>
-  <dgm:styleLbl name="bgImgPlace1">
+  <dgm:styleLbl name="parChTrans1D3">
     <dgm:scene3d>
       <a:camera prst="orthographicFront"/>
       <a:lightRig rig="threePt" dir="t"/>
     </dgm:scene3d>
-    <dgm:sp3d/>
     <dgm:txPr/>
     <dgm:style>
       <a:lnRef idx="2">
         <a:scrgbClr r="0" g="0" b="0"/>
       </a:lnRef>
-      <a:fillRef idx="1">
+      <a:fillRef idx="0">
         <a:scrgbClr r="0" g="0" b="0"/>
       </a:fillRef>
       <a:effectRef idx="0">
@@ -4009,220 +3765,23 @@
       <a:fontRef idx="minor"/>
     </dgm:style>
   </dgm:styleLbl>
-  <dgm:styleLbl name="sibTrans2D1">
+  <dgm:styleLbl name="parChTrans1D4">
     <dgm:scene3d>
       <a:camera prst="orthographicFront"/>
       <a:lightRig rig="threePt" dir="t"/>
     </dgm:scene3d>
-    <dgm:sp3d/>
-    <dgm:txPr/>
-    <dgm:style>
-      <a:lnRef idx="0">
-        <a:scrgbClr r="0" g="0" b="0"/>
-      </a:lnRef>
-      <a:fillRef idx="1">
-        <a:scrgbClr r="0" g="0" b="0"/>
-      </a:fillRef>
-      <a:effectRef idx="0">
-        <a:scrgbClr r="0" g="0" b="0"/>
-      </a:effectRef>
-      <a:fontRef idx="minor">
-        <a:schemeClr val="lt1"/>
-      </a:fontRef>
-    </dgm:style>
-  </dgm:styleLbl>
-  <dgm:styleLbl name="fgSibTrans2D1">
-    <dgm:scene3d>
-      <a:camera prst="orthographicFront"/>
-      <a:lightRig rig="threePt" dir="t"/>
-    </dgm:scene3d>
-    <dgm:sp3d/>
-    <dgm:txPr/>
-    <dgm:style>
-      <a:lnRef idx="0">
-        <a:scrgbClr r="0" g="0" b="0"/>
-      </a:lnRef>
-      <a:fillRef idx="1">
-        <a:scrgbClr r="0" g="0" b="0"/>
-      </a:fillRef>
-      <a:effectRef idx="0">
-        <a:scrgbClr r="0" g="0" b="0"/>
-      </a:effectRef>
-      <a:fontRef idx="minor">
-        <a:schemeClr val="lt1"/>
-      </a:fontRef>
-    </dgm:style>
-  </dgm:styleLbl>
-  <dgm:styleLbl name="bgSibTrans2D1">
-    <dgm:scene3d>
-      <a:camera prst="orthographicFront"/>
-      <a:lightRig rig="threePt" dir="t"/>
-    </dgm:scene3d>
-    <dgm:sp3d/>
-    <dgm:txPr/>
-    <dgm:style>
-      <a:lnRef idx="0">
-        <a:scrgbClr r="0" g="0" b="0"/>
-      </a:lnRef>
-      <a:fillRef idx="1">
-        <a:scrgbClr r="0" g="0" b="0"/>
-      </a:fillRef>
-      <a:effectRef idx="0">
-        <a:scrgbClr r="0" g="0" b="0"/>
-      </a:effectRef>
-      <a:fontRef idx="minor">
-        <a:schemeClr val="lt1"/>
-      </a:fontRef>
-    </dgm:style>
-  </dgm:styleLbl>
-  <dgm:styleLbl name="sibTrans1D1">
-    <dgm:scene3d>
-      <a:camera prst="orthographicFront"/>
-      <a:lightRig rig="threePt" dir="t"/>
-    </dgm:scene3d>
-    <dgm:sp3d/>
-    <dgm:txPr/>
-    <dgm:style>
-      <a:lnRef idx="1">
-        <a:scrgbClr r="0" g="0" b="0"/>
-      </a:lnRef>
-      <a:fillRef idx="0">
-        <a:scrgbClr r="0" g="0" b="0"/>
-      </a:fillRef>
-      <a:effectRef idx="0">
-        <a:scrgbClr r="0" g="0" b="0"/>
-      </a:effectRef>
-      <a:fontRef idx="minor"/>
-    </dgm:style>
-  </dgm:styleLbl>
-  <dgm:styleLbl name="callout">
-    <dgm:scene3d>
-      <a:camera prst="orthographicFront"/>
-      <a:lightRig rig="threePt" dir="t"/>
-    </dgm:scene3d>
-    <dgm:sp3d/>
     <dgm:txPr/>
     <dgm:style>
       <a:lnRef idx="2">
         <a:scrgbClr r="0" g="0" b="0"/>
       </a:lnRef>
-      <a:fillRef idx="1">
+      <a:fillRef idx="0">
         <a:scrgbClr r="0" g="0" b="0"/>
       </a:fillRef>
       <a:effectRef idx="0">
         <a:scrgbClr r="0" g="0" b="0"/>
       </a:effectRef>
       <a:fontRef idx="minor"/>
-    </dgm:style>
-  </dgm:styleLbl>
-  <dgm:styleLbl name="asst0">
-    <dgm:scene3d>
-      <a:camera prst="orthographicFront"/>
-      <a:lightRig rig="threePt" dir="t"/>
-    </dgm:scene3d>
-    <dgm:sp3d/>
-    <dgm:txPr/>
-    <dgm:style>
-      <a:lnRef idx="2">
-        <a:scrgbClr r="0" g="0" b="0"/>
-      </a:lnRef>
-      <a:fillRef idx="1">
-        <a:scrgbClr r="0" g="0" b="0"/>
-      </a:fillRef>
-      <a:effectRef idx="0">
-        <a:scrgbClr r="0" g="0" b="0"/>
-      </a:effectRef>
-      <a:fontRef idx="minor">
-        <a:schemeClr val="lt1"/>
-      </a:fontRef>
-    </dgm:style>
-  </dgm:styleLbl>
-  <dgm:styleLbl name="asst1">
-    <dgm:scene3d>
-      <a:camera prst="orthographicFront"/>
-      <a:lightRig rig="threePt" dir="t"/>
-    </dgm:scene3d>
-    <dgm:sp3d/>
-    <dgm:txPr/>
-    <dgm:style>
-      <a:lnRef idx="2">
-        <a:scrgbClr r="0" g="0" b="0"/>
-      </a:lnRef>
-      <a:fillRef idx="1">
-        <a:scrgbClr r="0" g="0" b="0"/>
-      </a:fillRef>
-      <a:effectRef idx="0">
-        <a:scrgbClr r="0" g="0" b="0"/>
-      </a:effectRef>
-      <a:fontRef idx="minor">
-        <a:schemeClr val="lt1"/>
-      </a:fontRef>
-    </dgm:style>
-  </dgm:styleLbl>
-  <dgm:styleLbl name="asst2">
-    <dgm:scene3d>
-      <a:camera prst="orthographicFront"/>
-      <a:lightRig rig="threePt" dir="t"/>
-    </dgm:scene3d>
-    <dgm:sp3d/>
-    <dgm:txPr/>
-    <dgm:style>
-      <a:lnRef idx="2">
-        <a:scrgbClr r="0" g="0" b="0"/>
-      </a:lnRef>
-      <a:fillRef idx="1">
-        <a:scrgbClr r="0" g="0" b="0"/>
-      </a:fillRef>
-      <a:effectRef idx="0">
-        <a:scrgbClr r="0" g="0" b="0"/>
-      </a:effectRef>
-      <a:fontRef idx="minor">
-        <a:schemeClr val="lt1"/>
-      </a:fontRef>
-    </dgm:style>
-  </dgm:styleLbl>
-  <dgm:styleLbl name="asst3">
-    <dgm:scene3d>
-      <a:camera prst="orthographicFront"/>
-      <a:lightRig rig="threePt" dir="t"/>
-    </dgm:scene3d>
-    <dgm:sp3d/>
-    <dgm:txPr/>
-    <dgm:style>
-      <a:lnRef idx="2">
-        <a:scrgbClr r="0" g="0" b="0"/>
-      </a:lnRef>
-      <a:fillRef idx="1">
-        <a:scrgbClr r="0" g="0" b="0"/>
-      </a:fillRef>
-      <a:effectRef idx="0">
-        <a:scrgbClr r="0" g="0" b="0"/>
-      </a:effectRef>
-      <a:fontRef idx="minor">
-        <a:schemeClr val="lt1"/>
-      </a:fontRef>
-    </dgm:style>
-  </dgm:styleLbl>
-  <dgm:styleLbl name="asst4">
-    <dgm:scene3d>
-      <a:camera prst="orthographicFront"/>
-      <a:lightRig rig="threePt" dir="t"/>
-    </dgm:scene3d>
-    <dgm:sp3d/>
-    <dgm:txPr/>
-    <dgm:style>
-      <a:lnRef idx="2">
-        <a:scrgbClr r="0" g="0" b="0"/>
-      </a:lnRef>
-      <a:fillRef idx="1">
-        <a:scrgbClr r="0" g="0" b="0"/>
-      </a:fillRef>
-      <a:effectRef idx="0">
-        <a:scrgbClr r="0" g="0" b="0"/>
-      </a:effectRef>
-      <a:fontRef idx="minor">
-        <a:schemeClr val="lt1"/>
-      </a:fontRef>
     </dgm:style>
   </dgm:styleLbl>
   <dgm:styleLbl name="parChTrans2D1">
@@ -4230,7 +3789,6 @@
       <a:camera prst="orthographicFront"/>
       <a:lightRig rig="threePt" dir="t"/>
     </dgm:scene3d>
-    <dgm:sp3d/>
     <dgm:txPr/>
     <dgm:style>
       <a:lnRef idx="2">
@@ -4252,7 +3810,6 @@
       <a:camera prst="orthographicFront"/>
       <a:lightRig rig="threePt" dir="t"/>
     </dgm:scene3d>
-    <dgm:sp3d/>
     <dgm:txPr/>
     <dgm:style>
       <a:lnRef idx="2">
@@ -4274,7 +3831,6 @@
       <a:camera prst="orthographicFront"/>
       <a:lightRig rig="threePt" dir="t"/>
     </dgm:scene3d>
-    <dgm:sp3d/>
     <dgm:txPr/>
     <dgm:style>
       <a:lnRef idx="2">
@@ -4296,7 +3852,6 @@
       <a:camera prst="orthographicFront"/>
       <a:lightRig rig="threePt" dir="t"/>
     </dgm:scene3d>
-    <dgm:sp3d/>
     <dgm:txPr/>
     <dgm:style>
       <a:lnRef idx="2">
@@ -4313,15 +3868,14 @@
       </a:fontRef>
     </dgm:style>
   </dgm:styleLbl>
-  <dgm:styleLbl name="parChTrans1D1">
+  <dgm:styleLbl name="revTx">
     <dgm:scene3d>
       <a:camera prst="orthographicFront"/>
       <a:lightRig rig="threePt" dir="t"/>
     </dgm:scene3d>
-    <dgm:sp3d/>
     <dgm:txPr/>
     <dgm:style>
-      <a:lnRef idx="2">
+      <a:lnRef idx="0">
         <a:scrgbClr r="0" g="0" b="0"/>
       </a:lnRef>
       <a:fillRef idx="0">
@@ -4333,15 +3887,14 @@
       <a:fontRef idx="minor"/>
     </dgm:style>
   </dgm:styleLbl>
-  <dgm:styleLbl name="parChTrans1D2">
+  <dgm:styleLbl name="sibTrans1D1">
     <dgm:scene3d>
       <a:camera prst="orthographicFront"/>
       <a:lightRig rig="threePt" dir="t"/>
     </dgm:scene3d>
-    <dgm:sp3d/>
     <dgm:txPr/>
     <dgm:style>
-      <a:lnRef idx="2">
+      <a:lnRef idx="1">
         <a:scrgbClr r="0" g="0" b="0"/>
       </a:lnRef>
       <a:fillRef idx="0">
@@ -4353,18 +3906,38 @@
       <a:fontRef idx="minor"/>
     </dgm:style>
   </dgm:styleLbl>
-  <dgm:styleLbl name="parChTrans1D3">
+  <dgm:styleLbl name="sibTrans2D1">
     <dgm:scene3d>
       <a:camera prst="orthographicFront"/>
       <a:lightRig rig="threePt" dir="t"/>
     </dgm:scene3d>
-    <dgm:sp3d/>
+    <dgm:txPr/>
+    <dgm:style>
+      <a:lnRef idx="0">
+        <a:scrgbClr r="0" g="0" b="0"/>
+      </a:lnRef>
+      <a:fillRef idx="1">
+        <a:scrgbClr r="0" g="0" b="0"/>
+      </a:fillRef>
+      <a:effectRef idx="0">
+        <a:scrgbClr r="0" g="0" b="0"/>
+      </a:effectRef>
+      <a:fontRef idx="minor">
+        <a:schemeClr val="lt1"/>
+      </a:fontRef>
+    </dgm:style>
+  </dgm:styleLbl>
+  <dgm:styleLbl name="solidAlignAcc1">
+    <dgm:scene3d>
+      <a:camera prst="orthographicFront"/>
+      <a:lightRig rig="threePt" dir="t"/>
+    </dgm:scene3d>
     <dgm:txPr/>
     <dgm:style>
       <a:lnRef idx="2">
         <a:scrgbClr r="0" g="0" b="0"/>
       </a:lnRef>
-      <a:fillRef idx="0">
+      <a:fillRef idx="1">
         <a:scrgbClr r="0" g="0" b="0"/>
       </a:fillRef>
       <a:effectRef idx="0">
@@ -4373,18 +3946,17 @@
       <a:fontRef idx="minor"/>
     </dgm:style>
   </dgm:styleLbl>
-  <dgm:styleLbl name="parChTrans1D4">
+  <dgm:styleLbl name="solidBgAcc1">
     <dgm:scene3d>
       <a:camera prst="orthographicFront"/>
       <a:lightRig rig="threePt" dir="t"/>
     </dgm:scene3d>
-    <dgm:sp3d/>
     <dgm:txPr/>
     <dgm:style>
       <a:lnRef idx="2">
         <a:scrgbClr r="0" g="0" b="0"/>
       </a:lnRef>
-      <a:fillRef idx="0">
+      <a:fillRef idx="1">
         <a:scrgbClr r="0" g="0" b="0"/>
       </a:fillRef>
       <a:effectRef idx="0">
@@ -4393,52 +3965,11 @@
       <a:fontRef idx="minor"/>
     </dgm:style>
   </dgm:styleLbl>
-  <dgm:styleLbl name="fgAcc1">
+  <dgm:styleLbl name="solidFgAcc1">
     <dgm:scene3d>
       <a:camera prst="orthographicFront"/>
       <a:lightRig rig="threePt" dir="t"/>
     </dgm:scene3d>
-    <dgm:sp3d/>
-    <dgm:txPr/>
-    <dgm:style>
-      <a:lnRef idx="2">
-        <a:scrgbClr r="0" g="0" b="0"/>
-      </a:lnRef>
-      <a:fillRef idx="1">
-        <a:scrgbClr r="0" g="0" b="0"/>
-      </a:fillRef>
-      <a:effectRef idx="0">
-        <a:scrgbClr r="0" g="0" b="0"/>
-      </a:effectRef>
-      <a:fontRef idx="minor"/>
-    </dgm:style>
-  </dgm:styleLbl>
-  <dgm:styleLbl name="conFgAcc1">
-    <dgm:scene3d>
-      <a:camera prst="orthographicFront"/>
-      <a:lightRig rig="threePt" dir="t"/>
-    </dgm:scene3d>
-    <dgm:sp3d/>
-    <dgm:txPr/>
-    <dgm:style>
-      <a:lnRef idx="2">
-        <a:scrgbClr r="0" g="0" b="0"/>
-      </a:lnRef>
-      <a:fillRef idx="1">
-        <a:scrgbClr r="0" g="0" b="0"/>
-      </a:fillRef>
-      <a:effectRef idx="0">
-        <a:scrgbClr r="0" g="0" b="0"/>
-      </a:effectRef>
-      <a:fontRef idx="minor"/>
-    </dgm:style>
-  </dgm:styleLbl>
-  <dgm:styleLbl name="alignAcc1">
-    <dgm:scene3d>
-      <a:camera prst="orthographicFront"/>
-      <a:lightRig rig="threePt" dir="t"/>
-    </dgm:scene3d>
-    <dgm:sp3d/>
     <dgm:txPr/>
     <dgm:style>
       <a:lnRef idx="2">
@@ -4458,270 +3989,9 @@
       <a:camera prst="orthographicFront"/>
       <a:lightRig rig="threePt" dir="t"/>
     </dgm:scene3d>
-    <dgm:sp3d/>
     <dgm:txPr/>
     <dgm:style>
       <a:lnRef idx="1">
-        <a:scrgbClr r="0" g="0" b="0"/>
-      </a:lnRef>
-      <a:fillRef idx="1">
-        <a:scrgbClr r="0" g="0" b="0"/>
-      </a:fillRef>
-      <a:effectRef idx="0">
-        <a:scrgbClr r="0" g="0" b="0"/>
-      </a:effectRef>
-      <a:fontRef idx="minor"/>
-    </dgm:style>
-  </dgm:styleLbl>
-  <dgm:styleLbl name="bgAcc1">
-    <dgm:scene3d>
-      <a:camera prst="orthographicFront"/>
-      <a:lightRig rig="threePt" dir="t"/>
-    </dgm:scene3d>
-    <dgm:sp3d/>
-    <dgm:txPr/>
-    <dgm:style>
-      <a:lnRef idx="2">
-        <a:scrgbClr r="0" g="0" b="0"/>
-      </a:lnRef>
-      <a:fillRef idx="1">
-        <a:scrgbClr r="0" g="0" b="0"/>
-      </a:fillRef>
-      <a:effectRef idx="0">
-        <a:scrgbClr r="0" g="0" b="0"/>
-      </a:effectRef>
-      <a:fontRef idx="minor"/>
-    </dgm:style>
-  </dgm:styleLbl>
-  <dgm:styleLbl name="solidFgAcc1">
-    <dgm:scene3d>
-      <a:camera prst="orthographicFront"/>
-      <a:lightRig rig="threePt" dir="t"/>
-    </dgm:scene3d>
-    <dgm:sp3d/>
-    <dgm:txPr/>
-    <dgm:style>
-      <a:lnRef idx="2">
-        <a:scrgbClr r="0" g="0" b="0"/>
-      </a:lnRef>
-      <a:fillRef idx="1">
-        <a:scrgbClr r="0" g="0" b="0"/>
-      </a:fillRef>
-      <a:effectRef idx="0">
-        <a:scrgbClr r="0" g="0" b="0"/>
-      </a:effectRef>
-      <a:fontRef idx="minor"/>
-    </dgm:style>
-  </dgm:styleLbl>
-  <dgm:styleLbl name="solidAlignAcc1">
-    <dgm:scene3d>
-      <a:camera prst="orthographicFront"/>
-      <a:lightRig rig="threePt" dir="t"/>
-    </dgm:scene3d>
-    <dgm:sp3d/>
-    <dgm:txPr/>
-    <dgm:style>
-      <a:lnRef idx="2">
-        <a:scrgbClr r="0" g="0" b="0"/>
-      </a:lnRef>
-      <a:fillRef idx="1">
-        <a:scrgbClr r="0" g="0" b="0"/>
-      </a:fillRef>
-      <a:effectRef idx="0">
-        <a:scrgbClr r="0" g="0" b="0"/>
-      </a:effectRef>
-      <a:fontRef idx="minor"/>
-    </dgm:style>
-  </dgm:styleLbl>
-  <dgm:styleLbl name="solidBgAcc1">
-    <dgm:scene3d>
-      <a:camera prst="orthographicFront"/>
-      <a:lightRig rig="threePt" dir="t"/>
-    </dgm:scene3d>
-    <dgm:sp3d/>
-    <dgm:txPr/>
-    <dgm:style>
-      <a:lnRef idx="2">
-        <a:scrgbClr r="0" g="0" b="0"/>
-      </a:lnRef>
-      <a:fillRef idx="1">
-        <a:scrgbClr r="0" g="0" b="0"/>
-      </a:fillRef>
-      <a:effectRef idx="0">
-        <a:scrgbClr r="0" g="0" b="0"/>
-      </a:effectRef>
-      <a:fontRef idx="minor"/>
-    </dgm:style>
-  </dgm:styleLbl>
-  <dgm:styleLbl name="fgAccFollowNode1">
-    <dgm:scene3d>
-      <a:camera prst="orthographicFront"/>
-      <a:lightRig rig="threePt" dir="t"/>
-    </dgm:scene3d>
-    <dgm:sp3d/>
-    <dgm:txPr/>
-    <dgm:style>
-      <a:lnRef idx="2">
-        <a:scrgbClr r="0" g="0" b="0"/>
-      </a:lnRef>
-      <a:fillRef idx="1">
-        <a:scrgbClr r="0" g="0" b="0"/>
-      </a:fillRef>
-      <a:effectRef idx="0">
-        <a:scrgbClr r="0" g="0" b="0"/>
-      </a:effectRef>
-      <a:fontRef idx="minor"/>
-    </dgm:style>
-  </dgm:styleLbl>
-  <dgm:styleLbl name="alignAccFollowNode1">
-    <dgm:scene3d>
-      <a:camera prst="orthographicFront"/>
-      <a:lightRig rig="threePt" dir="t"/>
-    </dgm:scene3d>
-    <dgm:sp3d/>
-    <dgm:txPr/>
-    <dgm:style>
-      <a:lnRef idx="2">
-        <a:scrgbClr r="0" g="0" b="0"/>
-      </a:lnRef>
-      <a:fillRef idx="1">
-        <a:scrgbClr r="0" g="0" b="0"/>
-      </a:fillRef>
-      <a:effectRef idx="0">
-        <a:scrgbClr r="0" g="0" b="0"/>
-      </a:effectRef>
-      <a:fontRef idx="minor"/>
-    </dgm:style>
-  </dgm:styleLbl>
-  <dgm:styleLbl name="bgAccFollowNode1">
-    <dgm:scene3d>
-      <a:camera prst="orthographicFront"/>
-      <a:lightRig rig="threePt" dir="t"/>
-    </dgm:scene3d>
-    <dgm:sp3d/>
-    <dgm:txPr/>
-    <dgm:style>
-      <a:lnRef idx="2">
-        <a:scrgbClr r="0" g="0" b="0"/>
-      </a:lnRef>
-      <a:fillRef idx="1">
-        <a:scrgbClr r="0" g="0" b="0"/>
-      </a:fillRef>
-      <a:effectRef idx="0">
-        <a:scrgbClr r="0" g="0" b="0"/>
-      </a:effectRef>
-      <a:fontRef idx="minor"/>
-    </dgm:style>
-  </dgm:styleLbl>
-  <dgm:styleLbl name="fgAcc0">
-    <dgm:scene3d>
-      <a:camera prst="orthographicFront"/>
-      <a:lightRig rig="threePt" dir="t"/>
-    </dgm:scene3d>
-    <dgm:sp3d/>
-    <dgm:txPr/>
-    <dgm:style>
-      <a:lnRef idx="2">
-        <a:scrgbClr r="0" g="0" b="0"/>
-      </a:lnRef>
-      <a:fillRef idx="1">
-        <a:scrgbClr r="0" g="0" b="0"/>
-      </a:fillRef>
-      <a:effectRef idx="0">
-        <a:scrgbClr r="0" g="0" b="0"/>
-      </a:effectRef>
-      <a:fontRef idx="minor"/>
-    </dgm:style>
-  </dgm:styleLbl>
-  <dgm:styleLbl name="fgAcc2">
-    <dgm:scene3d>
-      <a:camera prst="orthographicFront"/>
-      <a:lightRig rig="threePt" dir="t"/>
-    </dgm:scene3d>
-    <dgm:sp3d/>
-    <dgm:txPr/>
-    <dgm:style>
-      <a:lnRef idx="2">
-        <a:scrgbClr r="0" g="0" b="0"/>
-      </a:lnRef>
-      <a:fillRef idx="1">
-        <a:scrgbClr r="0" g="0" b="0"/>
-      </a:fillRef>
-      <a:effectRef idx="0">
-        <a:scrgbClr r="0" g="0" b="0"/>
-      </a:effectRef>
-      <a:fontRef idx="minor"/>
-    </dgm:style>
-  </dgm:styleLbl>
-  <dgm:styleLbl name="fgAcc3">
-    <dgm:scene3d>
-      <a:camera prst="orthographicFront"/>
-      <a:lightRig rig="threePt" dir="t"/>
-    </dgm:scene3d>
-    <dgm:sp3d/>
-    <dgm:txPr/>
-    <dgm:style>
-      <a:lnRef idx="2">
-        <a:scrgbClr r="0" g="0" b="0"/>
-      </a:lnRef>
-      <a:fillRef idx="1">
-        <a:scrgbClr r="0" g="0" b="0"/>
-      </a:fillRef>
-      <a:effectRef idx="0">
-        <a:scrgbClr r="0" g="0" b="0"/>
-      </a:effectRef>
-      <a:fontRef idx="minor"/>
-    </dgm:style>
-  </dgm:styleLbl>
-  <dgm:styleLbl name="fgAcc4">
-    <dgm:scene3d>
-      <a:camera prst="orthographicFront"/>
-      <a:lightRig rig="threePt" dir="t"/>
-    </dgm:scene3d>
-    <dgm:sp3d/>
-    <dgm:txPr/>
-    <dgm:style>
-      <a:lnRef idx="2">
-        <a:scrgbClr r="0" g="0" b="0"/>
-      </a:lnRef>
-      <a:fillRef idx="1">
-        <a:scrgbClr r="0" g="0" b="0"/>
-      </a:fillRef>
-      <a:effectRef idx="0">
-        <a:scrgbClr r="0" g="0" b="0"/>
-      </a:effectRef>
-      <a:fontRef idx="minor"/>
-    </dgm:style>
-  </dgm:styleLbl>
-  <dgm:styleLbl name="bgShp">
-    <dgm:scene3d>
-      <a:camera prst="orthographicFront"/>
-      <a:lightRig rig="threePt" dir="t"/>
-    </dgm:scene3d>
-    <dgm:sp3d/>
-    <dgm:txPr/>
-    <dgm:style>
-      <a:lnRef idx="0">
-        <a:scrgbClr r="0" g="0" b="0"/>
-      </a:lnRef>
-      <a:fillRef idx="1">
-        <a:scrgbClr r="0" g="0" b="0"/>
-      </a:fillRef>
-      <a:effectRef idx="0">
-        <a:scrgbClr r="0" g="0" b="0"/>
-      </a:effectRef>
-      <a:fontRef idx="minor"/>
-    </dgm:style>
-  </dgm:styleLbl>
-  <dgm:styleLbl name="dkBgShp">
-    <dgm:scene3d>
-      <a:camera prst="orthographicFront"/>
-      <a:lightRig rig="threePt" dir="t"/>
-    </dgm:scene3d>
-    <dgm:sp3d/>
-    <dgm:txPr/>
-    <dgm:style>
-      <a:lnRef idx="0">
         <a:scrgbClr r="0" g="0" b="0"/>
       </a:lnRef>
       <a:fillRef idx="1">
@@ -4738,7 +4008,6 @@
       <a:camera prst="orthographicFront"/>
       <a:lightRig rig="threePt" dir="t"/>
     </dgm:scene3d>
-    <dgm:sp3d/>
     <dgm:txPr/>
     <dgm:style>
       <a:lnRef idx="0">
@@ -4753,12 +4022,11 @@
       <a:fontRef idx="minor"/>
     </dgm:style>
   </dgm:styleLbl>
-  <dgm:styleLbl name="fgShp">
+  <dgm:styleLbl name="vennNode1">
     <dgm:scene3d>
       <a:camera prst="orthographicFront"/>
       <a:lightRig rig="threePt" dir="t"/>
     </dgm:scene3d>
-    <dgm:sp3d/>
     <dgm:txPr/>
     <dgm:style>
       <a:lnRef idx="2">
@@ -4770,27 +4038,9 @@
       <a:effectRef idx="0">
         <a:scrgbClr r="0" g="0" b="0"/>
       </a:effectRef>
-      <a:fontRef idx="minor"/>
-    </dgm:style>
-  </dgm:styleLbl>
-  <dgm:styleLbl name="revTx">
-    <dgm:scene3d>
-      <a:camera prst="orthographicFront"/>
-      <a:lightRig rig="threePt" dir="t"/>
-    </dgm:scene3d>
-    <dgm:sp3d/>
-    <dgm:txPr/>
-    <dgm:style>
-      <a:lnRef idx="0">
-        <a:scrgbClr r="0" g="0" b="0"/>
-      </a:lnRef>
-      <a:fillRef idx="0">
-        <a:scrgbClr r="0" g="0" b="0"/>
-      </a:fillRef>
-      <a:effectRef idx="0">
-        <a:scrgbClr r="0" g="0" b="0"/>
-      </a:effectRef>
-      <a:fontRef idx="minor"/>
+      <a:fontRef idx="minor">
+        <a:schemeClr val="tx1"/>
+      </a:fontRef>
     </dgm:style>
   </dgm:styleLbl>
 </dgm:styleDef>
@@ -4878,8 +4128,6 @@
           <a:p>
             <a:fld id="{F04650A2-B221-45B7-8BFD-302FFBB7179C}" type="datetimeFigureOut">
               <a:rPr lang="en-US" smtClean="0"/>
-              <a:pPr/>
-              <a:t>9/4/2019</a:t>
             </a:fld>
             <a:endParaRPr lang="en-US"/>
           </a:p>
@@ -4948,6 +4196,7 @@
               <a:rPr lang="en-US"/>
               <a:t>Click to edit Master text styles</a:t>
             </a:r>
+            <a:endParaRPr lang="en-US"/>
           </a:p>
           <a:p>
             <a:pPr lvl="1"/>
@@ -4955,6 +4204,7 @@
               <a:rPr lang="en-US"/>
               <a:t>Second level</a:t>
             </a:r>
+            <a:endParaRPr lang="en-US"/>
           </a:p>
           <a:p>
             <a:pPr lvl="2"/>
@@ -4962,6 +4212,7 @@
               <a:rPr lang="en-US"/>
               <a:t>Third level</a:t>
             </a:r>
+            <a:endParaRPr lang="en-US"/>
           </a:p>
           <a:p>
             <a:pPr lvl="3"/>
@@ -4969,6 +4220,7 @@
               <a:rPr lang="en-US"/>
               <a:t>Fourth level</a:t>
             </a:r>
+            <a:endParaRPr lang="en-US"/>
           </a:p>
           <a:p>
             <a:pPr lvl="4"/>
@@ -4976,6 +4228,7 @@
               <a:rPr lang="en-US"/>
               <a:t>Fifth level</a:t>
             </a:r>
+            <a:endParaRPr lang="en-US"/>
           </a:p>
         </p:txBody>
       </p:sp>
@@ -5039,19 +4292,12 @@
           <a:p>
             <a:fld id="{347179E1-1FAE-4667-A618-B3C44D7B1E80}" type="slidenum">
               <a:rPr lang="en-US" smtClean="0"/>
-              <a:pPr/>
-              <a:t>‹#›</a:t>
             </a:fld>
             <a:endParaRPr lang="en-US"/>
           </a:p>
         </p:txBody>
       </p:sp>
     </p:spTree>
-    <p:extLst>
-      <p:ext uri="{BB962C8B-B14F-4D97-AF65-F5344CB8AC3E}">
-        <p14:creationId xmlns:p14="http://schemas.microsoft.com/office/powerpoint/2010/main" val="649827044"/>
-      </p:ext>
-    </p:extLst>
   </p:cSld>
   <p:clrMap bg1="lt1" tx1="dk1" bg2="lt2" tx2="dk2" accent1="accent1" accent2="accent2" accent3="accent3" accent4="accent4" accent5="accent5" accent6="accent6" hlink="hlink" folHlink="folHlink"/>
   <p:notesStyle>
@@ -5204,18 +4450,21 @@
               <a:rPr lang="en-US" dirty="0"/>
               <a:t>Originally from Ambrosio Blanco</a:t>
             </a:r>
+            <a:endParaRPr lang="en-US" dirty="0"/>
           </a:p>
           <a:p>
             <a:r>
               <a:rPr lang="en-US" dirty="0"/>
               <a:t>MSRA</a:t>
             </a:r>
+            <a:endParaRPr lang="en-US" dirty="0"/>
           </a:p>
           <a:p>
             <a:r>
               <a:rPr lang="en-US" dirty="0"/>
               <a:t>Test Manager</a:t>
             </a:r>
+            <a:endParaRPr lang="en-US" dirty="0"/>
           </a:p>
           <a:p>
             <a:endParaRPr lang="en-US" dirty="0"/>
@@ -5239,19 +4488,12 @@
           <a:p>
             <a:fld id="{347179E1-1FAE-4667-A618-B3C44D7B1E80}" type="slidenum">
               <a:rPr lang="en-US" smtClean="0"/>
-              <a:pPr/>
-              <a:t>1</a:t>
             </a:fld>
             <a:endParaRPr lang="en-US"/>
           </a:p>
         </p:txBody>
       </p:sp>
     </p:spTree>
-    <p:extLst>
-      <p:ext uri="{BB962C8B-B14F-4D97-AF65-F5344CB8AC3E}">
-        <p14:creationId xmlns:p14="http://schemas.microsoft.com/office/powerpoint/2010/main" val="2989632398"/>
-      </p:ext>
-    </p:extLst>
   </p:cSld>
   <p:clrMapOvr>
     <a:masterClrMapping/>
@@ -5331,19 +4573,12 @@
           <a:p>
             <a:fld id="{347179E1-1FAE-4667-A618-B3C44D7B1E80}" type="slidenum">
               <a:rPr lang="en-US" smtClean="0"/>
-              <a:pPr/>
-              <a:t>2</a:t>
             </a:fld>
             <a:endParaRPr lang="en-US"/>
           </a:p>
         </p:txBody>
       </p:sp>
     </p:spTree>
-    <p:extLst>
-      <p:ext uri="{BB962C8B-B14F-4D97-AF65-F5344CB8AC3E}">
-        <p14:creationId xmlns:p14="http://schemas.microsoft.com/office/powerpoint/2010/main" val="1079084570"/>
-      </p:ext>
-    </p:extLst>
   </p:cSld>
   <p:clrMapOvr>
     <a:masterClrMapping/>
@@ -5547,7 +4782,6 @@
           <a:p>
             <a:fld id="{48A87A34-81AB-432B-8DAE-1953F412C126}" type="datetimeFigureOut">
               <a:rPr lang="en-US" smtClean="0"/>
-              <a:t>9/4/2019</a:t>
             </a:fld>
             <a:endParaRPr lang="en-US" dirty="0"/>
           </a:p>
@@ -5589,18 +4823,12 @@
           <a:p>
             <a:fld id="{6D22F896-40B5-4ADD-8801-0D06FADFA095}" type="slidenum">
               <a:rPr lang="en-US" smtClean="0"/>
-              <a:t>‹#›</a:t>
             </a:fld>
             <a:endParaRPr lang="en-US" dirty="0"/>
           </a:p>
         </p:txBody>
       </p:sp>
     </p:spTree>
-    <p:extLst>
-      <p:ext uri="{BB962C8B-B14F-4D97-AF65-F5344CB8AC3E}">
-        <p14:creationId xmlns:p14="http://schemas.microsoft.com/office/powerpoint/2010/main" val="1566534348"/>
-      </p:ext>
-    </p:extLst>
   </p:cSld>
   <p:clrMapOvr>
     <a:masterClrMapping/>
@@ -5808,6 +5036,7 @@
               <a:rPr lang="en-US"/>
               <a:t>Edit Master text styles</a:t>
             </a:r>
+            <a:endParaRPr lang="en-US"/>
           </a:p>
         </p:txBody>
       </p:sp>
@@ -5828,8 +5057,6 @@
           <a:p>
             <a:fld id="{48A87A34-81AB-432B-8DAE-1953F412C126}" type="datetimeFigureOut">
               <a:rPr lang="en-US" smtClean="0"/>
-              <a:pPr/>
-              <a:t>9/4/2019</a:t>
             </a:fld>
             <a:endParaRPr lang="en-US" dirty="0"/>
           </a:p>
@@ -5871,19 +5098,12 @@
           <a:p>
             <a:fld id="{6D22F896-40B5-4ADD-8801-0D06FADFA095}" type="slidenum">
               <a:rPr lang="en-US" smtClean="0"/>
-              <a:pPr/>
-              <a:t>‹#›</a:t>
             </a:fld>
             <a:endParaRPr lang="en-US" dirty="0"/>
           </a:p>
         </p:txBody>
       </p:sp>
     </p:spTree>
-    <p:extLst>
-      <p:ext uri="{BB962C8B-B14F-4D97-AF65-F5344CB8AC3E}">
-        <p14:creationId xmlns:p14="http://schemas.microsoft.com/office/powerpoint/2010/main" val="2648222542"/>
-      </p:ext>
-    </p:extLst>
   </p:cSld>
   <p:clrMapOvr>
     <a:masterClrMapping/>
@@ -6002,6 +5222,7 @@
               <a:rPr lang="en-US"/>
               <a:t>Edit Master text styles</a:t>
             </a:r>
+            <a:endParaRPr lang="en-US"/>
           </a:p>
         </p:txBody>
       </p:sp>
@@ -6022,8 +5243,6 @@
           <a:p>
             <a:fld id="{48A87A34-81AB-432B-8DAE-1953F412C126}" type="datetimeFigureOut">
               <a:rPr lang="en-US" smtClean="0"/>
-              <a:pPr/>
-              <a:t>9/4/2019</a:t>
             </a:fld>
             <a:endParaRPr lang="en-US" dirty="0"/>
           </a:p>
@@ -6065,19 +5284,12 @@
           <a:p>
             <a:fld id="{6D22F896-40B5-4ADD-8801-0D06FADFA095}" type="slidenum">
               <a:rPr lang="en-US" smtClean="0"/>
-              <a:pPr/>
-              <a:t>‹#›</a:t>
             </a:fld>
             <a:endParaRPr lang="en-US" dirty="0"/>
           </a:p>
         </p:txBody>
       </p:sp>
     </p:spTree>
-    <p:extLst>
-      <p:ext uri="{BB962C8B-B14F-4D97-AF65-F5344CB8AC3E}">
-        <p14:creationId xmlns:p14="http://schemas.microsoft.com/office/powerpoint/2010/main" val="1501226861"/>
-      </p:ext>
-    </p:extLst>
   </p:cSld>
   <p:clrMapOvr>
     <a:masterClrMapping/>
@@ -6198,6 +5410,7 @@
               <a:rPr lang="en-US"/>
               <a:t>Edit Master text styles</a:t>
             </a:r>
+            <a:endParaRPr lang="en-US"/>
           </a:p>
         </p:txBody>
       </p:sp>
@@ -6265,6 +5478,7 @@
               <a:rPr lang="en-US"/>
               <a:t>Edit Master text styles</a:t>
             </a:r>
+            <a:endParaRPr lang="en-US"/>
           </a:p>
         </p:txBody>
       </p:sp>
@@ -6285,8 +5499,6 @@
           <a:p>
             <a:fld id="{48A87A34-81AB-432B-8DAE-1953F412C126}" type="datetimeFigureOut">
               <a:rPr lang="en-US" smtClean="0"/>
-              <a:pPr/>
-              <a:t>9/4/2019</a:t>
             </a:fld>
             <a:endParaRPr lang="en-US" dirty="0"/>
           </a:p>
@@ -6328,8 +5540,6 @@
           <a:p>
             <a:fld id="{6D22F896-40B5-4ADD-8801-0D06FADFA095}" type="slidenum">
               <a:rPr lang="en-US" smtClean="0"/>
-              <a:pPr/>
-              <a:t>‹#›</a:t>
             </a:fld>
             <a:endParaRPr lang="en-US" dirty="0"/>
           </a:p>
@@ -6448,6 +5658,12 @@
               </a:rPr>
               <a:t>“</a:t>
             </a:r>
+            <a:endParaRPr lang="en-US" sz="8000" dirty="0">
+              <a:solidFill>
+                <a:schemeClr val="tx1"/>
+              </a:solidFill>
+              <a:effectLst/>
+            </a:endParaRPr>
           </a:p>
         </p:txBody>
       </p:sp>
@@ -6564,15 +5780,16 @@
               </a:rPr>
               <a:t>”</a:t>
             </a:r>
+            <a:endParaRPr lang="en-US" sz="8000" dirty="0">
+              <a:solidFill>
+                <a:schemeClr val="tx1"/>
+              </a:solidFill>
+              <a:effectLst/>
+            </a:endParaRPr>
           </a:p>
         </p:txBody>
       </p:sp>
     </p:spTree>
-    <p:extLst>
-      <p:ext uri="{BB962C8B-B14F-4D97-AF65-F5344CB8AC3E}">
-        <p14:creationId xmlns:p14="http://schemas.microsoft.com/office/powerpoint/2010/main" val="3767601250"/>
-      </p:ext>
-    </p:extLst>
   </p:cSld>
   <p:clrMapOvr>
     <a:masterClrMapping/>
@@ -6693,6 +5910,7 @@
               <a:rPr lang="en-US"/>
               <a:t>Edit Master text styles</a:t>
             </a:r>
+            <a:endParaRPr lang="en-US"/>
           </a:p>
         </p:txBody>
       </p:sp>
@@ -6713,8 +5931,6 @@
           <a:p>
             <a:fld id="{48A87A34-81AB-432B-8DAE-1953F412C126}" type="datetimeFigureOut">
               <a:rPr lang="en-US" smtClean="0"/>
-              <a:pPr/>
-              <a:t>9/4/2019</a:t>
             </a:fld>
             <a:endParaRPr lang="en-US" dirty="0"/>
           </a:p>
@@ -6756,19 +5972,12 @@
           <a:p>
             <a:fld id="{6D22F896-40B5-4ADD-8801-0D06FADFA095}" type="slidenum">
               <a:rPr lang="en-US" smtClean="0"/>
-              <a:pPr/>
-              <a:t>‹#›</a:t>
             </a:fld>
             <a:endParaRPr lang="en-US" dirty="0"/>
           </a:p>
         </p:txBody>
       </p:sp>
     </p:spTree>
-    <p:extLst>
-      <p:ext uri="{BB962C8B-B14F-4D97-AF65-F5344CB8AC3E}">
-        <p14:creationId xmlns:p14="http://schemas.microsoft.com/office/powerpoint/2010/main" val="2449711757"/>
-      </p:ext>
-    </p:extLst>
   </p:cSld>
   <p:clrMapOvr>
     <a:masterClrMapping/>
@@ -6912,6 +6121,7 @@
               <a:rPr lang="en-US"/>
               <a:t>Edit Master text styles</a:t>
             </a:r>
+            <a:endParaRPr lang="en-US"/>
           </a:p>
         </p:txBody>
       </p:sp>
@@ -6979,6 +6189,7 @@
               <a:rPr lang="en-US"/>
               <a:t>Edit Master text styles</a:t>
             </a:r>
+            <a:endParaRPr lang="en-US"/>
           </a:p>
         </p:txBody>
       </p:sp>
@@ -7043,6 +6254,7 @@
               <a:rPr lang="en-US"/>
               <a:t>Edit Master text styles</a:t>
             </a:r>
+            <a:endParaRPr lang="en-US"/>
           </a:p>
         </p:txBody>
       </p:sp>
@@ -7110,6 +6322,7 @@
               <a:rPr lang="en-US"/>
               <a:t>Edit Master text styles</a:t>
             </a:r>
+            <a:endParaRPr lang="en-US"/>
           </a:p>
         </p:txBody>
       </p:sp>
@@ -7174,6 +6387,7 @@
               <a:rPr lang="en-US"/>
               <a:t>Edit Master text styles</a:t>
             </a:r>
+            <a:endParaRPr lang="en-US"/>
           </a:p>
         </p:txBody>
       </p:sp>
@@ -7241,6 +6455,7 @@
               <a:rPr lang="en-US"/>
               <a:t>Edit Master text styles</a:t>
             </a:r>
+            <a:endParaRPr lang="en-US"/>
           </a:p>
         </p:txBody>
       </p:sp>
@@ -7261,8 +6476,6 @@
           <a:p>
             <a:fld id="{48A87A34-81AB-432B-8DAE-1953F412C126}" type="datetimeFigureOut">
               <a:rPr lang="en-US" smtClean="0"/>
-              <a:pPr/>
-              <a:t>9/4/2019</a:t>
             </a:fld>
             <a:endParaRPr lang="en-US" dirty="0"/>
           </a:p>
@@ -7304,19 +6517,12 @@
           <a:p>
             <a:fld id="{6D22F896-40B5-4ADD-8801-0D06FADFA095}" type="slidenum">
               <a:rPr lang="en-US" smtClean="0"/>
-              <a:pPr/>
-              <a:t>‹#›</a:t>
             </a:fld>
             <a:endParaRPr lang="en-US" dirty="0"/>
           </a:p>
         </p:txBody>
       </p:sp>
     </p:spTree>
-    <p:extLst>
-      <p:ext uri="{BB962C8B-B14F-4D97-AF65-F5344CB8AC3E}">
-        <p14:creationId xmlns:p14="http://schemas.microsoft.com/office/powerpoint/2010/main" val="148641896"/>
-      </p:ext>
-    </p:extLst>
   </p:cSld>
   <p:clrMapOvr>
     <a:masterClrMapping/>
@@ -7456,6 +6662,7 @@
               <a:rPr lang="en-US"/>
               <a:t>Edit Master text styles</a:t>
             </a:r>
+            <a:endParaRPr lang="en-US"/>
           </a:p>
         </p:txBody>
       </p:sp>
@@ -7602,6 +6809,7 @@
               <a:rPr lang="en-US"/>
               <a:t>Edit Master text styles</a:t>
             </a:r>
+            <a:endParaRPr lang="en-US"/>
           </a:p>
         </p:txBody>
       </p:sp>
@@ -7692,6 +6900,7 @@
               <a:rPr lang="en-US"/>
               <a:t>Edit Master text styles</a:t>
             </a:r>
+            <a:endParaRPr lang="en-US"/>
           </a:p>
         </p:txBody>
       </p:sp>
@@ -7838,6 +7047,7 @@
               <a:rPr lang="en-US"/>
               <a:t>Edit Master text styles</a:t>
             </a:r>
+            <a:endParaRPr lang="en-US"/>
           </a:p>
         </p:txBody>
       </p:sp>
@@ -7928,6 +7138,7 @@
               <a:rPr lang="en-US"/>
               <a:t>Edit Master text styles</a:t>
             </a:r>
+            <a:endParaRPr lang="en-US"/>
           </a:p>
         </p:txBody>
       </p:sp>
@@ -8074,6 +7285,7 @@
               <a:rPr lang="en-US"/>
               <a:t>Edit Master text styles</a:t>
             </a:r>
+            <a:endParaRPr lang="en-US"/>
           </a:p>
         </p:txBody>
       </p:sp>
@@ -8094,8 +7306,6 @@
           <a:p>
             <a:fld id="{48A87A34-81AB-432B-8DAE-1953F412C126}" type="datetimeFigureOut">
               <a:rPr lang="en-US" smtClean="0"/>
-              <a:pPr/>
-              <a:t>9/4/2019</a:t>
             </a:fld>
             <a:endParaRPr lang="en-US" dirty="0"/>
           </a:p>
@@ -8137,19 +7347,12 @@
           <a:p>
             <a:fld id="{6D22F896-40B5-4ADD-8801-0D06FADFA095}" type="slidenum">
               <a:rPr lang="en-US" smtClean="0"/>
-              <a:pPr/>
-              <a:t>‹#›</a:t>
             </a:fld>
             <a:endParaRPr lang="en-US" dirty="0"/>
           </a:p>
         </p:txBody>
       </p:sp>
     </p:spTree>
-    <p:extLst>
-      <p:ext uri="{BB962C8B-B14F-4D97-AF65-F5344CB8AC3E}">
-        <p14:creationId xmlns:p14="http://schemas.microsoft.com/office/powerpoint/2010/main" val="2243357883"/>
-      </p:ext>
-    </p:extLst>
   </p:cSld>
   <p:clrMapOvr>
     <a:masterClrMapping/>
@@ -8217,6 +7420,7 @@
               <a:rPr lang="en-US"/>
               <a:t>Edit Master text styles</a:t>
             </a:r>
+            <a:endParaRPr lang="en-US"/>
           </a:p>
           <a:p>
             <a:pPr lvl="1"/>
@@ -8224,6 +7428,7 @@
               <a:rPr lang="en-US"/>
               <a:t>Second level</a:t>
             </a:r>
+            <a:endParaRPr lang="en-US"/>
           </a:p>
           <a:p>
             <a:pPr lvl="2"/>
@@ -8231,6 +7436,7 @@
               <a:rPr lang="en-US"/>
               <a:t>Third level</a:t>
             </a:r>
+            <a:endParaRPr lang="en-US"/>
           </a:p>
           <a:p>
             <a:pPr lvl="3"/>
@@ -8238,6 +7444,7 @@
               <a:rPr lang="en-US"/>
               <a:t>Fourth level</a:t>
             </a:r>
+            <a:endParaRPr lang="en-US"/>
           </a:p>
           <a:p>
             <a:pPr lvl="4"/>
@@ -8266,7 +7473,6 @@
           <a:p>
             <a:fld id="{48A87A34-81AB-432B-8DAE-1953F412C126}" type="datetimeFigureOut">
               <a:rPr lang="en-US" smtClean="0"/>
-              <a:t>9/4/2019</a:t>
             </a:fld>
             <a:endParaRPr lang="en-US" dirty="0"/>
           </a:p>
@@ -8308,18 +7514,12 @@
           <a:p>
             <a:fld id="{6D22F896-40B5-4ADD-8801-0D06FADFA095}" type="slidenum">
               <a:rPr lang="en-US" smtClean="0"/>
-              <a:t>‹#›</a:t>
             </a:fld>
             <a:endParaRPr lang="en-US" dirty="0"/>
           </a:p>
         </p:txBody>
       </p:sp>
     </p:spTree>
-    <p:extLst>
-      <p:ext uri="{BB962C8B-B14F-4D97-AF65-F5344CB8AC3E}">
-        <p14:creationId xmlns:p14="http://schemas.microsoft.com/office/powerpoint/2010/main" val="3648520217"/>
-      </p:ext>
-    </p:extLst>
   </p:cSld>
   <p:clrMapOvr>
     <a:masterClrMapping/>
@@ -8397,6 +7597,7 @@
               <a:rPr lang="en-US"/>
               <a:t>Edit Master text styles</a:t>
             </a:r>
+            <a:endParaRPr lang="en-US"/>
           </a:p>
           <a:p>
             <a:pPr lvl="1"/>
@@ -8404,6 +7605,7 @@
               <a:rPr lang="en-US"/>
               <a:t>Second level</a:t>
             </a:r>
+            <a:endParaRPr lang="en-US"/>
           </a:p>
           <a:p>
             <a:pPr lvl="2"/>
@@ -8411,6 +7613,7 @@
               <a:rPr lang="en-US"/>
               <a:t>Third level</a:t>
             </a:r>
+            <a:endParaRPr lang="en-US"/>
           </a:p>
           <a:p>
             <a:pPr lvl="3"/>
@@ -8418,6 +7621,7 @@
               <a:rPr lang="en-US"/>
               <a:t>Fourth level</a:t>
             </a:r>
+            <a:endParaRPr lang="en-US"/>
           </a:p>
           <a:p>
             <a:pPr lvl="4"/>
@@ -8446,7 +7650,6 @@
           <a:p>
             <a:fld id="{48A87A34-81AB-432B-8DAE-1953F412C126}" type="datetimeFigureOut">
               <a:rPr lang="en-US" smtClean="0"/>
-              <a:t>9/4/2019</a:t>
             </a:fld>
             <a:endParaRPr lang="en-US" dirty="0"/>
           </a:p>
@@ -8488,18 +7691,12 @@
           <a:p>
             <a:fld id="{6D22F896-40B5-4ADD-8801-0D06FADFA095}" type="slidenum">
               <a:rPr lang="en-US" smtClean="0"/>
-              <a:t>‹#›</a:t>
             </a:fld>
             <a:endParaRPr lang="en-US" dirty="0"/>
           </a:p>
         </p:txBody>
       </p:sp>
     </p:spTree>
-    <p:extLst>
-      <p:ext uri="{BB962C8B-B14F-4D97-AF65-F5344CB8AC3E}">
-        <p14:creationId xmlns:p14="http://schemas.microsoft.com/office/powerpoint/2010/main" val="2633959794"/>
-      </p:ext>
-    </p:extLst>
   </p:cSld>
   <p:clrMapOvr>
     <a:masterClrMapping/>
@@ -8567,6 +7764,7 @@
               <a:rPr lang="en-US"/>
               <a:t>Edit Master text styles</a:t>
             </a:r>
+            <a:endParaRPr lang="en-US"/>
           </a:p>
           <a:p>
             <a:pPr lvl="1"/>
@@ -8574,6 +7772,7 @@
               <a:rPr lang="en-US"/>
               <a:t>Second level</a:t>
             </a:r>
+            <a:endParaRPr lang="en-US"/>
           </a:p>
           <a:p>
             <a:pPr lvl="2"/>
@@ -8581,6 +7780,7 @@
               <a:rPr lang="en-US"/>
               <a:t>Third level</a:t>
             </a:r>
+            <a:endParaRPr lang="en-US"/>
           </a:p>
           <a:p>
             <a:pPr lvl="3"/>
@@ -8588,6 +7788,7 @@
               <a:rPr lang="en-US"/>
               <a:t>Fourth level</a:t>
             </a:r>
+            <a:endParaRPr lang="en-US"/>
           </a:p>
           <a:p>
             <a:pPr lvl="4"/>
@@ -8616,7 +7817,6 @@
           <a:p>
             <a:fld id="{48A87A34-81AB-432B-8DAE-1953F412C126}" type="datetimeFigureOut">
               <a:rPr lang="en-US" smtClean="0"/>
-              <a:t>9/4/2019</a:t>
             </a:fld>
             <a:endParaRPr lang="en-US" dirty="0"/>
           </a:p>
@@ -8658,18 +7858,12 @@
           <a:p>
             <a:fld id="{6D22F896-40B5-4ADD-8801-0D06FADFA095}" type="slidenum">
               <a:rPr lang="en-US" smtClean="0"/>
-              <a:t>‹#›</a:t>
             </a:fld>
             <a:endParaRPr lang="en-US" dirty="0"/>
           </a:p>
         </p:txBody>
       </p:sp>
     </p:spTree>
-    <p:extLst>
-      <p:ext uri="{BB962C8B-B14F-4D97-AF65-F5344CB8AC3E}">
-        <p14:creationId xmlns:p14="http://schemas.microsoft.com/office/powerpoint/2010/main" val="1345624444"/>
-      </p:ext>
-    </p:extLst>
   </p:cSld>
   <p:clrMapOvr>
     <a:masterClrMapping/>
@@ -8873,7 +8067,6 @@
           <a:p>
             <a:fld id="{48A87A34-81AB-432B-8DAE-1953F412C126}" type="datetimeFigureOut">
               <a:rPr lang="en-US" smtClean="0"/>
-              <a:t>9/4/2019</a:t>
             </a:fld>
             <a:endParaRPr lang="en-US" dirty="0"/>
           </a:p>
@@ -8915,18 +8108,12 @@
           <a:p>
             <a:fld id="{6D22F896-40B5-4ADD-8801-0D06FADFA095}" type="slidenum">
               <a:rPr lang="en-US" smtClean="0"/>
-              <a:t>‹#›</a:t>
             </a:fld>
             <a:endParaRPr lang="en-US" dirty="0"/>
           </a:p>
         </p:txBody>
       </p:sp>
     </p:spTree>
-    <p:extLst>
-      <p:ext uri="{BB962C8B-B14F-4D97-AF65-F5344CB8AC3E}">
-        <p14:creationId xmlns:p14="http://schemas.microsoft.com/office/powerpoint/2010/main" val="3351514465"/>
-      </p:ext>
-    </p:extLst>
   </p:cSld>
   <p:clrMapOvr>
     <a:masterClrMapping/>
@@ -8999,6 +8186,7 @@
               <a:rPr lang="en-US"/>
               <a:t>Edit Master text styles</a:t>
             </a:r>
+            <a:endParaRPr lang="en-US"/>
           </a:p>
           <a:p>
             <a:pPr lvl="1"/>
@@ -9006,6 +8194,7 @@
               <a:rPr lang="en-US"/>
               <a:t>Second level</a:t>
             </a:r>
+            <a:endParaRPr lang="en-US"/>
           </a:p>
           <a:p>
             <a:pPr lvl="2"/>
@@ -9013,6 +8202,7 @@
               <a:rPr lang="en-US"/>
               <a:t>Third level</a:t>
             </a:r>
+            <a:endParaRPr lang="en-US"/>
           </a:p>
           <a:p>
             <a:pPr lvl="3"/>
@@ -9020,6 +8210,7 @@
               <a:rPr lang="en-US"/>
               <a:t>Fourth level</a:t>
             </a:r>
+            <a:endParaRPr lang="en-US"/>
           </a:p>
           <a:p>
             <a:pPr lvl="4"/>
@@ -9056,6 +8247,7 @@
               <a:rPr lang="en-US"/>
               <a:t>Edit Master text styles</a:t>
             </a:r>
+            <a:endParaRPr lang="en-US"/>
           </a:p>
           <a:p>
             <a:pPr lvl="1"/>
@@ -9063,6 +8255,7 @@
               <a:rPr lang="en-US"/>
               <a:t>Second level</a:t>
             </a:r>
+            <a:endParaRPr lang="en-US"/>
           </a:p>
           <a:p>
             <a:pPr lvl="2"/>
@@ -9070,6 +8263,7 @@
               <a:rPr lang="en-US"/>
               <a:t>Third level</a:t>
             </a:r>
+            <a:endParaRPr lang="en-US"/>
           </a:p>
           <a:p>
             <a:pPr lvl="3"/>
@@ -9077,6 +8271,7 @@
               <a:rPr lang="en-US"/>
               <a:t>Fourth level</a:t>
             </a:r>
+            <a:endParaRPr lang="en-US"/>
           </a:p>
           <a:p>
             <a:pPr lvl="4"/>
@@ -9105,7 +8300,6 @@
           <a:p>
             <a:fld id="{48A87A34-81AB-432B-8DAE-1953F412C126}" type="datetimeFigureOut">
               <a:rPr lang="en-US" smtClean="0"/>
-              <a:t>9/4/2019</a:t>
             </a:fld>
             <a:endParaRPr lang="en-US" dirty="0"/>
           </a:p>
@@ -9147,18 +8341,12 @@
           <a:p>
             <a:fld id="{6D22F896-40B5-4ADD-8801-0D06FADFA095}" type="slidenum">
               <a:rPr lang="en-US" smtClean="0"/>
-              <a:t>‹#›</a:t>
             </a:fld>
             <a:endParaRPr lang="en-US" dirty="0"/>
           </a:p>
         </p:txBody>
       </p:sp>
     </p:spTree>
-    <p:extLst>
-      <p:ext uri="{BB962C8B-B14F-4D97-AF65-F5344CB8AC3E}">
-        <p14:creationId xmlns:p14="http://schemas.microsoft.com/office/powerpoint/2010/main" val="407807453"/>
-      </p:ext>
-    </p:extLst>
   </p:cSld>
   <p:clrMapOvr>
     <a:masterClrMapping/>
@@ -9300,6 +8488,7 @@
               <a:rPr lang="en-US"/>
               <a:t>Edit Master text styles</a:t>
             </a:r>
+            <a:endParaRPr lang="en-US"/>
           </a:p>
         </p:txBody>
       </p:sp>
@@ -9328,6 +8517,7 @@
               <a:rPr lang="en-US"/>
               <a:t>Edit Master text styles</a:t>
             </a:r>
+            <a:endParaRPr lang="en-US"/>
           </a:p>
           <a:p>
             <a:pPr lvl="1"/>
@@ -9335,6 +8525,7 @@
               <a:rPr lang="en-US"/>
               <a:t>Second level</a:t>
             </a:r>
+            <a:endParaRPr lang="en-US"/>
           </a:p>
           <a:p>
             <a:pPr lvl="2"/>
@@ -9342,6 +8533,7 @@
               <a:rPr lang="en-US"/>
               <a:t>Third level</a:t>
             </a:r>
+            <a:endParaRPr lang="en-US"/>
           </a:p>
           <a:p>
             <a:pPr lvl="3"/>
@@ -9349,6 +8541,7 @@
               <a:rPr lang="en-US"/>
               <a:t>Fourth level</a:t>
             </a:r>
+            <a:endParaRPr lang="en-US"/>
           </a:p>
           <a:p>
             <a:pPr lvl="4"/>
@@ -9421,6 +8614,7 @@
               <a:rPr lang="en-US"/>
               <a:t>Edit Master text styles</a:t>
             </a:r>
+            <a:endParaRPr lang="en-US"/>
           </a:p>
         </p:txBody>
       </p:sp>
@@ -9449,6 +8643,7 @@
               <a:rPr lang="en-US"/>
               <a:t>Edit Master text styles</a:t>
             </a:r>
+            <a:endParaRPr lang="en-US"/>
           </a:p>
           <a:p>
             <a:pPr lvl="1"/>
@@ -9456,6 +8651,7 @@
               <a:rPr lang="en-US"/>
               <a:t>Second level</a:t>
             </a:r>
+            <a:endParaRPr lang="en-US"/>
           </a:p>
           <a:p>
             <a:pPr lvl="2"/>
@@ -9463,6 +8659,7 @@
               <a:rPr lang="en-US"/>
               <a:t>Third level</a:t>
             </a:r>
+            <a:endParaRPr lang="en-US"/>
           </a:p>
           <a:p>
             <a:pPr lvl="3"/>
@@ -9470,6 +8667,7 @@
               <a:rPr lang="en-US"/>
               <a:t>Fourth level</a:t>
             </a:r>
+            <a:endParaRPr lang="en-US"/>
           </a:p>
           <a:p>
             <a:pPr lvl="4"/>
@@ -9498,7 +8696,6 @@
           <a:p>
             <a:fld id="{48A87A34-81AB-432B-8DAE-1953F412C126}" type="datetimeFigureOut">
               <a:rPr lang="en-US" smtClean="0"/>
-              <a:t>9/4/2019</a:t>
             </a:fld>
             <a:endParaRPr lang="en-US" dirty="0"/>
           </a:p>
@@ -9540,18 +8737,12 @@
           <a:p>
             <a:fld id="{6D22F896-40B5-4ADD-8801-0D06FADFA095}" type="slidenum">
               <a:rPr lang="en-US" smtClean="0"/>
-              <a:t>‹#›</a:t>
             </a:fld>
             <a:endParaRPr lang="en-US" dirty="0"/>
           </a:p>
         </p:txBody>
       </p:sp>
     </p:spTree>
-    <p:extLst>
-      <p:ext uri="{BB962C8B-B14F-4D97-AF65-F5344CB8AC3E}">
-        <p14:creationId xmlns:p14="http://schemas.microsoft.com/office/powerpoint/2010/main" val="3839565488"/>
-      </p:ext>
-    </p:extLst>
   </p:cSld>
   <p:clrMapOvr>
     <a:masterClrMapping/>
@@ -9616,7 +8807,6 @@
           <a:p>
             <a:fld id="{48A87A34-81AB-432B-8DAE-1953F412C126}" type="datetimeFigureOut">
               <a:rPr lang="en-US" smtClean="0"/>
-              <a:t>9/4/2019</a:t>
             </a:fld>
             <a:endParaRPr lang="en-US" dirty="0"/>
           </a:p>
@@ -9658,18 +8848,12 @@
           <a:p>
             <a:fld id="{6D22F896-40B5-4ADD-8801-0D06FADFA095}" type="slidenum">
               <a:rPr lang="en-US" smtClean="0"/>
-              <a:t>‹#›</a:t>
             </a:fld>
             <a:endParaRPr lang="en-US" dirty="0"/>
           </a:p>
         </p:txBody>
       </p:sp>
     </p:spTree>
-    <p:extLst>
-      <p:ext uri="{BB962C8B-B14F-4D97-AF65-F5344CB8AC3E}">
-        <p14:creationId xmlns:p14="http://schemas.microsoft.com/office/powerpoint/2010/main" val="3160677236"/>
-      </p:ext>
-    </p:extLst>
   </p:cSld>
   <p:clrMapOvr>
     <a:masterClrMapping/>
@@ -9711,7 +8895,6 @@
           <a:p>
             <a:fld id="{48A87A34-81AB-432B-8DAE-1953F412C126}" type="datetimeFigureOut">
               <a:rPr lang="en-US" smtClean="0"/>
-              <a:t>9/4/2019</a:t>
             </a:fld>
             <a:endParaRPr lang="en-US" dirty="0"/>
           </a:p>
@@ -9753,18 +8936,12 @@
           <a:p>
             <a:fld id="{6D22F896-40B5-4ADD-8801-0D06FADFA095}" type="slidenum">
               <a:rPr lang="en-US" smtClean="0"/>
-              <a:t>‹#›</a:t>
             </a:fld>
             <a:endParaRPr lang="en-US" dirty="0"/>
           </a:p>
         </p:txBody>
       </p:sp>
     </p:spTree>
-    <p:extLst>
-      <p:ext uri="{BB962C8B-B14F-4D97-AF65-F5344CB8AC3E}">
-        <p14:creationId xmlns:p14="http://schemas.microsoft.com/office/powerpoint/2010/main" val="1902073568"/>
-      </p:ext>
-    </p:extLst>
   </p:cSld>
   <p:clrMapOvr>
     <a:masterClrMapping/>
@@ -9846,6 +9023,7 @@
               <a:rPr lang="en-US"/>
               <a:t>Edit Master text styles</a:t>
             </a:r>
+            <a:endParaRPr lang="en-US"/>
           </a:p>
           <a:p>
             <a:pPr lvl="1"/>
@@ -9853,6 +9031,7 @@
               <a:rPr lang="en-US"/>
               <a:t>Second level</a:t>
             </a:r>
+            <a:endParaRPr lang="en-US"/>
           </a:p>
           <a:p>
             <a:pPr lvl="2"/>
@@ -9860,6 +9039,7 @@
               <a:rPr lang="en-US"/>
               <a:t>Third level</a:t>
             </a:r>
+            <a:endParaRPr lang="en-US"/>
           </a:p>
           <a:p>
             <a:pPr lvl="3"/>
@@ -9867,6 +9047,7 @@
               <a:rPr lang="en-US"/>
               <a:t>Fourth level</a:t>
             </a:r>
+            <a:endParaRPr lang="en-US"/>
           </a:p>
           <a:p>
             <a:pPr lvl="4"/>
@@ -9964,6 +9145,7 @@
               <a:rPr lang="en-US"/>
               <a:t>Edit Master text styles</a:t>
             </a:r>
+            <a:endParaRPr lang="en-US"/>
           </a:p>
         </p:txBody>
       </p:sp>
@@ -9984,7 +9166,6 @@
           <a:p>
             <a:fld id="{48A87A34-81AB-432B-8DAE-1953F412C126}" type="datetimeFigureOut">
               <a:rPr lang="en-US" smtClean="0"/>
-              <a:t>9/4/2019</a:t>
             </a:fld>
             <a:endParaRPr lang="en-US" dirty="0"/>
           </a:p>
@@ -10026,18 +9207,12 @@
           <a:p>
             <a:fld id="{6D22F896-40B5-4ADD-8801-0D06FADFA095}" type="slidenum">
               <a:rPr lang="en-US" smtClean="0"/>
-              <a:t>‹#›</a:t>
             </a:fld>
             <a:endParaRPr lang="en-US" dirty="0"/>
           </a:p>
         </p:txBody>
       </p:sp>
     </p:spTree>
-    <p:extLst>
-      <p:ext uri="{BB962C8B-B14F-4D97-AF65-F5344CB8AC3E}">
-        <p14:creationId xmlns:p14="http://schemas.microsoft.com/office/powerpoint/2010/main" val="1750169678"/>
-      </p:ext>
-    </p:extLst>
   </p:cSld>
   <p:clrMapOvr>
     <a:masterClrMapping/>
@@ -10245,6 +9420,7 @@
               <a:rPr lang="en-US"/>
               <a:t>Edit Master text styles</a:t>
             </a:r>
+            <a:endParaRPr lang="en-US"/>
           </a:p>
         </p:txBody>
       </p:sp>
@@ -10265,7 +9441,6 @@
           <a:p>
             <a:fld id="{48A87A34-81AB-432B-8DAE-1953F412C126}" type="datetimeFigureOut">
               <a:rPr lang="en-US" smtClean="0"/>
-              <a:t>9/4/2019</a:t>
             </a:fld>
             <a:endParaRPr lang="en-US" dirty="0"/>
           </a:p>
@@ -10307,18 +9482,12 @@
           <a:p>
             <a:fld id="{6D22F896-40B5-4ADD-8801-0D06FADFA095}" type="slidenum">
               <a:rPr lang="en-US" smtClean="0"/>
-              <a:t>‹#›</a:t>
             </a:fld>
             <a:endParaRPr lang="en-US" dirty="0"/>
           </a:p>
         </p:txBody>
       </p:sp>
     </p:spTree>
-    <p:extLst>
-      <p:ext uri="{BB962C8B-B14F-4D97-AF65-F5344CB8AC3E}">
-        <p14:creationId xmlns:p14="http://schemas.microsoft.com/office/powerpoint/2010/main" val="3264453245"/>
-      </p:ext>
-    </p:extLst>
   </p:cSld>
   <p:clrMapOvr>
     <a:masterClrMapping/>
@@ -10332,7 +9501,7 @@
     <p:bg>
       <p:bgPr>
         <a:blipFill dpi="0" rotWithShape="1">
-          <a:blip r:embed="rId19">
+          <a:blip r:embed="rId18">
             <a:lum/>
           </a:blip>
           <a:srcRect/>
@@ -10420,6 +9589,7 @@
               <a:rPr lang="en-US"/>
               <a:t>Edit Master text styles</a:t>
             </a:r>
+            <a:endParaRPr lang="en-US"/>
           </a:p>
           <a:p>
             <a:pPr lvl="1"/>
@@ -10427,6 +9597,7 @@
               <a:rPr lang="en-US"/>
               <a:t>Second level</a:t>
             </a:r>
+            <a:endParaRPr lang="en-US"/>
           </a:p>
           <a:p>
             <a:pPr lvl="2"/>
@@ -10434,6 +9605,7 @@
               <a:rPr lang="en-US"/>
               <a:t>Third level</a:t>
             </a:r>
+            <a:endParaRPr lang="en-US"/>
           </a:p>
           <a:p>
             <a:pPr lvl="3"/>
@@ -10441,6 +9613,7 @@
               <a:rPr lang="en-US"/>
               <a:t>Fourth level</a:t>
             </a:r>
+            <a:endParaRPr lang="en-US"/>
           </a:p>
           <a:p>
             <a:pPr lvl="4"/>
@@ -10505,8 +9678,6 @@
           <a:p>
             <a:fld id="{48A87A34-81AB-432B-8DAE-1953F412C126}" type="datetimeFigureOut">
               <a:rPr lang="en-US" smtClean="0"/>
-              <a:pPr/>
-              <a:t>9/4/2019</a:t>
             </a:fld>
             <a:endParaRPr lang="en-US" dirty="0"/>
           </a:p>
@@ -10620,39 +9791,32 @@
           <a:p>
             <a:fld id="{6D22F896-40B5-4ADD-8801-0D06FADFA095}" type="slidenum">
               <a:rPr lang="en-US" smtClean="0"/>
-              <a:pPr/>
-              <a:t>‹#›</a:t>
             </a:fld>
             <a:endParaRPr lang="en-US" dirty="0"/>
           </a:p>
         </p:txBody>
       </p:sp>
     </p:spTree>
-    <p:extLst>
-      <p:ext uri="{BB962C8B-B14F-4D97-AF65-F5344CB8AC3E}">
-        <p14:creationId xmlns:p14="http://schemas.microsoft.com/office/powerpoint/2010/main" val="379503848"/>
-      </p:ext>
-    </p:extLst>
   </p:cSld>
   <p:clrMap bg1="dk1" tx1="lt1" bg2="dk2" tx2="lt2" accent1="accent1" accent2="accent2" accent3="accent3" accent4="accent4" accent5="accent5" accent6="accent6" hlink="hlink" folHlink="folHlink"/>
   <p:sldLayoutIdLst>
-    <p:sldLayoutId id="2147483793" r:id="rId1"/>
-    <p:sldLayoutId id="2147483794" r:id="rId2"/>
-    <p:sldLayoutId id="2147483795" r:id="rId3"/>
-    <p:sldLayoutId id="2147483796" r:id="rId4"/>
-    <p:sldLayoutId id="2147483797" r:id="rId5"/>
-    <p:sldLayoutId id="2147483798" r:id="rId6"/>
-    <p:sldLayoutId id="2147483799" r:id="rId7"/>
-    <p:sldLayoutId id="2147483800" r:id="rId8"/>
-    <p:sldLayoutId id="2147483801" r:id="rId9"/>
-    <p:sldLayoutId id="2147483802" r:id="rId10"/>
-    <p:sldLayoutId id="2147483803" r:id="rId11"/>
-    <p:sldLayoutId id="2147483804" r:id="rId12"/>
-    <p:sldLayoutId id="2147483805" r:id="rId13"/>
-    <p:sldLayoutId id="2147483806" r:id="rId14"/>
-    <p:sldLayoutId id="2147483807" r:id="rId15"/>
-    <p:sldLayoutId id="2147483808" r:id="rId16"/>
-    <p:sldLayoutId id="2147483809" r:id="rId17"/>
+    <p:sldLayoutId id="2147483649" r:id="rId1"/>
+    <p:sldLayoutId id="2147483650" r:id="rId2"/>
+    <p:sldLayoutId id="2147483651" r:id="rId3"/>
+    <p:sldLayoutId id="2147483652" r:id="rId4"/>
+    <p:sldLayoutId id="2147483653" r:id="rId5"/>
+    <p:sldLayoutId id="2147483654" r:id="rId6"/>
+    <p:sldLayoutId id="2147483655" r:id="rId7"/>
+    <p:sldLayoutId id="2147483656" r:id="rId8"/>
+    <p:sldLayoutId id="2147483657" r:id="rId9"/>
+    <p:sldLayoutId id="2147483658" r:id="rId10"/>
+    <p:sldLayoutId id="2147483659" r:id="rId11"/>
+    <p:sldLayoutId id="2147483660" r:id="rId12"/>
+    <p:sldLayoutId id="2147483661" r:id="rId13"/>
+    <p:sldLayoutId id="2147483662" r:id="rId14"/>
+    <p:sldLayoutId id="2147483663" r:id="rId15"/>
+    <p:sldLayoutId id="2147483664" r:id="rId16"/>
+    <p:sldLayoutId id="2147483665" r:id="rId17"/>
   </p:sldLayoutIdLst>
   <p:txStyles>
     <p:titleStyle>
@@ -11135,6 +10299,7 @@
               <a:rPr lang="en-US" dirty="0"/>
               <a:t>2010</a:t>
             </a:r>
+            <a:endParaRPr lang="en-US" dirty="0"/>
           </a:p>
         </p:txBody>
       </p:sp>
@@ -11165,13 +10330,7 @@
       </p:grpSpPr>
       <p:sp>
         <p:nvSpPr>
-          <p:cNvPr id="2" name="Title 1">
-            <a:extLst>
-              <a:ext uri="{FF2B5EF4-FFF2-40B4-BE49-F238E27FC236}">
-                <a16:creationId xmlns:a16="http://schemas.microsoft.com/office/drawing/2014/main" id="{FA33D485-1249-4731-AA38-70E57DCE933C}"/>
-              </a:ext>
-            </a:extLst>
-          </p:cNvPr>
+          <p:cNvPr id="2" name="Title 1"/>
           <p:cNvSpPr>
             <a:spLocks noGrp="1"/>
           </p:cNvSpPr>
@@ -11202,13 +10361,7 @@
       </p:sp>
       <p:sp>
         <p:nvSpPr>
-          <p:cNvPr id="3" name="Content Placeholder 2">
-            <a:extLst>
-              <a:ext uri="{FF2B5EF4-FFF2-40B4-BE49-F238E27FC236}">
-                <a16:creationId xmlns:a16="http://schemas.microsoft.com/office/drawing/2014/main" id="{ADCAFCBA-257C-4ACF-9FDE-61A71CC76B01}"/>
-              </a:ext>
-            </a:extLst>
-          </p:cNvPr>
+          <p:cNvPr id="3" name="Content Placeholder 2"/>
           <p:cNvSpPr>
             <a:spLocks noGrp="1"/>
           </p:cNvSpPr>
@@ -11226,11 +10379,6 @@
         </p:txBody>
       </p:sp>
     </p:spTree>
-    <p:extLst>
-      <p:ext uri="{BB962C8B-B14F-4D97-AF65-F5344CB8AC3E}">
-        <p14:creationId xmlns:p14="http://schemas.microsoft.com/office/powerpoint/2010/main" val="177881417"/>
-      </p:ext>
-    </p:extLst>
   </p:cSld>
   <p:clrMapOvr>
     <a:masterClrMapping/>
@@ -11333,11 +10481,6 @@
         </p:txBody>
       </p:sp>
     </p:spTree>
-    <p:extLst>
-      <p:ext uri="{BB962C8B-B14F-4D97-AF65-F5344CB8AC3E}">
-        <p14:creationId xmlns:p14="http://schemas.microsoft.com/office/powerpoint/2010/main" val="43872184"/>
-      </p:ext>
-    </p:extLst>
   </p:cSld>
   <p:clrMapOvr>
     <a:masterClrMapping/>
@@ -11364,13 +10507,7 @@
       </p:grpSpPr>
       <p:sp>
         <p:nvSpPr>
-          <p:cNvPr id="2" name="Title 1">
-            <a:extLst>
-              <a:ext uri="{FF2B5EF4-FFF2-40B4-BE49-F238E27FC236}">
-                <a16:creationId xmlns:a16="http://schemas.microsoft.com/office/drawing/2014/main" id="{7C92CC2A-3664-4866-A439-96676ADC080D}"/>
-              </a:ext>
-            </a:extLst>
-          </p:cNvPr>
+          <p:cNvPr id="2" name="Title 1"/>
           <p:cNvSpPr>
             <a:spLocks noGrp="1"/>
           </p:cNvSpPr>
@@ -11393,13 +10530,7 @@
       </p:sp>
       <p:sp>
         <p:nvSpPr>
-          <p:cNvPr id="3" name="Content Placeholder 2">
-            <a:extLst>
-              <a:ext uri="{FF2B5EF4-FFF2-40B4-BE49-F238E27FC236}">
-                <a16:creationId xmlns:a16="http://schemas.microsoft.com/office/drawing/2014/main" id="{648B919E-7126-4AFA-949F-CA9E73C44E9F}"/>
-              </a:ext>
-            </a:extLst>
-          </p:cNvPr>
+          <p:cNvPr id="3" name="Content Placeholder 2"/>
           <p:cNvSpPr>
             <a:spLocks noGrp="1"/>
           </p:cNvSpPr>
@@ -11417,11 +10548,6 @@
         </p:txBody>
       </p:sp>
     </p:spTree>
-    <p:extLst>
-      <p:ext uri="{BB962C8B-B14F-4D97-AF65-F5344CB8AC3E}">
-        <p14:creationId xmlns:p14="http://schemas.microsoft.com/office/powerpoint/2010/main" val="3793490362"/>
-      </p:ext>
-    </p:extLst>
   </p:cSld>
   <p:clrMapOvr>
     <a:masterClrMapping/>
@@ -11456,26 +10582,11 @@
       </p:grpSpPr>
       <p:sp>
         <p:nvSpPr>
-          <p:cNvPr id="13" name="Rectangle 12">
-            <a:extLst>
-              <a:ext uri="{FF2B5EF4-FFF2-40B4-BE49-F238E27FC236}">
-                <a16:creationId xmlns:a16="http://schemas.microsoft.com/office/drawing/2014/main" id="{05325879-C4B2-475E-B853-DC8F21A63351}"/>
-              </a:ext>
-              <a:ext uri="{C183D7F6-B498-43B3-948B-1728B52AA6E4}">
-                <adec:decorative xmlns:adec="http://schemas.microsoft.com/office/drawing/2017/decorative" val="1"/>
-              </a:ext>
-            </a:extLst>
-          </p:cNvPr>
+          <p:cNvPr id="13" name="Rectangle 12"/>
           <p:cNvSpPr>
             <a:spLocks noGrp="1" noRot="1" noChangeAspect="1" noMove="1" noResize="1" noEditPoints="1" noAdjustHandles="1" noChangeArrowheads="1" noChangeShapeType="1" noTextEdit="1"/>
           </p:cNvSpPr>
-          <p:nvPr>
-            <p:extLst>
-              <p:ext uri="{386F3935-93C4-4BCD-93E2-E3B085C9AB24}">
-                <p16:designElem xmlns:p16="http://schemas.microsoft.com/office/powerpoint/2015/main" val="1"/>
-              </p:ext>
-            </p:extLst>
-          </p:nvPr>
+          <p:nvPr/>
         </p:nvSpPr>
         <p:spPr>
           <a:xfrm>
@@ -11519,26 +10630,11 @@
       </p:sp>
       <p:sp>
         <p:nvSpPr>
-          <p:cNvPr id="15" name="Rectangle 14">
-            <a:extLst>
-              <a:ext uri="{FF2B5EF4-FFF2-40B4-BE49-F238E27FC236}">
-                <a16:creationId xmlns:a16="http://schemas.microsoft.com/office/drawing/2014/main" id="{012C085F-3B19-420D-902A-B55695F5036C}"/>
-              </a:ext>
-              <a:ext uri="{C183D7F6-B498-43B3-948B-1728B52AA6E4}">
-                <adec:decorative xmlns:adec="http://schemas.microsoft.com/office/drawing/2017/decorative" val="1"/>
-              </a:ext>
-            </a:extLst>
-          </p:cNvPr>
+          <p:cNvPr id="15" name="Rectangle 14"/>
           <p:cNvSpPr>
             <a:spLocks noGrp="1" noRot="1" noChangeAspect="1" noMove="1" noResize="1" noEditPoints="1" noAdjustHandles="1" noChangeArrowheads="1" noChangeShapeType="1" noTextEdit="1"/>
           </p:cNvSpPr>
-          <p:nvPr>
-            <p:extLst>
-              <p:ext uri="{386F3935-93C4-4BCD-93E2-E3B085C9AB24}">
-                <p16:designElem xmlns:p16="http://schemas.microsoft.com/office/powerpoint/2015/main" val="1"/>
-              </p:ext>
-            </p:extLst>
-          </p:nvPr>
+          <p:nvPr/>
         </p:nvSpPr>
         <p:spPr>
           <a:xfrm>
@@ -11549,7 +10645,7 @@
             <a:avLst/>
           </a:prstGeom>
           <a:blipFill>
-            <a:blip r:embed="rId2"/>
+            <a:blip r:embed="rId1"/>
             <a:stretch>
               <a:fillRect r="-164004"/>
             </a:stretch>
@@ -11592,13 +10688,7 @@
       </p:sp>
       <p:sp>
         <p:nvSpPr>
-          <p:cNvPr id="2" name="Title 1">
-            <a:extLst>
-              <a:ext uri="{FF2B5EF4-FFF2-40B4-BE49-F238E27FC236}">
-                <a16:creationId xmlns:a16="http://schemas.microsoft.com/office/drawing/2014/main" id="{50C7B3FD-18F4-4D71-8FBF-08686999CADD}"/>
-              </a:ext>
-            </a:extLst>
-          </p:cNvPr>
+          <p:cNvPr id="2" name="Title 1"/>
           <p:cNvSpPr>
             <a:spLocks noGrp="1"/>
           </p:cNvSpPr>
@@ -11680,13 +10770,7 @@
       </p:sp>
       <p:sp>
         <p:nvSpPr>
-          <p:cNvPr id="10" name="Content Placeholder 9">
-            <a:extLst>
-              <a:ext uri="{FF2B5EF4-FFF2-40B4-BE49-F238E27FC236}">
-                <a16:creationId xmlns:a16="http://schemas.microsoft.com/office/drawing/2014/main" id="{CB583D3A-8EBC-4EC0-87B6-4878719707DD}"/>
-              </a:ext>
-            </a:extLst>
-          </p:cNvPr>
+          <p:cNvPr id="10" name="Content Placeholder 9"/>
           <p:cNvSpPr>
             <a:spLocks noGrp="1"/>
           </p:cNvSpPr>
@@ -11807,20 +10891,14 @@
       </p:sp>
       <p:pic>
         <p:nvPicPr>
-          <p:cNvPr id="8" name="Content Placeholder 4">
-            <a:extLst>
-              <a:ext uri="{FF2B5EF4-FFF2-40B4-BE49-F238E27FC236}">
-                <a16:creationId xmlns:a16="http://schemas.microsoft.com/office/drawing/2014/main" id="{3BDEC95C-CB3D-40F2-97A2-B1E3019BC38E}"/>
-              </a:ext>
-            </a:extLst>
-          </p:cNvPr>
+          <p:cNvPr id="8" name="Content Placeholder 4"/>
           <p:cNvPicPr>
             <a:picLocks noChangeAspect="1"/>
           </p:cNvPicPr>
           <p:nvPr/>
         </p:nvPicPr>
         <p:blipFill>
-          <a:blip r:embed="rId3">
+          <a:blip r:embed="rId2">
             <a:extLst>
               <a:ext uri="{28A0092B-C50C-407E-A947-70E740481C1C}">
                 <a14:useLocalDpi xmlns:a14="http://schemas.microsoft.com/office/drawing/2010/main" val="0"/>
@@ -11842,11 +10920,6 @@
         </p:spPr>
       </p:pic>
     </p:spTree>
-    <p:extLst>
-      <p:ext uri="{BB962C8B-B14F-4D97-AF65-F5344CB8AC3E}">
-        <p14:creationId xmlns:p14="http://schemas.microsoft.com/office/powerpoint/2010/main" val="863761402"/>
-      </p:ext>
-    </p:extLst>
   </p:cSld>
   <p:clrMapOvr>
     <a:overrideClrMapping bg1="lt1" tx1="dk1" bg2="lt2" tx2="dk2" accent1="accent1" accent2="accent2" accent3="accent3" accent4="accent4" accent5="accent5" accent6="accent6" hlink="hlink" folHlink="folHlink"/>
@@ -11917,6 +10990,7 @@
               <a:rPr lang="en-US" altLang="zh-CN" dirty="0"/>
               <a:t>MIUI</a:t>
             </a:r>
+            <a:endParaRPr lang="en-US" altLang="zh-CN" dirty="0"/>
           </a:p>
           <a:p>
             <a:pPr lvl="1"/>
@@ -11973,11 +11047,6 @@
         </p:txBody>
       </p:sp>
     </p:spTree>
-    <p:extLst>
-      <p:ext uri="{BB962C8B-B14F-4D97-AF65-F5344CB8AC3E}">
-        <p14:creationId xmlns:p14="http://schemas.microsoft.com/office/powerpoint/2010/main" val="3050146562"/>
-      </p:ext>
-    </p:extLst>
   </p:cSld>
   <p:clrMapOvr>
     <a:masterClrMapping/>
@@ -12027,24 +11096,22 @@
       </p:sp>
       <p:pic>
         <p:nvPicPr>
-          <p:cNvPr id="4" name="内容占位符 3"/>
+          <p:cNvPr id="5" name="图片 4"/>
           <p:cNvPicPr>
-            <a:picLocks noGrp="1" noChangeAspect="1"/>
+            <a:picLocks noChangeAspect="1"/>
           </p:cNvPicPr>
-          <p:nvPr>
-            <p:ph idx="1"/>
-          </p:nvPr>
+          <p:nvPr/>
         </p:nvPicPr>
         <p:blipFill>
-          <a:blip r:embed="rId2"/>
+          <a:blip r:embed="rId1"/>
           <a:stretch>
             <a:fillRect/>
           </a:stretch>
         </p:blipFill>
         <p:spPr>
           <a:xfrm>
-            <a:off x="1398587" y="2224881"/>
-            <a:ext cx="9677400" cy="3552825"/>
+            <a:off x="990600" y="1905000"/>
+            <a:ext cx="8505825" cy="3362325"/>
           </a:xfrm>
           <a:prstGeom prst="rect">
             <a:avLst/>
@@ -12052,11 +11119,6 @@
         </p:spPr>
       </p:pic>
     </p:spTree>
-    <p:extLst>
-      <p:ext uri="{BB962C8B-B14F-4D97-AF65-F5344CB8AC3E}">
-        <p14:creationId xmlns:p14="http://schemas.microsoft.com/office/powerpoint/2010/main" val="2475530123"/>
-      </p:ext>
-    </p:extLst>
   </p:cSld>
   <p:clrMapOvr>
     <a:masterClrMapping/>
@@ -12255,11 +11317,6 @@
         </p:txBody>
       </p:sp>
     </p:spTree>
-    <p:extLst>
-      <p:ext uri="{BB962C8B-B14F-4D97-AF65-F5344CB8AC3E}">
-        <p14:creationId xmlns:p14="http://schemas.microsoft.com/office/powerpoint/2010/main" val="1387245916"/>
-      </p:ext>
-    </p:extLst>
   </p:cSld>
   <p:clrMapOvr>
     <a:masterClrMapping/>
@@ -12833,7 +11890,7 @@
     <p:bg>
       <p:bgPr>
         <a:blipFill dpi="0" rotWithShape="1">
-          <a:blip r:embed="rId2">
+          <a:blip r:embed="rId1">
             <a:lum/>
           </a:blip>
           <a:srcRect/>
@@ -12860,26 +11917,11 @@
       </p:grpSpPr>
       <p:sp>
         <p:nvSpPr>
-          <p:cNvPr id="10" name="Rectangle 9">
-            <a:extLst>
-              <a:ext uri="{FF2B5EF4-FFF2-40B4-BE49-F238E27FC236}">
-                <a16:creationId xmlns:a16="http://schemas.microsoft.com/office/drawing/2014/main" id="{619B3503-D505-49AA-97C1-B299D58DB436}"/>
-              </a:ext>
-              <a:ext uri="{C183D7F6-B498-43B3-948B-1728B52AA6E4}">
-                <adec:decorative xmlns:adec="http://schemas.microsoft.com/office/drawing/2017/decorative" val="1"/>
-              </a:ext>
-            </a:extLst>
-          </p:cNvPr>
+          <p:cNvPr id="10" name="Rectangle 9"/>
           <p:cNvSpPr>
             <a:spLocks noGrp="1" noRot="1" noChangeAspect="1" noMove="1" noResize="1" noEditPoints="1" noAdjustHandles="1" noChangeArrowheads="1" noChangeShapeType="1" noTextEdit="1"/>
           </p:cNvSpPr>
-          <p:nvPr>
-            <p:extLst>
-              <p:ext uri="{386F3935-93C4-4BCD-93E2-E3B085C9AB24}">
-                <p16:designElem xmlns:p16="http://schemas.microsoft.com/office/powerpoint/2015/main" val="1"/>
-              </p:ext>
-            </p:extLst>
-          </p:nvPr>
+          <p:nvPr/>
         </p:nvSpPr>
         <p:spPr>
           <a:xfrm>
@@ -12932,26 +11974,11 @@
       </p:sp>
       <p:sp useBgFill="1">
         <p:nvSpPr>
-          <p:cNvPr id="12" name="Rectangle 11">
-            <a:extLst>
-              <a:ext uri="{FF2B5EF4-FFF2-40B4-BE49-F238E27FC236}">
-                <a16:creationId xmlns:a16="http://schemas.microsoft.com/office/drawing/2014/main" id="{E39A2319-946A-4C65-9B7C-1F86E9B1B57C}"/>
-              </a:ext>
-              <a:ext uri="{C183D7F6-B498-43B3-948B-1728B52AA6E4}">
-                <adec:decorative xmlns:adec="http://schemas.microsoft.com/office/drawing/2017/decorative" val="1"/>
-              </a:ext>
-            </a:extLst>
-          </p:cNvPr>
+          <p:cNvPr id="12" name="Rectangle 11"/>
           <p:cNvSpPr>
             <a:spLocks noGrp="1" noRot="1" noChangeAspect="1" noMove="1" noResize="1" noEditPoints="1" noAdjustHandles="1" noChangeArrowheads="1" noChangeShapeType="1" noTextEdit="1"/>
           </p:cNvSpPr>
-          <p:nvPr>
-            <p:extLst>
-              <p:ext uri="{386F3935-93C4-4BCD-93E2-E3B085C9AB24}">
-                <p16:designElem xmlns:p16="http://schemas.microsoft.com/office/powerpoint/2015/main" val="1"/>
-              </p:ext>
-            </p:extLst>
-          </p:nvPr>
+          <p:nvPr/>
         </p:nvSpPr>
         <p:spPr>
           <a:xfrm>
@@ -13047,7 +12074,7 @@
             </a:r>
             <a:r>
               <a:rPr lang="en-US" sz="3600" dirty="0"/>
-              <a:t>15.3</a:t>
+              <a:t>15.6</a:t>
             </a:r>
             <a:br>
               <a:rPr lang="en-US" sz="3600" dirty="0"/>
@@ -13062,23 +12089,12 @@
       </p:sp>
       <p:graphicFrame>
         <p:nvGraphicFramePr>
-          <p:cNvPr id="5" name="内容占位符 2">
-            <a:extLst>
-              <a:ext uri="{FF2B5EF4-FFF2-40B4-BE49-F238E27FC236}">
-                <a16:creationId xmlns:a16="http://schemas.microsoft.com/office/drawing/2014/main" id="{0ED1ADDF-3378-4F5B-BF85-423BF8454ECB}"/>
-              </a:ext>
-            </a:extLst>
-          </p:cNvPr>
+          <p:cNvPr id="5" name="内容占位符 2"/>
           <p:cNvGraphicFramePr>
             <a:graphicFrameLocks noGrp="1"/>
           </p:cNvGraphicFramePr>
           <p:nvPr>
             <p:ph idx="1"/>
-            <p:extLst>
-              <p:ext uri="{D42A27DB-BD31-4B8C-83A1-F6EECF244321}">
-                <p14:modId xmlns:p14="http://schemas.microsoft.com/office/powerpoint/2010/main" val="2145813688"/>
-              </p:ext>
-            </p:extLst>
           </p:nvPr>
         </p:nvGraphicFramePr>
         <p:xfrm>
@@ -13087,16 +12103,11 @@
         </p:xfrm>
         <a:graphic>
           <a:graphicData uri="http://schemas.openxmlformats.org/drawingml/2006/diagram">
-            <dgm:relIds xmlns:dgm="http://schemas.openxmlformats.org/drawingml/2006/diagram" xmlns:r="http://schemas.openxmlformats.org/officeDocument/2006/relationships" r:dm="rId3" r:lo="rId4" r:qs="rId5" r:cs="rId6"/>
+            <dgm:relIds xmlns:dgm="http://schemas.openxmlformats.org/drawingml/2006/diagram" xmlns:r="http://schemas.openxmlformats.org/officeDocument/2006/relationships" r:dm="rId2" r:lo="rId3" r:qs="rId4" r:cs="rId5"/>
           </a:graphicData>
         </a:graphic>
       </p:graphicFrame>
     </p:spTree>
-    <p:extLst>
-      <p:ext uri="{BB962C8B-B14F-4D97-AF65-F5344CB8AC3E}">
-        <p14:creationId xmlns:p14="http://schemas.microsoft.com/office/powerpoint/2010/main" val="3042072489"/>
-      </p:ext>
-    </p:extLst>
   </p:cSld>
   <p:clrMapOvr>
     <a:masterClrMapping/>
@@ -13131,26 +12142,11 @@
       </p:grpSpPr>
       <p:sp>
         <p:nvSpPr>
-          <p:cNvPr id="12" name="Rectangle 11">
-            <a:extLst>
-              <a:ext uri="{FF2B5EF4-FFF2-40B4-BE49-F238E27FC236}">
-                <a16:creationId xmlns:a16="http://schemas.microsoft.com/office/drawing/2014/main" id="{05325879-C4B2-475E-B853-DC8F21A63351}"/>
-              </a:ext>
-              <a:ext uri="{C183D7F6-B498-43B3-948B-1728B52AA6E4}">
-                <adec:decorative xmlns:adec="http://schemas.microsoft.com/office/drawing/2017/decorative" val="1"/>
-              </a:ext>
-            </a:extLst>
-          </p:cNvPr>
+          <p:cNvPr id="12" name="Rectangle 11"/>
           <p:cNvSpPr>
             <a:spLocks noGrp="1" noRot="1" noChangeAspect="1" noMove="1" noResize="1" noEditPoints="1" noAdjustHandles="1" noChangeArrowheads="1" noChangeShapeType="1" noTextEdit="1"/>
           </p:cNvSpPr>
-          <p:nvPr>
-            <p:extLst>
-              <p:ext uri="{386F3935-93C4-4BCD-93E2-E3B085C9AB24}">
-                <p16:designElem xmlns:p16="http://schemas.microsoft.com/office/powerpoint/2015/main" val="1"/>
-              </p:ext>
-            </p:extLst>
-          </p:nvPr>
+          <p:nvPr/>
         </p:nvSpPr>
         <p:spPr>
           <a:xfrm>
@@ -13194,26 +12190,11 @@
       </p:sp>
       <p:sp>
         <p:nvSpPr>
-          <p:cNvPr id="14" name="Rectangle 13">
-            <a:extLst>
-              <a:ext uri="{FF2B5EF4-FFF2-40B4-BE49-F238E27FC236}">
-                <a16:creationId xmlns:a16="http://schemas.microsoft.com/office/drawing/2014/main" id="{012C085F-3B19-420D-902A-B55695F5036C}"/>
-              </a:ext>
-              <a:ext uri="{C183D7F6-B498-43B3-948B-1728B52AA6E4}">
-                <adec:decorative xmlns:adec="http://schemas.microsoft.com/office/drawing/2017/decorative" val="1"/>
-              </a:ext>
-            </a:extLst>
-          </p:cNvPr>
+          <p:cNvPr id="14" name="Rectangle 13"/>
           <p:cNvSpPr>
             <a:spLocks noGrp="1" noRot="1" noChangeAspect="1" noMove="1" noResize="1" noEditPoints="1" noAdjustHandles="1" noChangeArrowheads="1" noChangeShapeType="1" noTextEdit="1"/>
           </p:cNvSpPr>
-          <p:nvPr>
-            <p:extLst>
-              <p:ext uri="{386F3935-93C4-4BCD-93E2-E3B085C9AB24}">
-                <p16:designElem xmlns:p16="http://schemas.microsoft.com/office/powerpoint/2015/main" val="1"/>
-              </p:ext>
-            </p:extLst>
-          </p:nvPr>
+          <p:nvPr/>
         </p:nvSpPr>
         <p:spPr>
           <a:xfrm>
@@ -13224,7 +12205,7 @@
             <a:avLst/>
           </a:prstGeom>
           <a:blipFill>
-            <a:blip r:embed="rId2"/>
+            <a:blip r:embed="rId1"/>
             <a:stretch>
               <a:fillRect r="-164004"/>
             </a:stretch>
@@ -13267,13 +12248,7 @@
       </p:sp>
       <p:sp>
         <p:nvSpPr>
-          <p:cNvPr id="2" name="Title 1">
-            <a:extLst>
-              <a:ext uri="{FF2B5EF4-FFF2-40B4-BE49-F238E27FC236}">
-                <a16:creationId xmlns:a16="http://schemas.microsoft.com/office/drawing/2014/main" id="{39197949-D1BF-4037-859E-2EACEEF6B34B}"/>
-              </a:ext>
-            </a:extLst>
-          </p:cNvPr>
+          <p:cNvPr id="2" name="Title 1"/>
           <p:cNvSpPr>
             <a:spLocks noGrp="1"/>
           </p:cNvSpPr>
@@ -13375,13 +12350,7 @@
       </p:sp>
       <p:sp>
         <p:nvSpPr>
-          <p:cNvPr id="9" name="Content Placeholder 8">
-            <a:extLst>
-              <a:ext uri="{FF2B5EF4-FFF2-40B4-BE49-F238E27FC236}">
-                <a16:creationId xmlns:a16="http://schemas.microsoft.com/office/drawing/2014/main" id="{4C94D337-3D03-46C7-AB8E-4C2084C7AED7}"/>
-              </a:ext>
-            </a:extLst>
-          </p:cNvPr>
+          <p:cNvPr id="9" name="Content Placeholder 8"/>
           <p:cNvSpPr>
             <a:spLocks noGrp="1"/>
           </p:cNvSpPr>
@@ -13441,20 +12410,14 @@
       </p:sp>
       <p:pic>
         <p:nvPicPr>
-          <p:cNvPr id="7" name="Content Placeholder 3">
-            <a:extLst>
-              <a:ext uri="{FF2B5EF4-FFF2-40B4-BE49-F238E27FC236}">
-                <a16:creationId xmlns:a16="http://schemas.microsoft.com/office/drawing/2014/main" id="{8BBB02D2-2448-42A3-BE4B-B02087411AC4}"/>
-              </a:ext>
-            </a:extLst>
-          </p:cNvPr>
+          <p:cNvPr id="7" name="Content Placeholder 3"/>
           <p:cNvPicPr>
             <a:picLocks noChangeAspect="1"/>
           </p:cNvPicPr>
           <p:nvPr/>
         </p:nvPicPr>
         <p:blipFill>
-          <a:blip r:embed="rId3"/>
+          <a:blip r:embed="rId2"/>
           <a:stretch>
             <a:fillRect/>
           </a:stretch>
@@ -13470,11 +12433,6 @@
         </p:spPr>
       </p:pic>
     </p:spTree>
-    <p:extLst>
-      <p:ext uri="{BB962C8B-B14F-4D97-AF65-F5344CB8AC3E}">
-        <p14:creationId xmlns:p14="http://schemas.microsoft.com/office/powerpoint/2010/main" val="2860342258"/>
-      </p:ext>
-    </p:extLst>
   </p:cSld>
   <p:clrMapOvr>
     <a:overrideClrMapping bg1="lt1" tx1="dk1" bg2="lt2" tx2="dk2" accent1="accent1" accent2="accent2" accent3="accent3" accent4="accent4" accent5="accent5" accent6="accent6" hlink="hlink" folHlink="folHlink"/>
@@ -13539,7 +12497,7 @@
           </a:bodyPr>
           <a:lstStyle/>
           <a:p>
-            <a:pPr marL="118872" indent="0">
+            <a:pPr marL="118745" indent="0">
               <a:buNone/>
             </a:pPr>
             <a:r>
@@ -13554,6 +12512,7 @@
               <a:rPr lang="zh-CN" altLang="en-US" dirty="0"/>
               <a:t>种。</a:t>
             </a:r>
+            <a:endParaRPr lang="zh-CN" altLang="en-US" dirty="0"/>
           </a:p>
           <a:p>
             <a:r>
@@ -13621,6 +12580,7 @@
               <a:rPr lang="zh-CN" altLang="en-US" dirty="0"/>
               <a:t>型</a:t>
             </a:r>
+            <a:endParaRPr lang="zh-CN" altLang="en-US" dirty="0"/>
           </a:p>
         </p:txBody>
       </p:sp>
@@ -14068,6 +13028,7 @@
               <a:rPr lang="en-US" dirty="0"/>
               <a:t>Beta1、Beta2、Beta3 2 …… </a:t>
             </a:r>
+            <a:endParaRPr lang="en-US" dirty="0"/>
           </a:p>
           <a:p>
             <a:pPr>
@@ -14199,6 +13160,7 @@
               <a:rPr lang="en-US" dirty="0"/>
               <a:t> To Market）。</a:t>
             </a:r>
+            <a:endParaRPr lang="en-US" dirty="0"/>
           </a:p>
           <a:p>
             <a:pPr>
@@ -14258,6 +13220,7 @@
               <a:rPr lang="en-US" dirty="0"/>
               <a:t>Release To Store。</a:t>
             </a:r>
+            <a:endParaRPr lang="en-US" dirty="0"/>
           </a:p>
           <a:p>
             <a:pPr>
@@ -14270,11 +13233,6 @@
         </p:txBody>
       </p:sp>
     </p:spTree>
-    <p:extLst>
-      <p:ext uri="{BB962C8B-B14F-4D97-AF65-F5344CB8AC3E}">
-        <p14:creationId xmlns:p14="http://schemas.microsoft.com/office/powerpoint/2010/main" val="2017066462"/>
-      </p:ext>
-    </p:extLst>
   </p:cSld>
   <p:clrMapOvr>
     <a:masterClrMapping/>
@@ -14333,7 +13291,7 @@
           </p:nvPr>
         </p:nvPicPr>
         <p:blipFill>
-          <a:blip r:embed="rId2"/>
+          <a:blip r:embed="rId1"/>
           <a:stretch>
             <a:fillRect/>
           </a:stretch>
@@ -14349,11 +13307,6 @@
         </p:spPr>
       </p:pic>
     </p:spTree>
-    <p:extLst>
-      <p:ext uri="{BB962C8B-B14F-4D97-AF65-F5344CB8AC3E}">
-        <p14:creationId xmlns:p14="http://schemas.microsoft.com/office/powerpoint/2010/main" val="4228803550"/>
-      </p:ext>
-    </p:extLst>
   </p:cSld>
   <p:clrMapOvr>
     <a:masterClrMapping/>
@@ -14422,7 +13375,7 @@
           </a:bodyPr>
           <a:lstStyle/>
           <a:p>
-            <a:pPr marL="118872" indent="0">
+            <a:pPr marL="118745" indent="0">
               <a:buNone/>
             </a:pPr>
             <a:r>
@@ -14437,6 +13390,7 @@
               <a:rPr lang="zh-CN" altLang="en-US" dirty="0"/>
               <a:t>，会诊小组要决定采取下面哪一种行动：</a:t>
             </a:r>
+            <a:endParaRPr lang="zh-CN" altLang="en-US" dirty="0"/>
           </a:p>
           <a:p>
             <a:r>
@@ -14496,6 +13450,7 @@
               <a:rPr lang="zh-CN" altLang="en-US" dirty="0"/>
               <a:t>）。如果我们的软件是真正解决用户问题的，是有价值的，那它一定 会有下一个版本。</a:t>
             </a:r>
+            <a:endParaRPr lang="zh-CN" altLang="en-US" dirty="0"/>
           </a:p>
           <a:p>
             <a:endParaRPr lang="en-US" dirty="0"/>
@@ -14503,11 +13458,6 @@
         </p:txBody>
       </p:sp>
     </p:spTree>
-    <p:extLst>
-      <p:ext uri="{BB962C8B-B14F-4D97-AF65-F5344CB8AC3E}">
-        <p14:creationId xmlns:p14="http://schemas.microsoft.com/office/powerpoint/2010/main" val="2508900359"/>
-      </p:ext>
-    </p:extLst>
   </p:cSld>
   <p:clrMapOvr>
     <a:masterClrMapping/>
@@ -14579,6 +13529,7 @@
               <a:rPr lang="en-US" altLang="zh-CN" dirty="0"/>
               <a:t>Design Change Request</a:t>
             </a:r>
+            <a:endParaRPr lang="en-US" altLang="zh-CN" dirty="0"/>
           </a:p>
           <a:p>
             <a:pPr lvl="1"/>
@@ -14593,6 +13544,7 @@
               <a:rPr lang="en-US" altLang="zh-CN" dirty="0"/>
               <a:t>ZBB</a:t>
             </a:r>
+            <a:endParaRPr lang="en-US" altLang="zh-CN" dirty="0"/>
           </a:p>
           <a:p>
             <a:endParaRPr lang="en-US" dirty="0"/>
@@ -14600,11 +13552,6 @@
         </p:txBody>
       </p:sp>
     </p:spTree>
-    <p:extLst>
-      <p:ext uri="{BB962C8B-B14F-4D97-AF65-F5344CB8AC3E}">
-        <p14:creationId xmlns:p14="http://schemas.microsoft.com/office/powerpoint/2010/main" val="1116994476"/>
-      </p:ext>
-    </p:extLst>
   </p:cSld>
   <p:clrMapOvr>
     <a:masterClrMapping/>
@@ -14631,13 +13578,7 @@
       </p:grpSpPr>
       <p:sp>
         <p:nvSpPr>
-          <p:cNvPr id="2" name="Title 1">
-            <a:extLst>
-              <a:ext uri="{FF2B5EF4-FFF2-40B4-BE49-F238E27FC236}">
-                <a16:creationId xmlns:a16="http://schemas.microsoft.com/office/drawing/2014/main" id="{26A8403C-0012-4BF6-BFFD-FA4FA2733DE6}"/>
-              </a:ext>
-            </a:extLst>
-          </p:cNvPr>
+          <p:cNvPr id="2" name="Title 1"/>
           <p:cNvSpPr>
             <a:spLocks noGrp="1"/>
           </p:cNvSpPr>
@@ -14664,13 +13605,7 @@
       </p:sp>
       <p:pic>
         <p:nvPicPr>
-          <p:cNvPr id="4" name="图片 3">
-            <a:extLst>
-              <a:ext uri="{FF2B5EF4-FFF2-40B4-BE49-F238E27FC236}">
-                <a16:creationId xmlns:a16="http://schemas.microsoft.com/office/drawing/2014/main" id="{74464EA0-D445-47AF-A145-A327C85158CE}"/>
-              </a:ext>
-            </a:extLst>
-          </p:cNvPr>
+          <p:cNvPr id="4" name="图片 3"/>
           <p:cNvPicPr>
             <a:picLocks noGrp="1" noChangeAspect="1"/>
           </p:cNvPicPr>
@@ -14679,7 +13614,7 @@
           </p:nvPr>
         </p:nvPicPr>
         <p:blipFill>
-          <a:blip r:embed="rId2"/>
+          <a:blip r:embed="rId1"/>
           <a:stretch>
             <a:fillRect/>
           </a:stretch>
@@ -14695,11 +13630,6 @@
         </p:spPr>
       </p:pic>
     </p:spTree>
-    <p:extLst>
-      <p:ext uri="{BB962C8B-B14F-4D97-AF65-F5344CB8AC3E}">
-        <p14:creationId xmlns:p14="http://schemas.microsoft.com/office/powerpoint/2010/main" val="3782792723"/>
-      </p:ext>
-    </p:extLst>
   </p:cSld>
   <p:clrMapOvr>
     <a:masterClrMapping/>
@@ -14726,13 +13656,7 @@
       </p:grpSpPr>
       <p:sp>
         <p:nvSpPr>
-          <p:cNvPr id="2" name="Title 1">
-            <a:extLst>
-              <a:ext uri="{FF2B5EF4-FFF2-40B4-BE49-F238E27FC236}">
-                <a16:creationId xmlns:a16="http://schemas.microsoft.com/office/drawing/2014/main" id="{B8DDFB82-AD2B-4C72-81C5-40F8267CF3ED}"/>
-              </a:ext>
-            </a:extLst>
-          </p:cNvPr>
+          <p:cNvPr id="2" name="Title 1"/>
           <p:cNvSpPr>
             <a:spLocks noGrp="1"/>
           </p:cNvSpPr>
@@ -14755,13 +13679,7 @@
       </p:sp>
       <p:sp>
         <p:nvSpPr>
-          <p:cNvPr id="3" name="Content Placeholder 2">
-            <a:extLst>
-              <a:ext uri="{FF2B5EF4-FFF2-40B4-BE49-F238E27FC236}">
-                <a16:creationId xmlns:a16="http://schemas.microsoft.com/office/drawing/2014/main" id="{5C8E06AC-5F75-42C6-8B52-B8CEF026D01E}"/>
-              </a:ext>
-            </a:extLst>
-          </p:cNvPr>
+          <p:cNvPr id="3" name="Content Placeholder 2"/>
           <p:cNvSpPr>
             <a:spLocks noGrp="1"/>
           </p:cNvSpPr>
@@ -14779,11 +13697,6 @@
         </p:txBody>
       </p:sp>
     </p:spTree>
-    <p:extLst>
-      <p:ext uri="{BB962C8B-B14F-4D97-AF65-F5344CB8AC3E}">
-        <p14:creationId xmlns:p14="http://schemas.microsoft.com/office/powerpoint/2010/main" val="511780385"/>
-      </p:ext>
-    </p:extLst>
   </p:cSld>
   <p:clrMapOvr>
     <a:masterClrMapping/>
@@ -14810,13 +13723,7 @@
       </p:grpSpPr>
       <p:sp>
         <p:nvSpPr>
-          <p:cNvPr id="2" name="Title 1">
-            <a:extLst>
-              <a:ext uri="{FF2B5EF4-FFF2-40B4-BE49-F238E27FC236}">
-                <a16:creationId xmlns:a16="http://schemas.microsoft.com/office/drawing/2014/main" id="{C016E33A-9643-437A-917D-9AB724D91CC3}"/>
-              </a:ext>
-            </a:extLst>
-          </p:cNvPr>
+          <p:cNvPr id="2" name="Title 1"/>
           <p:cNvSpPr>
             <a:spLocks noGrp="1"/>
           </p:cNvSpPr>
@@ -14839,13 +13746,7 @@
       </p:sp>
       <p:pic>
         <p:nvPicPr>
-          <p:cNvPr id="4" name="Content Placeholder 3">
-            <a:extLst>
-              <a:ext uri="{FF2B5EF4-FFF2-40B4-BE49-F238E27FC236}">
-                <a16:creationId xmlns:a16="http://schemas.microsoft.com/office/drawing/2014/main" id="{F9D376E7-E345-417D-AE49-E6303AD304C2}"/>
-              </a:ext>
-            </a:extLst>
-          </p:cNvPr>
+          <p:cNvPr id="4" name="Content Placeholder 3"/>
           <p:cNvPicPr>
             <a:picLocks noGrp="1" noChangeAspect="1"/>
           </p:cNvPicPr>
@@ -14854,7 +13755,7 @@
           </p:nvPr>
         </p:nvPicPr>
         <p:blipFill>
-          <a:blip r:embed="rId2"/>
+          <a:blip r:embed="rId1"/>
           <a:stretch>
             <a:fillRect/>
           </a:stretch>
@@ -14870,11 +13771,6 @@
         </p:spPr>
       </p:pic>
     </p:spTree>
-    <p:extLst>
-      <p:ext uri="{BB962C8B-B14F-4D97-AF65-F5344CB8AC3E}">
-        <p14:creationId xmlns:p14="http://schemas.microsoft.com/office/powerpoint/2010/main" val="3156515846"/>
-      </p:ext>
-    </p:extLst>
   </p:cSld>
   <p:clrMapOvr>
     <a:masterClrMapping/>
@@ -15073,11 +13969,9 @@
       </a:bgFillStyleLst>
     </a:fmtScheme>
   </a:themeElements>
-  <a:objectDefaults/>
-  <a:extraClrSchemeLst/>
   <a:extLst>
     <a:ext uri="{05A4C25C-085E-4340-85A3-A5531E510DB2}">
-      <thm15:themeFamily xmlns:thm15="http://schemas.microsoft.com/office/thememl/2012/main" name="Depth" id="{7BEAFC2A-325C-49C4-AC08-2B765DA903F9}" vid="{1735E755-43E6-43AA-ABA2-C989ECC79AF5}"/>
+      <thm15:themeFamily xmlns:thm15="http://schemas.microsoft.com/office/thememl/2012/main" name="Office Theme" id="{62F939B6-93AF-4DB8-9C6B-D6C7DFDC589F}" vid="{4A3C46E8-61CC-4603-A589-7422A47A8E4A}"/>
     </a:ext>
   </a:extLst>
 </a:theme>
@@ -15361,8 +14255,11 @@
       </a:bgFillStyleLst>
     </a:fmtScheme>
   </a:themeElements>
-  <a:objectDefaults/>
-  <a:extraClrSchemeLst/>
+  <a:extLst>
+    <a:ext uri="{05A4C25C-085E-4340-85A3-A5531E510DB2}">
+      <thm15:themeFamily xmlns:thm15="http://schemas.microsoft.com/office/thememl/2012/main" name="Office Theme" id="{62F939B6-93AF-4DB8-9C6B-D6C7DFDC589F}" vid="{4A3C46E8-61CC-4603-A589-7422A47A8E4A}"/>
+    </a:ext>
+  </a:extLst>
 </a:theme>
 </file>
 
@@ -15497,33 +14394,18 @@
 
 <file path=customXml/itemProps1.xml><?xml version="1.0" encoding="utf-8"?>
 <ds:datastoreItem xmlns:ds="http://schemas.openxmlformats.org/officeDocument/2006/customXml" ds:itemID="{0FBAD3CE-F083-4C4D-9639-2A686804FC72}">
-  <ds:schemaRefs>
-    <ds:schemaRef ds:uri="http://schemas.microsoft.com/office/2006/metadata/contentType"/>
-    <ds:schemaRef ds:uri="http://schemas.microsoft.com/office/2006/metadata/properties/metaAttributes"/>
-    <ds:schemaRef ds:uri="http://www.w3.org/2001/XMLSchema"/>
-    <ds:schemaRef ds:uri="http://schemas.microsoft.com/office/2006/metadata/properties"/>
-    <ds:schemaRef ds:uri="http://schemas.openxmlformats.org/package/2006/metadata/core-properties"/>
-    <ds:schemaRef ds:uri="http://purl.org/dc/elements/1.1/"/>
-    <ds:schemaRef ds:uri="http://purl.org/dc/terms/"/>
-    <ds:schemaRef ds:uri="http://schemas.microsoft.com/internal/obd"/>
-    <ds:schemaRef ds:uri="http://schemas.microsoft.com/office/infopath/2007/PartnerControls"/>
-  </ds:schemaRefs>
+  <ds:schemaRefs/>
 </ds:datastoreItem>
 </file>
 
 <file path=customXml/itemProps2.xml><?xml version="1.0" encoding="utf-8"?>
 <ds:datastoreItem xmlns:ds="http://schemas.openxmlformats.org/officeDocument/2006/customXml" ds:itemID="{B59B624C-3232-4AA7-B231-042BE14D924C}">
-  <ds:schemaRefs>
-    <ds:schemaRef ds:uri="http://schemas.microsoft.com/sharepoint/v3/contenttype/forms"/>
-  </ds:schemaRefs>
+  <ds:schemaRefs/>
 </ds:datastoreItem>
 </file>
 
 <file path=customXml/itemProps3.xml><?xml version="1.0" encoding="utf-8"?>
 <ds:datastoreItem xmlns:ds="http://schemas.openxmlformats.org/officeDocument/2006/customXml" ds:itemID="{5C132C8A-B094-42C9-8FEB-6C14EB442EF6}">
-  <ds:schemaRefs>
-    <ds:schemaRef ds:uri="http://schemas.microsoft.com/office/2006/metadata/properties"/>
-    <ds:schemaRef ds:uri="http://schemas.microsoft.com/office/infopath/2007/PartnerControls"/>
-  </ds:schemaRefs>
+  <ds:schemaRefs/>
 </ds:datastoreItem>
 </file>